--- a/output/wordlabs-ance-suffix-3day.pptx
+++ b/output/wordlabs-ance-suffix-3day.pptx
@@ -6040,7 +6040,7 @@
                 <a:ea typeface="Calibri" pitchFamily="34" charset="-122"/>
                 <a:cs typeface="Calibri" pitchFamily="34" charset="-120"/>
               </a:rPr>
-              <a:t>Her outstanding </a:t>
+              <a:t>The magician's </a:t>
             </a:r>
             <a:pPr algn="l" indent="0" marL="0">
               <a:buNone/>
@@ -6071,7 +6071,7 @@
                 <a:ea typeface="Calibri" pitchFamily="34" charset="-122"/>
                 <a:cs typeface="Calibri" pitchFamily="34" charset="-120"/>
               </a:rPr>
-              <a:t> filled the audience with great </a:t>
+              <a:t> filled the </a:t>
             </a:r>
             <a:pPr algn="l" indent="0" marL="0">
               <a:buNone/>
@@ -6088,7 +6088,7 @@
                 <a:ea typeface="Calibri" pitchFamily="34" charset="-122"/>
                 <a:cs typeface="Calibri" pitchFamily="34" charset="-120"/>
               </a:rPr>
-              <a:t>excitement</a:t>
+              <a:t>audience</a:t>
             </a:r>
             <a:pPr algn="l" indent="0" marL="0">
               <a:buNone/>
@@ -6102,7 +6102,7 @@
                 <a:ea typeface="Calibri" pitchFamily="34" charset="-122"/>
                 <a:cs typeface="Calibri" pitchFamily="34" charset="-120"/>
               </a:rPr>
-              <a:t>.</a:t>
+              <a:t> with wonder and excitement.</a:t>
             </a:r>
             <a:endParaRPr lang="en-US" sz="1800" dirty="0"/>
           </a:p>
@@ -6385,7 +6385,7 @@
                 <a:ea typeface="Trebuchet MS" pitchFamily="34" charset="-122"/>
                 <a:cs typeface="Trebuchet MS" pitchFamily="34" charset="-120"/>
               </a:rPr>
-              <a:t>excitement</a:t>
+              <a:t>audience</a:t>
             </a:r>
             <a:endParaRPr lang="en-US" sz="1400" dirty="0"/>
           </a:p>
@@ -7860,7 +7860,7 @@
                 <a:ea typeface="Calibri" pitchFamily="34" charset="-122"/>
                 <a:cs typeface="Calibri" pitchFamily="34" charset="-120"/>
               </a:rPr>
-              <a:t>through, thoroughly</a:t>
+              <a:t>through, completely</a:t>
             </a:r>
             <a:endParaRPr lang="en-US" sz="850" dirty="0"/>
           </a:p>
@@ -7972,7 +7972,7 @@
                 <a:ea typeface="Calibri" pitchFamily="34" charset="-122"/>
                 <a:cs typeface="Calibri" pitchFamily="34" charset="-120"/>
               </a:rPr>
-              <a:t>shape, carry out</a:t>
+              <a:t>shape, do</a:t>
             </a:r>
             <a:endParaRPr lang="en-US" sz="850" dirty="0"/>
           </a:p>
@@ -8957,7 +8957,7 @@
                 <a:ea typeface="Calibri" pitchFamily="34" charset="-122"/>
                 <a:cs typeface="Calibri" pitchFamily="34" charset="-120"/>
               </a:rPr>
-              <a:t>through, thoroughly</a:t>
+              <a:t>through, completely</a:t>
             </a:r>
             <a:endParaRPr lang="en-US" sz="850" dirty="0"/>
           </a:p>
@@ -9069,7 +9069,7 @@
                 <a:ea typeface="Calibri" pitchFamily="34" charset="-122"/>
                 <a:cs typeface="Calibri" pitchFamily="34" charset="-120"/>
               </a:rPr>
-              <a:t>shape, carry out</a:t>
+              <a:t>shape, do</a:t>
             </a:r>
             <a:endParaRPr lang="en-US" sz="850" dirty="0"/>
           </a:p>
@@ -10291,7 +10291,7 @@
                 <a:ea typeface="Calibri" pitchFamily="34" charset="-122"/>
                 <a:cs typeface="Calibri" pitchFamily="34" charset="-120"/>
               </a:rPr>
-              <a:t>through, thoroughly</a:t>
+              <a:t>through, completely</a:t>
             </a:r>
             <a:endParaRPr lang="en-US" sz="850" dirty="0"/>
           </a:p>
@@ -10403,7 +10403,7 @@
                 <a:ea typeface="Calibri" pitchFamily="34" charset="-122"/>
                 <a:cs typeface="Calibri" pitchFamily="34" charset="-120"/>
               </a:rPr>
-              <a:t>shape, carry out</a:t>
+              <a:t>shape, do</a:t>
             </a:r>
             <a:endParaRPr lang="en-US" sz="850" dirty="0"/>
           </a:p>
@@ -11975,7 +11975,7 @@
                 <a:ea typeface="Trebuchet MS" pitchFamily="34" charset="-122"/>
                 <a:cs typeface="Trebuchet MS" pitchFamily="34" charset="-120"/>
               </a:rPr>
-              <a:t>excitement</a:t>
+              <a:t>audience</a:t>
             </a:r>
             <a:endParaRPr lang="en-US" sz="2800" dirty="0"/>
           </a:p>
@@ -12802,7 +12802,7 @@
                 <a:ea typeface="Trebuchet MS" pitchFamily="34" charset="-122"/>
                 <a:cs typeface="Trebuchet MS" pitchFamily="34" charset="-120"/>
               </a:rPr>
-              <a:t>excitement</a:t>
+              <a:t>audience</a:t>
             </a:r>
             <a:endParaRPr lang="en-US" sz="2800" dirty="0"/>
           </a:p>
@@ -12882,7 +12882,7 @@
         </p:nvSpPr>
         <p:spPr>
           <a:xfrm>
-            <a:off x="2221992" y="2258568"/>
+            <a:off x="2938272" y="2258568"/>
             <a:ext cx="1828800" cy="292608"/>
           </a:xfrm>
           <a:prstGeom prst="rect">
@@ -12916,7 +12916,7 @@
         </p:nvSpPr>
         <p:spPr>
           <a:xfrm>
-            <a:off x="2221992" y="2258568"/>
+            <a:off x="2938272" y="2258568"/>
             <a:ext cx="1828800" cy="292608"/>
           </a:xfrm>
           <a:prstGeom prst="rect">
@@ -12941,7 +12941,7 @@
                 <a:ea typeface="Trebuchet MS" pitchFamily="34" charset="-122"/>
                 <a:cs typeface="Trebuchet MS" pitchFamily="34" charset="-120"/>
               </a:rPr>
-              <a:t>ex</a:t>
+              <a:t>audi</a:t>
             </a:r>
             <a:endParaRPr lang="en-US" sz="1300" dirty="0"/>
           </a:p>
@@ -12955,7 +12955,7 @@
         </p:nvSpPr>
         <p:spPr>
           <a:xfrm>
-            <a:off x="2221992" y="2569464"/>
+            <a:off x="2938272" y="2569464"/>
             <a:ext cx="1828800" cy="201168"/>
           </a:xfrm>
           <a:prstGeom prst="rect">
@@ -12980,7 +12980,7 @@
                 <a:ea typeface="Calibri" pitchFamily="34" charset="-122"/>
                 <a:cs typeface="Calibri" pitchFamily="34" charset="-120"/>
               </a:rPr>
-              <a:t>out</a:t>
+              <a:t>hear</a:t>
             </a:r>
             <a:endParaRPr lang="en-US" sz="850" dirty="0"/>
           </a:p>
@@ -12994,7 +12994,7 @@
         </p:nvSpPr>
         <p:spPr>
           <a:xfrm>
-            <a:off x="4370832" y="2258568"/>
+            <a:off x="5803392" y="2258568"/>
             <a:ext cx="1828800" cy="292608"/>
           </a:xfrm>
           <a:prstGeom prst="rect">
@@ -13028,7 +13028,7 @@
         </p:nvSpPr>
         <p:spPr>
           <a:xfrm>
-            <a:off x="4370832" y="2258568"/>
+            <a:off x="5803392" y="2258568"/>
             <a:ext cx="1828800" cy="292608"/>
           </a:xfrm>
           <a:prstGeom prst="rect">
@@ -13053,7 +13053,7 @@
                 <a:ea typeface="Trebuchet MS" pitchFamily="34" charset="-122"/>
                 <a:cs typeface="Trebuchet MS" pitchFamily="34" charset="-120"/>
               </a:rPr>
-              <a:t>cite</a:t>
+              <a:t>ence</a:t>
             </a:r>
             <a:endParaRPr lang="en-US" sz="1300" dirty="0"/>
           </a:p>
@@ -13067,7 +13067,7 @@
         </p:nvSpPr>
         <p:spPr>
           <a:xfrm>
-            <a:off x="4370832" y="2569464"/>
+            <a:off x="5803392" y="2569464"/>
             <a:ext cx="1828800" cy="201168"/>
           </a:xfrm>
           <a:prstGeom prst="rect">
@@ -13092,7 +13092,7 @@
                 <a:ea typeface="Calibri" pitchFamily="34" charset="-122"/>
                 <a:cs typeface="Calibri" pitchFamily="34" charset="-120"/>
               </a:rPr>
-              <a:t>to stir up</a:t>
+              <a:t>state or quality of</a:t>
             </a:r>
             <a:endParaRPr lang="en-US" sz="850" dirty="0"/>
           </a:p>
@@ -13106,30 +13106,23 @@
         </p:nvSpPr>
         <p:spPr>
           <a:xfrm>
-            <a:off x="6519672" y="2258568"/>
-            <a:ext cx="1828800" cy="292608"/>
+            <a:off x="365760" y="3273552"/>
+            <a:ext cx="1371600" cy="658368"/>
           </a:xfrm>
           <a:prstGeom prst="rect">
             <a:avLst>
-              <a:gd name="adj" fmla="val 25000"/>
+              <a:gd name="adj" fmla="val 8333"/>
             </a:avLst>
           </a:prstGeom>
           <a:solidFill>
-            <a:srgbClr val="FCE7F3"/>
-          </a:solidFill>
-          <a:ln w="19050">
-            <a:solidFill>
-              <a:srgbClr val="DB2777"/>
-            </a:solidFill>
-            <a:prstDash val="solid"/>
-          </a:ln>
-          <a:effectLst>
-            <a:outerShdw sx="100000" sy="100000" kx="0" ky="0" algn="bl" rotWithShape="0" blurRad="101600" dist="38100" dir="8100000">
-              <a:srgbClr val="000000">
-                <a:alpha val="12000"/>
-              </a:srgbClr>
-            </a:outerShdw>
-          </a:effectLst>
+            <a:srgbClr val="E2E8F0"/>
+          </a:solidFill>
+          <a:ln w="12700">
+            <a:solidFill>
+              <a:srgbClr val="E2E8F0"/>
+            </a:solidFill>
+            <a:prstDash val="solid"/>
+          </a:ln>
         </p:spPr>
       </p:sp>
       <p:sp>
@@ -13140,90 +13133,117 @@
         </p:nvSpPr>
         <p:spPr>
           <a:xfrm>
-            <a:off x="6519672" y="2258568"/>
-            <a:ext cx="1828800" cy="292608"/>
-          </a:xfrm>
-          <a:prstGeom prst="rect">
-            <a:avLst/>
-          </a:prstGeom>
-          <a:noFill/>
-          <a:ln/>
-        </p:spPr>
-        <p:txBody>
-          <a:bodyPr wrap="square" lIns="0" tIns="0" rIns="0" bIns="0" rtlCol="0" anchor="ctr"/>
-          <a:lstStyle/>
-          <a:p>
-            <a:pPr algn="ctr" indent="0" marL="0">
-              <a:buNone/>
-            </a:pPr>
-            <a:r>
-              <a:rPr lang="en-US" sz="1300" b="1" dirty="0">
-                <a:solidFill>
-                  <a:srgbClr val="9D174D"/>
+            <a:off x="365760" y="3273552"/>
+            <a:ext cx="1371600" cy="658368"/>
+          </a:xfrm>
+          <a:prstGeom prst="rect">
+            <a:avLst/>
+          </a:prstGeom>
+          <a:noFill/>
+          <a:ln/>
+        </p:spPr>
+        <p:txBody>
+          <a:bodyPr wrap="square" lIns="0" tIns="0" rIns="0" bIns="0" rtlCol="0" anchor="ctr"/>
+          <a:lstStyle/>
+          <a:p>
+            <a:pPr algn="ctr" indent="0" marL="0">
+              <a:buNone/>
+            </a:pPr>
+            <a:r>
+              <a:rPr lang="en-US" sz="1100" b="1" dirty="0">
+                <a:solidFill>
+                  <a:srgbClr val="475569"/>
                 </a:solidFill>
                 <a:latin typeface="Trebuchet MS" pitchFamily="34" charset="0"/>
                 <a:ea typeface="Trebuchet MS" pitchFamily="34" charset="-122"/>
                 <a:cs typeface="Trebuchet MS" pitchFamily="34" charset="-120"/>
               </a:rPr>
-              <a:t>ment</a:t>
-            </a:r>
-            <a:endParaRPr lang="en-US" sz="1300" dirty="0"/>
-          </a:p>
-        </p:txBody>
-      </p:sp>
-      <p:sp>
-        <p:nvSpPr>
-          <p:cNvPr id="24" name="Text 22"/>
-          <p:cNvSpPr/>
-          <p:nvPr/>
-        </p:nvSpPr>
-        <p:spPr>
-          <a:xfrm>
-            <a:off x="6519672" y="2569464"/>
-            <a:ext cx="1828800" cy="201168"/>
-          </a:xfrm>
-          <a:prstGeom prst="rect">
-            <a:avLst/>
-          </a:prstGeom>
-          <a:noFill/>
-          <a:ln/>
-        </p:spPr>
-        <p:txBody>
-          <a:bodyPr wrap="square" lIns="0" tIns="0" rIns="0" bIns="0" rtlCol="0" anchor="t"/>
-          <a:lstStyle/>
-          <a:p>
-            <a:pPr algn="ctr" indent="0" marL="0">
-              <a:buNone/>
-            </a:pPr>
-            <a:r>
-              <a:rPr lang="en-US" sz="850" dirty="0">
-                <a:solidFill>
-                  <a:srgbClr val="475569"/>
+              <a:t>Syllables</a:t>
+            </a:r>
+            <a:endParaRPr lang="en-US" sz="1100" dirty="0"/>
+          </a:p>
+        </p:txBody>
+      </p:sp>
+      <p:sp>
+        <p:nvSpPr>
+          <p:cNvPr id="24" name="Shape 22"/>
+          <p:cNvSpPr/>
+          <p:nvPr/>
+        </p:nvSpPr>
+        <p:spPr>
+          <a:xfrm>
+            <a:off x="1874520" y="3273552"/>
+            <a:ext cx="6903720" cy="658368"/>
+          </a:xfrm>
+          <a:prstGeom prst="rect">
+            <a:avLst>
+              <a:gd name="adj" fmla="val 8333"/>
+            </a:avLst>
+          </a:prstGeom>
+          <a:solidFill>
+            <a:srgbClr val="F8FAFC"/>
+          </a:solidFill>
+          <a:ln w="12700">
+            <a:solidFill>
+              <a:srgbClr val="E2E8F0"/>
+            </a:solidFill>
+            <a:prstDash val="dash"/>
+          </a:ln>
+        </p:spPr>
+      </p:sp>
+      <p:sp>
+        <p:nvSpPr>
+          <p:cNvPr id="25" name="Text 23"/>
+          <p:cNvSpPr/>
+          <p:nvPr/>
+        </p:nvSpPr>
+        <p:spPr>
+          <a:xfrm>
+            <a:off x="1874520" y="3273552"/>
+            <a:ext cx="6903720" cy="658368"/>
+          </a:xfrm>
+          <a:prstGeom prst="rect">
+            <a:avLst/>
+          </a:prstGeom>
+          <a:noFill/>
+          <a:ln/>
+        </p:spPr>
+        <p:txBody>
+          <a:bodyPr wrap="square" rtlCol="0" anchor="ctr"/>
+          <a:lstStyle/>
+          <a:p>
+            <a:pPr algn="ctr" indent="0" marL="0">
+              <a:buNone/>
+            </a:pPr>
+            <a:r>
+              <a:rPr lang="en-US" sz="1100" i="1" dirty="0">
+                <a:solidFill>
+                  <a:srgbClr val="CBD5E1"/>
                 </a:solidFill>
                 <a:latin typeface="Calibri" pitchFamily="34" charset="0"/>
                 <a:ea typeface="Calibri" pitchFamily="34" charset="-122"/>
                 <a:cs typeface="Calibri" pitchFamily="34" charset="-120"/>
               </a:rPr>
-              <a:t>state or result of</a:t>
-            </a:r>
-            <a:endParaRPr lang="en-US" sz="850" dirty="0"/>
-          </a:p>
-        </p:txBody>
-      </p:sp>
-      <p:sp>
-        <p:nvSpPr>
-          <p:cNvPr id="25" name="Shape 23"/>
-          <p:cNvSpPr/>
-          <p:nvPr/>
-        </p:nvSpPr>
-        <p:spPr>
-          <a:xfrm>
-            <a:off x="365760" y="3273552"/>
-            <a:ext cx="1371600" cy="658368"/>
+              <a:t>Write here...</a:t>
+            </a:r>
+            <a:endParaRPr lang="en-US" sz="1100" dirty="0"/>
+          </a:p>
+        </p:txBody>
+      </p:sp>
+      <p:sp>
+        <p:nvSpPr>
+          <p:cNvPr id="26" name="Shape 24"/>
+          <p:cNvSpPr/>
+          <p:nvPr/>
+        </p:nvSpPr>
+        <p:spPr>
+          <a:xfrm>
+            <a:off x="365760" y="4096512"/>
+            <a:ext cx="1371600" cy="804672"/>
           </a:xfrm>
           <a:prstGeom prst="rect">
             <a:avLst>
-              <a:gd name="adj" fmla="val 8333"/>
+              <a:gd name="adj" fmla="val 6818"/>
             </a:avLst>
           </a:prstGeom>
           <a:solidFill>
@@ -13239,14 +13259,14 @@
       </p:sp>
       <p:sp>
         <p:nvSpPr>
-          <p:cNvPr id="26" name="Text 24"/>
-          <p:cNvSpPr/>
-          <p:nvPr/>
-        </p:nvSpPr>
-        <p:spPr>
-          <a:xfrm>
-            <a:off x="365760" y="3273552"/>
-            <a:ext cx="1371600" cy="658368"/>
+          <p:cNvPr id="27" name="Text 25"/>
+          <p:cNvSpPr/>
+          <p:nvPr/>
+        </p:nvSpPr>
+        <p:spPr>
+          <a:xfrm>
+            <a:off x="365760" y="4096512"/>
+            <a:ext cx="1371600" cy="804672"/>
           </a:xfrm>
           <a:prstGeom prst="rect">
             <a:avLst/>
@@ -13270,7 +13290,7 @@
                 <a:ea typeface="Trebuchet MS" pitchFamily="34" charset="-122"/>
                 <a:cs typeface="Trebuchet MS" pitchFamily="34" charset="-120"/>
               </a:rPr>
-              <a:t>Syllables</a:t>
+              <a:t>Phonemes</a:t>
             </a:r>
             <a:endParaRPr lang="en-US" sz="1100" dirty="0"/>
           </a:p>
@@ -13278,80 +13298,14 @@
       </p:sp>
       <p:sp>
         <p:nvSpPr>
-          <p:cNvPr id="27" name="Shape 25"/>
-          <p:cNvSpPr/>
-          <p:nvPr/>
-        </p:nvSpPr>
-        <p:spPr>
-          <a:xfrm>
-            <a:off x="1874520" y="3273552"/>
-            <a:ext cx="6903720" cy="658368"/>
-          </a:xfrm>
-          <a:prstGeom prst="rect">
-            <a:avLst>
-              <a:gd name="adj" fmla="val 8333"/>
-            </a:avLst>
-          </a:prstGeom>
-          <a:solidFill>
-            <a:srgbClr val="F8FAFC"/>
-          </a:solidFill>
-          <a:ln w="12700">
-            <a:solidFill>
-              <a:srgbClr val="E2E8F0"/>
-            </a:solidFill>
-            <a:prstDash val="dash"/>
-          </a:ln>
-        </p:spPr>
-      </p:sp>
-      <p:sp>
-        <p:nvSpPr>
-          <p:cNvPr id="28" name="Text 26"/>
-          <p:cNvSpPr/>
-          <p:nvPr/>
-        </p:nvSpPr>
-        <p:spPr>
-          <a:xfrm>
-            <a:off x="1874520" y="3273552"/>
-            <a:ext cx="6903720" cy="658368"/>
-          </a:xfrm>
-          <a:prstGeom prst="rect">
-            <a:avLst/>
-          </a:prstGeom>
-          <a:noFill/>
-          <a:ln/>
-        </p:spPr>
-        <p:txBody>
-          <a:bodyPr wrap="square" rtlCol="0" anchor="ctr"/>
-          <a:lstStyle/>
-          <a:p>
-            <a:pPr algn="ctr" indent="0" marL="0">
-              <a:buNone/>
-            </a:pPr>
-            <a:r>
-              <a:rPr lang="en-US" sz="1100" i="1" dirty="0">
-                <a:solidFill>
-                  <a:srgbClr val="CBD5E1"/>
-                </a:solidFill>
-                <a:latin typeface="Calibri" pitchFamily="34" charset="0"/>
-                <a:ea typeface="Calibri" pitchFamily="34" charset="-122"/>
-                <a:cs typeface="Calibri" pitchFamily="34" charset="-120"/>
-              </a:rPr>
-              <a:t>Write here...</a:t>
-            </a:r>
-            <a:endParaRPr lang="en-US" sz="1100" dirty="0"/>
-          </a:p>
-        </p:txBody>
-      </p:sp>
-      <p:sp>
-        <p:nvSpPr>
-          <p:cNvPr id="29" name="Shape 27"/>
-          <p:cNvSpPr/>
-          <p:nvPr/>
-        </p:nvSpPr>
-        <p:spPr>
-          <a:xfrm>
-            <a:off x="365760" y="4096512"/>
-            <a:ext cx="1371600" cy="804672"/>
+          <p:cNvPr id="28" name="Shape 26"/>
+          <p:cNvSpPr/>
+          <p:nvPr/>
+        </p:nvSpPr>
+        <p:spPr>
+          <a:xfrm>
+            <a:off x="1874520" y="4096512"/>
+            <a:ext cx="6903720" cy="804672"/>
           </a:xfrm>
           <a:prstGeom prst="rect">
             <a:avLst>
@@ -13359,85 +13313,19 @@
             </a:avLst>
           </a:prstGeom>
           <a:solidFill>
-            <a:srgbClr val="E2E8F0"/>
+            <a:srgbClr val="F8FAFC"/>
           </a:solidFill>
           <a:ln w="12700">
             <a:solidFill>
               <a:srgbClr val="E2E8F0"/>
             </a:solidFill>
-            <a:prstDash val="solid"/>
-          </a:ln>
-        </p:spPr>
-      </p:sp>
-      <p:sp>
-        <p:nvSpPr>
-          <p:cNvPr id="30" name="Text 28"/>
-          <p:cNvSpPr/>
-          <p:nvPr/>
-        </p:nvSpPr>
-        <p:spPr>
-          <a:xfrm>
-            <a:off x="365760" y="4096512"/>
-            <a:ext cx="1371600" cy="804672"/>
-          </a:xfrm>
-          <a:prstGeom prst="rect">
-            <a:avLst/>
-          </a:prstGeom>
-          <a:noFill/>
-          <a:ln/>
-        </p:spPr>
-        <p:txBody>
-          <a:bodyPr wrap="square" lIns="0" tIns="0" rIns="0" bIns="0" rtlCol="0" anchor="ctr"/>
-          <a:lstStyle/>
-          <a:p>
-            <a:pPr algn="ctr" indent="0" marL="0">
-              <a:buNone/>
-            </a:pPr>
-            <a:r>
-              <a:rPr lang="en-US" sz="1100" b="1" dirty="0">
-                <a:solidFill>
-                  <a:srgbClr val="475569"/>
-                </a:solidFill>
-                <a:latin typeface="Trebuchet MS" pitchFamily="34" charset="0"/>
-                <a:ea typeface="Trebuchet MS" pitchFamily="34" charset="-122"/>
-                <a:cs typeface="Trebuchet MS" pitchFamily="34" charset="-120"/>
-              </a:rPr>
-              <a:t>Phonemes</a:t>
-            </a:r>
-            <a:endParaRPr lang="en-US" sz="1100" dirty="0"/>
-          </a:p>
-        </p:txBody>
-      </p:sp>
-      <p:sp>
-        <p:nvSpPr>
-          <p:cNvPr id="31" name="Shape 29"/>
-          <p:cNvSpPr/>
-          <p:nvPr/>
-        </p:nvSpPr>
-        <p:spPr>
-          <a:xfrm>
-            <a:off x="1874520" y="4096512"/>
-            <a:ext cx="6903720" cy="804672"/>
-          </a:xfrm>
-          <a:prstGeom prst="rect">
-            <a:avLst>
-              <a:gd name="adj" fmla="val 6818"/>
-            </a:avLst>
-          </a:prstGeom>
-          <a:solidFill>
-            <a:srgbClr val="F8FAFC"/>
-          </a:solidFill>
-          <a:ln w="12700">
-            <a:solidFill>
-              <a:srgbClr val="E2E8F0"/>
-            </a:solidFill>
             <a:prstDash val="dash"/>
           </a:ln>
         </p:spPr>
       </p:sp>
       <p:sp>
         <p:nvSpPr>
-          <p:cNvPr id="32" name="Text 30"/>
+          <p:cNvPr id="29" name="Text 27"/>
           <p:cNvSpPr/>
           <p:nvPr/>
         </p:nvSpPr>
@@ -13899,7 +13787,7 @@
                 <a:ea typeface="Trebuchet MS" pitchFamily="34" charset="-122"/>
                 <a:cs typeface="Trebuchet MS" pitchFamily="34" charset="-120"/>
               </a:rPr>
-              <a:t>excitement</a:t>
+              <a:t>audience</a:t>
             </a:r>
             <a:endParaRPr lang="en-US" sz="2800" dirty="0"/>
           </a:p>
@@ -13979,7 +13867,7 @@
         </p:nvSpPr>
         <p:spPr>
           <a:xfrm>
-            <a:off x="2221992" y="2258568"/>
+            <a:off x="2938272" y="2258568"/>
             <a:ext cx="1828800" cy="292608"/>
           </a:xfrm>
           <a:prstGeom prst="rect">
@@ -14013,7 +13901,7 @@
         </p:nvSpPr>
         <p:spPr>
           <a:xfrm>
-            <a:off x="2221992" y="2258568"/>
+            <a:off x="2938272" y="2258568"/>
             <a:ext cx="1828800" cy="292608"/>
           </a:xfrm>
           <a:prstGeom prst="rect">
@@ -14038,7 +13926,7 @@
                 <a:ea typeface="Trebuchet MS" pitchFamily="34" charset="-122"/>
                 <a:cs typeface="Trebuchet MS" pitchFamily="34" charset="-120"/>
               </a:rPr>
-              <a:t>ex</a:t>
+              <a:t>audi</a:t>
             </a:r>
             <a:endParaRPr lang="en-US" sz="1300" dirty="0"/>
           </a:p>
@@ -14052,7 +13940,7 @@
         </p:nvSpPr>
         <p:spPr>
           <a:xfrm>
-            <a:off x="2221992" y="2569464"/>
+            <a:off x="2938272" y="2569464"/>
             <a:ext cx="1828800" cy="201168"/>
           </a:xfrm>
           <a:prstGeom prst="rect">
@@ -14077,7 +13965,7 @@
                 <a:ea typeface="Calibri" pitchFamily="34" charset="-122"/>
                 <a:cs typeface="Calibri" pitchFamily="34" charset="-120"/>
               </a:rPr>
-              <a:t>out</a:t>
+              <a:t>hear</a:t>
             </a:r>
             <a:endParaRPr lang="en-US" sz="850" dirty="0"/>
           </a:p>
@@ -14091,7 +13979,7 @@
         </p:nvSpPr>
         <p:spPr>
           <a:xfrm>
-            <a:off x="4370832" y="2258568"/>
+            <a:off x="5803392" y="2258568"/>
             <a:ext cx="1828800" cy="292608"/>
           </a:xfrm>
           <a:prstGeom prst="rect">
@@ -14125,7 +14013,7 @@
         </p:nvSpPr>
         <p:spPr>
           <a:xfrm>
-            <a:off x="4370832" y="2258568"/>
+            <a:off x="5803392" y="2258568"/>
             <a:ext cx="1828800" cy="292608"/>
           </a:xfrm>
           <a:prstGeom prst="rect">
@@ -14150,7 +14038,7 @@
                 <a:ea typeface="Trebuchet MS" pitchFamily="34" charset="-122"/>
                 <a:cs typeface="Trebuchet MS" pitchFamily="34" charset="-120"/>
               </a:rPr>
-              <a:t>cite</a:t>
+              <a:t>ence</a:t>
             </a:r>
             <a:endParaRPr lang="en-US" sz="1300" dirty="0"/>
           </a:p>
@@ -14164,7 +14052,7 @@
         </p:nvSpPr>
         <p:spPr>
           <a:xfrm>
-            <a:off x="4370832" y="2569464"/>
+            <a:off x="5803392" y="2569464"/>
             <a:ext cx="1828800" cy="201168"/>
           </a:xfrm>
           <a:prstGeom prst="rect">
@@ -14189,7 +14077,7 @@
                 <a:ea typeface="Calibri" pitchFamily="34" charset="-122"/>
                 <a:cs typeface="Calibri" pitchFamily="34" charset="-120"/>
               </a:rPr>
-              <a:t>to stir up</a:t>
+              <a:t>state or quality of</a:t>
             </a:r>
             <a:endParaRPr lang="en-US" sz="850" dirty="0"/>
           </a:p>
@@ -14203,30 +14091,23 @@
         </p:nvSpPr>
         <p:spPr>
           <a:xfrm>
-            <a:off x="6519672" y="2258568"/>
-            <a:ext cx="1828800" cy="292608"/>
+            <a:off x="365760" y="3273552"/>
+            <a:ext cx="1371600" cy="658368"/>
           </a:xfrm>
           <a:prstGeom prst="rect">
             <a:avLst>
-              <a:gd name="adj" fmla="val 25000"/>
+              <a:gd name="adj" fmla="val 8333"/>
             </a:avLst>
           </a:prstGeom>
           <a:solidFill>
-            <a:srgbClr val="FCE7F3"/>
-          </a:solidFill>
-          <a:ln w="19050">
-            <a:solidFill>
-              <a:srgbClr val="DB2777"/>
-            </a:solidFill>
-            <a:prstDash val="solid"/>
-          </a:ln>
-          <a:effectLst>
-            <a:outerShdw sx="100000" sy="100000" kx="0" ky="0" algn="bl" rotWithShape="0" blurRad="101600" dist="38100" dir="8100000">
-              <a:srgbClr val="000000">
-                <a:alpha val="12000"/>
-              </a:srgbClr>
-            </a:outerShdw>
-          </a:effectLst>
+            <a:srgbClr val="E2E8F0"/>
+          </a:solidFill>
+          <a:ln w="12700">
+            <a:solidFill>
+              <a:srgbClr val="E2E8F0"/>
+            </a:solidFill>
+            <a:prstDash val="solid"/>
+          </a:ln>
         </p:spPr>
       </p:sp>
       <p:sp>
@@ -14237,86 +14118,47 @@
         </p:nvSpPr>
         <p:spPr>
           <a:xfrm>
-            <a:off x="6519672" y="2258568"/>
-            <a:ext cx="1828800" cy="292608"/>
-          </a:xfrm>
-          <a:prstGeom prst="rect">
-            <a:avLst/>
-          </a:prstGeom>
-          <a:noFill/>
-          <a:ln/>
-        </p:spPr>
-        <p:txBody>
-          <a:bodyPr wrap="square" lIns="0" tIns="0" rIns="0" bIns="0" rtlCol="0" anchor="ctr"/>
-          <a:lstStyle/>
-          <a:p>
-            <a:pPr algn="ctr" indent="0" marL="0">
-              <a:buNone/>
-            </a:pPr>
-            <a:r>
-              <a:rPr lang="en-US" sz="1300" b="1" dirty="0">
-                <a:solidFill>
-                  <a:srgbClr val="9D174D"/>
+            <a:off x="365760" y="3273552"/>
+            <a:ext cx="1371600" cy="658368"/>
+          </a:xfrm>
+          <a:prstGeom prst="rect">
+            <a:avLst/>
+          </a:prstGeom>
+          <a:noFill/>
+          <a:ln/>
+        </p:spPr>
+        <p:txBody>
+          <a:bodyPr wrap="square" lIns="0" tIns="0" rIns="0" bIns="0" rtlCol="0" anchor="ctr"/>
+          <a:lstStyle/>
+          <a:p>
+            <a:pPr algn="ctr" indent="0" marL="0">
+              <a:buNone/>
+            </a:pPr>
+            <a:r>
+              <a:rPr lang="en-US" sz="1100" b="1" dirty="0">
+                <a:solidFill>
+                  <a:srgbClr val="475569"/>
                 </a:solidFill>
                 <a:latin typeface="Trebuchet MS" pitchFamily="34" charset="0"/>
                 <a:ea typeface="Trebuchet MS" pitchFamily="34" charset="-122"/>
                 <a:cs typeface="Trebuchet MS" pitchFamily="34" charset="-120"/>
               </a:rPr>
-              <a:t>ment</a:t>
-            </a:r>
-            <a:endParaRPr lang="en-US" sz="1300" dirty="0"/>
-          </a:p>
-        </p:txBody>
-      </p:sp>
-      <p:sp>
-        <p:nvSpPr>
-          <p:cNvPr id="24" name="Text 22"/>
-          <p:cNvSpPr/>
-          <p:nvPr/>
-        </p:nvSpPr>
-        <p:spPr>
-          <a:xfrm>
-            <a:off x="6519672" y="2569464"/>
-            <a:ext cx="1828800" cy="201168"/>
-          </a:xfrm>
-          <a:prstGeom prst="rect">
-            <a:avLst/>
-          </a:prstGeom>
-          <a:noFill/>
-          <a:ln/>
-        </p:spPr>
-        <p:txBody>
-          <a:bodyPr wrap="square" lIns="0" tIns="0" rIns="0" bIns="0" rtlCol="0" anchor="t"/>
-          <a:lstStyle/>
-          <a:p>
-            <a:pPr algn="ctr" indent="0" marL="0">
-              <a:buNone/>
-            </a:pPr>
-            <a:r>
-              <a:rPr lang="en-US" sz="850" dirty="0">
-                <a:solidFill>
-                  <a:srgbClr val="475569"/>
-                </a:solidFill>
-                <a:latin typeface="Calibri" pitchFamily="34" charset="0"/>
-                <a:ea typeface="Calibri" pitchFamily="34" charset="-122"/>
-                <a:cs typeface="Calibri" pitchFamily="34" charset="-120"/>
-              </a:rPr>
-              <a:t>state or result of</a:t>
-            </a:r>
-            <a:endParaRPr lang="en-US" sz="850" dirty="0"/>
-          </a:p>
-        </p:txBody>
-      </p:sp>
-      <p:sp>
-        <p:nvSpPr>
-          <p:cNvPr id="25" name="Shape 23"/>
-          <p:cNvSpPr/>
-          <p:nvPr/>
-        </p:nvSpPr>
-        <p:spPr>
-          <a:xfrm>
-            <a:off x="365760" y="3273552"/>
-            <a:ext cx="1371600" cy="658368"/>
+              <a:t>Syllables</a:t>
+            </a:r>
+            <a:endParaRPr lang="en-US" sz="1100" dirty="0"/>
+          </a:p>
+        </p:txBody>
+      </p:sp>
+      <p:sp>
+        <p:nvSpPr>
+          <p:cNvPr id="24" name="Shape 22"/>
+          <p:cNvSpPr/>
+          <p:nvPr/>
+        </p:nvSpPr>
+        <p:spPr>
+          <a:xfrm>
+            <a:off x="1874520" y="3273552"/>
+            <a:ext cx="6903720" cy="658368"/>
           </a:xfrm>
           <a:prstGeom prst="rect">
             <a:avLst>
@@ -14324,11 +14166,38 @@
             </a:avLst>
           </a:prstGeom>
           <a:solidFill>
-            <a:srgbClr val="E2E8F0"/>
-          </a:solidFill>
-          <a:ln w="12700">
-            <a:solidFill>
-              <a:srgbClr val="E2E8F0"/>
+            <a:srgbClr val="CCFBF1"/>
+          </a:solidFill>
+          <a:ln w="12700">
+            <a:solidFill>
+              <a:srgbClr val="0D9488"/>
+            </a:solidFill>
+            <a:prstDash val="solid"/>
+          </a:ln>
+        </p:spPr>
+      </p:sp>
+      <p:sp>
+        <p:nvSpPr>
+          <p:cNvPr id="25" name="Shape 23"/>
+          <p:cNvSpPr/>
+          <p:nvPr/>
+        </p:nvSpPr>
+        <p:spPr>
+          <a:xfrm>
+            <a:off x="2313432" y="3364992"/>
+            <a:ext cx="1645920" cy="475488"/>
+          </a:xfrm>
+          <a:prstGeom prst="rect">
+            <a:avLst>
+              <a:gd name="adj" fmla="val 9615"/>
+            </a:avLst>
+          </a:prstGeom>
+          <a:solidFill>
+            <a:srgbClr val="FFFFFF"/>
+          </a:solidFill>
+          <a:ln w="12700">
+            <a:solidFill>
+              <a:srgbClr val="0D9488"/>
             </a:solidFill>
             <a:prstDash val="solid"/>
           </a:ln>
@@ -14342,63 +14211,75 @@
         </p:nvSpPr>
         <p:spPr>
           <a:xfrm>
-            <a:off x="365760" y="3273552"/>
-            <a:ext cx="1371600" cy="658368"/>
-          </a:xfrm>
-          <a:prstGeom prst="rect">
-            <a:avLst/>
-          </a:prstGeom>
-          <a:noFill/>
-          <a:ln/>
-        </p:spPr>
-        <p:txBody>
-          <a:bodyPr wrap="square" lIns="0" tIns="0" rIns="0" bIns="0" rtlCol="0" anchor="ctr"/>
-          <a:lstStyle/>
-          <a:p>
-            <a:pPr algn="ctr" indent="0" marL="0">
-              <a:buNone/>
-            </a:pPr>
-            <a:r>
-              <a:rPr lang="en-US" sz="1100" b="1" dirty="0">
-                <a:solidFill>
-                  <a:srgbClr val="475569"/>
+            <a:off x="2313432" y="3364992"/>
+            <a:ext cx="1645920" cy="475488"/>
+          </a:xfrm>
+          <a:prstGeom prst="rect">
+            <a:avLst/>
+          </a:prstGeom>
+          <a:noFill/>
+          <a:ln/>
+        </p:spPr>
+        <p:txBody>
+          <a:bodyPr wrap="square" lIns="0" tIns="0" rIns="0" bIns="0" rtlCol="0" anchor="ctr"/>
+          <a:lstStyle/>
+          <a:p>
+            <a:pPr algn="ctr" indent="0" marL="0">
+              <a:buNone/>
+            </a:pPr>
+            <a:r>
+              <a:rPr lang="en-US" sz="1400" b="1" dirty="0">
+                <a:solidFill>
+                  <a:srgbClr val="0D9488"/>
                 </a:solidFill>
                 <a:latin typeface="Trebuchet MS" pitchFamily="34" charset="0"/>
                 <a:ea typeface="Trebuchet MS" pitchFamily="34" charset="-122"/>
                 <a:cs typeface="Trebuchet MS" pitchFamily="34" charset="-120"/>
               </a:rPr>
-              <a:t>Syllables</a:t>
-            </a:r>
-            <a:endParaRPr lang="en-US" sz="1100" dirty="0"/>
-          </a:p>
-        </p:txBody>
-      </p:sp>
-      <p:sp>
-        <p:nvSpPr>
-          <p:cNvPr id="27" name="Shape 25"/>
-          <p:cNvSpPr/>
-          <p:nvPr/>
-        </p:nvSpPr>
-        <p:spPr>
-          <a:xfrm>
-            <a:off x="1874520" y="3273552"/>
-            <a:ext cx="6903720" cy="658368"/>
-          </a:xfrm>
-          <a:prstGeom prst="rect">
-            <a:avLst>
-              <a:gd name="adj" fmla="val 8333"/>
-            </a:avLst>
-          </a:prstGeom>
-          <a:solidFill>
-            <a:srgbClr val="CCFBF1"/>
-          </a:solidFill>
-          <a:ln w="12700">
-            <a:solidFill>
-              <a:srgbClr val="0D9488"/>
-            </a:solidFill>
-            <a:prstDash val="solid"/>
-          </a:ln>
-        </p:spPr>
+              <a:t>au</a:t>
+            </a:r>
+            <a:endParaRPr lang="en-US" sz="1400" dirty="0"/>
+          </a:p>
+        </p:txBody>
+      </p:sp>
+      <p:sp>
+        <p:nvSpPr>
+          <p:cNvPr id="27" name="Text 25"/>
+          <p:cNvSpPr/>
+          <p:nvPr/>
+        </p:nvSpPr>
+        <p:spPr>
+          <a:xfrm>
+            <a:off x="3959352" y="3364992"/>
+            <a:ext cx="411480" cy="475488"/>
+          </a:xfrm>
+          <a:prstGeom prst="rect">
+            <a:avLst/>
+          </a:prstGeom>
+          <a:noFill/>
+          <a:ln/>
+        </p:spPr>
+        <p:txBody>
+          <a:bodyPr wrap="square" lIns="0" tIns="0" rIns="0" bIns="0" rtlCol="0" anchor="ctr"/>
+          <a:lstStyle/>
+          <a:p>
+            <a:pPr algn="ctr" indent="0" marL="0">
+              <a:buNone/>
+            </a:pPr>
+            <a:r>
+              <a:rPr lang="en-US" sz="1600" b="1" dirty="0">
+                <a:solidFill>
+                  <a:srgbClr val="0D9488"/>
+                </a:solidFill>
+                <a:latin typeface="Trebuchet MS" pitchFamily="34" charset="0"/>
+                <a:ea typeface="Trebuchet MS" pitchFamily="34" charset="-122"/>
+                <a:cs typeface="Trebuchet MS" pitchFamily="34" charset="-120"/>
+              </a:rPr>
+              <a:t>·</a:t>
+            </a:r>
+            <a:endParaRPr lang="en-US" sz="1600" dirty="0"/>
+          </a:p>
+        </p:txBody>
       </p:sp>
       <p:sp>
         <p:nvSpPr>
@@ -14408,7 +14289,7 @@
         </p:nvSpPr>
         <p:spPr>
           <a:xfrm>
-            <a:off x="2313432" y="3364992"/>
+            <a:off x="4370832" y="3364992"/>
             <a:ext cx="1645920" cy="475488"/>
           </a:xfrm>
           <a:prstGeom prst="rect">
@@ -14435,7 +14316,7 @@
         </p:nvSpPr>
         <p:spPr>
           <a:xfrm>
-            <a:off x="2313432" y="3364992"/>
+            <a:off x="4370832" y="3364992"/>
             <a:ext cx="1645920" cy="475488"/>
           </a:xfrm>
           <a:prstGeom prst="rect">
@@ -14460,7 +14341,7 @@
                 <a:ea typeface="Trebuchet MS" pitchFamily="34" charset="-122"/>
                 <a:cs typeface="Trebuchet MS" pitchFamily="34" charset="-120"/>
               </a:rPr>
-              <a:t>ex</a:t>
+              <a:t>di</a:t>
             </a:r>
             <a:endParaRPr lang="en-US" sz="1400" dirty="0"/>
           </a:p>
@@ -14474,7 +14355,7 @@
         </p:nvSpPr>
         <p:spPr>
           <a:xfrm>
-            <a:off x="3959352" y="3364992"/>
+            <a:off x="6016752" y="3364992"/>
             <a:ext cx="411480" cy="475488"/>
           </a:xfrm>
           <a:prstGeom prst="rect">
@@ -14513,7 +14394,7 @@
         </p:nvSpPr>
         <p:spPr>
           <a:xfrm>
-            <a:off x="4370832" y="3364992"/>
+            <a:off x="6428232" y="3364992"/>
             <a:ext cx="1645920" cy="475488"/>
           </a:xfrm>
           <a:prstGeom prst="rect">
@@ -14540,7 +14421,7 @@
         </p:nvSpPr>
         <p:spPr>
           <a:xfrm>
-            <a:off x="4370832" y="3364992"/>
+            <a:off x="6428232" y="3364992"/>
             <a:ext cx="1645920" cy="475488"/>
           </a:xfrm>
           <a:prstGeom prst="rect">
@@ -14565,7 +14446,7 @@
                 <a:ea typeface="Trebuchet MS" pitchFamily="34" charset="-122"/>
                 <a:cs typeface="Trebuchet MS" pitchFamily="34" charset="-120"/>
               </a:rPr>
-              <a:t>cite</a:t>
+              <a:t>ence</a:t>
             </a:r>
             <a:endParaRPr lang="en-US" sz="1400" dirty="0"/>
           </a:p>
@@ -14573,119 +14454,80 @@
       </p:sp>
       <p:sp>
         <p:nvSpPr>
-          <p:cNvPr id="33" name="Text 31"/>
-          <p:cNvSpPr/>
-          <p:nvPr/>
-        </p:nvSpPr>
-        <p:spPr>
-          <a:xfrm>
-            <a:off x="6016752" y="3364992"/>
-            <a:ext cx="411480" cy="475488"/>
-          </a:xfrm>
-          <a:prstGeom prst="rect">
-            <a:avLst/>
-          </a:prstGeom>
-          <a:noFill/>
-          <a:ln/>
-        </p:spPr>
-        <p:txBody>
-          <a:bodyPr wrap="square" lIns="0" tIns="0" rIns="0" bIns="0" rtlCol="0" anchor="ctr"/>
-          <a:lstStyle/>
-          <a:p>
-            <a:pPr algn="ctr" indent="0" marL="0">
-              <a:buNone/>
-            </a:pPr>
-            <a:r>
-              <a:rPr lang="en-US" sz="1600" b="1" dirty="0">
-                <a:solidFill>
-                  <a:srgbClr val="0D9488"/>
+          <p:cNvPr id="33" name="Shape 31"/>
+          <p:cNvSpPr/>
+          <p:nvPr/>
+        </p:nvSpPr>
+        <p:spPr>
+          <a:xfrm>
+            <a:off x="365760" y="4096512"/>
+            <a:ext cx="1371600" cy="804672"/>
+          </a:xfrm>
+          <a:prstGeom prst="rect">
+            <a:avLst>
+              <a:gd name="adj" fmla="val 6818"/>
+            </a:avLst>
+          </a:prstGeom>
+          <a:solidFill>
+            <a:srgbClr val="E2E8F0"/>
+          </a:solidFill>
+          <a:ln w="12700">
+            <a:solidFill>
+              <a:srgbClr val="E2E8F0"/>
+            </a:solidFill>
+            <a:prstDash val="solid"/>
+          </a:ln>
+        </p:spPr>
+      </p:sp>
+      <p:sp>
+        <p:nvSpPr>
+          <p:cNvPr id="34" name="Text 32"/>
+          <p:cNvSpPr/>
+          <p:nvPr/>
+        </p:nvSpPr>
+        <p:spPr>
+          <a:xfrm>
+            <a:off x="365760" y="4096512"/>
+            <a:ext cx="1371600" cy="804672"/>
+          </a:xfrm>
+          <a:prstGeom prst="rect">
+            <a:avLst/>
+          </a:prstGeom>
+          <a:noFill/>
+          <a:ln/>
+        </p:spPr>
+        <p:txBody>
+          <a:bodyPr wrap="square" lIns="0" tIns="0" rIns="0" bIns="0" rtlCol="0" anchor="ctr"/>
+          <a:lstStyle/>
+          <a:p>
+            <a:pPr algn="ctr" indent="0" marL="0">
+              <a:buNone/>
+            </a:pPr>
+            <a:r>
+              <a:rPr lang="en-US" sz="1100" b="1" dirty="0">
+                <a:solidFill>
+                  <a:srgbClr val="475569"/>
                 </a:solidFill>
                 <a:latin typeface="Trebuchet MS" pitchFamily="34" charset="0"/>
                 <a:ea typeface="Trebuchet MS" pitchFamily="34" charset="-122"/>
                 <a:cs typeface="Trebuchet MS" pitchFamily="34" charset="-120"/>
               </a:rPr>
-              <a:t>·</a:t>
-            </a:r>
-            <a:endParaRPr lang="en-US" sz="1600" dirty="0"/>
-          </a:p>
-        </p:txBody>
-      </p:sp>
-      <p:sp>
-        <p:nvSpPr>
-          <p:cNvPr id="34" name="Shape 32"/>
-          <p:cNvSpPr/>
-          <p:nvPr/>
-        </p:nvSpPr>
-        <p:spPr>
-          <a:xfrm>
-            <a:off x="6428232" y="3364992"/>
-            <a:ext cx="1645920" cy="475488"/>
-          </a:xfrm>
-          <a:prstGeom prst="rect">
-            <a:avLst>
-              <a:gd name="adj" fmla="val 9615"/>
-            </a:avLst>
-          </a:prstGeom>
-          <a:solidFill>
-            <a:srgbClr val="FFFFFF"/>
-          </a:solidFill>
-          <a:ln w="12700">
-            <a:solidFill>
-              <a:srgbClr val="0D9488"/>
-            </a:solidFill>
-            <a:prstDash val="solid"/>
-          </a:ln>
-        </p:spPr>
-      </p:sp>
-      <p:sp>
-        <p:nvSpPr>
-          <p:cNvPr id="35" name="Text 33"/>
-          <p:cNvSpPr/>
-          <p:nvPr/>
-        </p:nvSpPr>
-        <p:spPr>
-          <a:xfrm>
-            <a:off x="6428232" y="3364992"/>
-            <a:ext cx="1645920" cy="475488"/>
-          </a:xfrm>
-          <a:prstGeom prst="rect">
-            <a:avLst/>
-          </a:prstGeom>
-          <a:noFill/>
-          <a:ln/>
-        </p:spPr>
-        <p:txBody>
-          <a:bodyPr wrap="square" lIns="0" tIns="0" rIns="0" bIns="0" rtlCol="0" anchor="ctr"/>
-          <a:lstStyle/>
-          <a:p>
-            <a:pPr algn="ctr" indent="0" marL="0">
-              <a:buNone/>
-            </a:pPr>
-            <a:r>
-              <a:rPr lang="en-US" sz="1400" b="1" dirty="0">
-                <a:solidFill>
-                  <a:srgbClr val="0D9488"/>
-                </a:solidFill>
-                <a:latin typeface="Trebuchet MS" pitchFamily="34" charset="0"/>
-                <a:ea typeface="Trebuchet MS" pitchFamily="34" charset="-122"/>
-                <a:cs typeface="Trebuchet MS" pitchFamily="34" charset="-120"/>
-              </a:rPr>
-              <a:t>ment</a:t>
-            </a:r>
-            <a:endParaRPr lang="en-US" sz="1400" dirty="0"/>
-          </a:p>
-        </p:txBody>
-      </p:sp>
-      <p:sp>
-        <p:nvSpPr>
-          <p:cNvPr id="36" name="Shape 34"/>
-          <p:cNvSpPr/>
-          <p:nvPr/>
-        </p:nvSpPr>
-        <p:spPr>
-          <a:xfrm>
-            <a:off x="365760" y="4096512"/>
-            <a:ext cx="1371600" cy="804672"/>
+              <a:t>Phonemes</a:t>
+            </a:r>
+            <a:endParaRPr lang="en-US" sz="1100" dirty="0"/>
+          </a:p>
+        </p:txBody>
+      </p:sp>
+      <p:sp>
+        <p:nvSpPr>
+          <p:cNvPr id="35" name="Shape 33"/>
+          <p:cNvSpPr/>
+          <p:nvPr/>
+        </p:nvSpPr>
+        <p:spPr>
+          <a:xfrm>
+            <a:off x="1874520" y="4096512"/>
+            <a:ext cx="6903720" cy="804672"/>
           </a:xfrm>
           <a:prstGeom prst="rect">
             <a:avLst>
@@ -14693,85 +14535,19 @@
             </a:avLst>
           </a:prstGeom>
           <a:solidFill>
-            <a:srgbClr val="E2E8F0"/>
+            <a:srgbClr val="F8FAFC"/>
           </a:solidFill>
           <a:ln w="12700">
             <a:solidFill>
               <a:srgbClr val="E2E8F0"/>
             </a:solidFill>
-            <a:prstDash val="solid"/>
-          </a:ln>
-        </p:spPr>
-      </p:sp>
-      <p:sp>
-        <p:nvSpPr>
-          <p:cNvPr id="37" name="Text 35"/>
-          <p:cNvSpPr/>
-          <p:nvPr/>
-        </p:nvSpPr>
-        <p:spPr>
-          <a:xfrm>
-            <a:off x="365760" y="4096512"/>
-            <a:ext cx="1371600" cy="804672"/>
-          </a:xfrm>
-          <a:prstGeom prst="rect">
-            <a:avLst/>
-          </a:prstGeom>
-          <a:noFill/>
-          <a:ln/>
-        </p:spPr>
-        <p:txBody>
-          <a:bodyPr wrap="square" lIns="0" tIns="0" rIns="0" bIns="0" rtlCol="0" anchor="ctr"/>
-          <a:lstStyle/>
-          <a:p>
-            <a:pPr algn="ctr" indent="0" marL="0">
-              <a:buNone/>
-            </a:pPr>
-            <a:r>
-              <a:rPr lang="en-US" sz="1100" b="1" dirty="0">
-                <a:solidFill>
-                  <a:srgbClr val="475569"/>
-                </a:solidFill>
-                <a:latin typeface="Trebuchet MS" pitchFamily="34" charset="0"/>
-                <a:ea typeface="Trebuchet MS" pitchFamily="34" charset="-122"/>
-                <a:cs typeface="Trebuchet MS" pitchFamily="34" charset="-120"/>
-              </a:rPr>
-              <a:t>Phonemes</a:t>
-            </a:r>
-            <a:endParaRPr lang="en-US" sz="1100" dirty="0"/>
-          </a:p>
-        </p:txBody>
-      </p:sp>
-      <p:sp>
-        <p:nvSpPr>
-          <p:cNvPr id="38" name="Shape 36"/>
-          <p:cNvSpPr/>
-          <p:nvPr/>
-        </p:nvSpPr>
-        <p:spPr>
-          <a:xfrm>
-            <a:off x="1874520" y="4096512"/>
-            <a:ext cx="6903720" cy="804672"/>
-          </a:xfrm>
-          <a:prstGeom prst="rect">
-            <a:avLst>
-              <a:gd name="adj" fmla="val 6818"/>
-            </a:avLst>
-          </a:prstGeom>
-          <a:solidFill>
-            <a:srgbClr val="F8FAFC"/>
-          </a:solidFill>
-          <a:ln w="12700">
-            <a:solidFill>
-              <a:srgbClr val="E2E8F0"/>
-            </a:solidFill>
             <a:prstDash val="dash"/>
           </a:ln>
         </p:spPr>
       </p:sp>
       <p:sp>
         <p:nvSpPr>
-          <p:cNvPr id="39" name="Text 37"/>
+          <p:cNvPr id="36" name="Text 34"/>
           <p:cNvSpPr/>
           <p:nvPr/>
         </p:nvSpPr>
@@ -15498,7 +15274,7 @@
                 <a:ea typeface="Trebuchet MS" pitchFamily="34" charset="-122"/>
                 <a:cs typeface="Trebuchet MS" pitchFamily="34" charset="-120"/>
               </a:rPr>
-              <a:t>excitement</a:t>
+              <a:t>audience</a:t>
             </a:r>
             <a:endParaRPr lang="en-US" sz="2800" dirty="0"/>
           </a:p>
@@ -15578,7 +15354,7 @@
         </p:nvSpPr>
         <p:spPr>
           <a:xfrm>
-            <a:off x="2221992" y="2258568"/>
+            <a:off x="2938272" y="2258568"/>
             <a:ext cx="1828800" cy="292608"/>
           </a:xfrm>
           <a:prstGeom prst="rect">
@@ -15612,7 +15388,7 @@
         </p:nvSpPr>
         <p:spPr>
           <a:xfrm>
-            <a:off x="2221992" y="2258568"/>
+            <a:off x="2938272" y="2258568"/>
             <a:ext cx="1828800" cy="292608"/>
           </a:xfrm>
           <a:prstGeom prst="rect">
@@ -15637,7 +15413,7 @@
                 <a:ea typeface="Trebuchet MS" pitchFamily="34" charset="-122"/>
                 <a:cs typeface="Trebuchet MS" pitchFamily="34" charset="-120"/>
               </a:rPr>
-              <a:t>ex</a:t>
+              <a:t>audi</a:t>
             </a:r>
             <a:endParaRPr lang="en-US" sz="1300" dirty="0"/>
           </a:p>
@@ -15651,7 +15427,7 @@
         </p:nvSpPr>
         <p:spPr>
           <a:xfrm>
-            <a:off x="2221992" y="2569464"/>
+            <a:off x="2938272" y="2569464"/>
             <a:ext cx="1828800" cy="201168"/>
           </a:xfrm>
           <a:prstGeom prst="rect">
@@ -15676,7 +15452,7 @@
                 <a:ea typeface="Calibri" pitchFamily="34" charset="-122"/>
                 <a:cs typeface="Calibri" pitchFamily="34" charset="-120"/>
               </a:rPr>
-              <a:t>out</a:t>
+              <a:t>hear</a:t>
             </a:r>
             <a:endParaRPr lang="en-US" sz="850" dirty="0"/>
           </a:p>
@@ -15690,7 +15466,7 @@
         </p:nvSpPr>
         <p:spPr>
           <a:xfrm>
-            <a:off x="4370832" y="2258568"/>
+            <a:off x="5803392" y="2258568"/>
             <a:ext cx="1828800" cy="292608"/>
           </a:xfrm>
           <a:prstGeom prst="rect">
@@ -15724,7 +15500,7 @@
         </p:nvSpPr>
         <p:spPr>
           <a:xfrm>
-            <a:off x="4370832" y="2258568"/>
+            <a:off x="5803392" y="2258568"/>
             <a:ext cx="1828800" cy="292608"/>
           </a:xfrm>
           <a:prstGeom prst="rect">
@@ -15749,7 +15525,7 @@
                 <a:ea typeface="Trebuchet MS" pitchFamily="34" charset="-122"/>
                 <a:cs typeface="Trebuchet MS" pitchFamily="34" charset="-120"/>
               </a:rPr>
-              <a:t>cite</a:t>
+              <a:t>ence</a:t>
             </a:r>
             <a:endParaRPr lang="en-US" sz="1300" dirty="0"/>
           </a:p>
@@ -15763,7 +15539,7 @@
         </p:nvSpPr>
         <p:spPr>
           <a:xfrm>
-            <a:off x="4370832" y="2569464"/>
+            <a:off x="5803392" y="2569464"/>
             <a:ext cx="1828800" cy="201168"/>
           </a:xfrm>
           <a:prstGeom prst="rect">
@@ -15788,7 +15564,7 @@
                 <a:ea typeface="Calibri" pitchFamily="34" charset="-122"/>
                 <a:cs typeface="Calibri" pitchFamily="34" charset="-120"/>
               </a:rPr>
-              <a:t>to stir up</a:t>
+              <a:t>state or quality of</a:t>
             </a:r>
             <a:endParaRPr lang="en-US" sz="850" dirty="0"/>
           </a:p>
@@ -15802,30 +15578,23 @@
         </p:nvSpPr>
         <p:spPr>
           <a:xfrm>
-            <a:off x="6519672" y="2258568"/>
-            <a:ext cx="1828800" cy="292608"/>
+            <a:off x="365760" y="3273552"/>
+            <a:ext cx="1371600" cy="658368"/>
           </a:xfrm>
           <a:prstGeom prst="rect">
             <a:avLst>
-              <a:gd name="adj" fmla="val 25000"/>
+              <a:gd name="adj" fmla="val 8333"/>
             </a:avLst>
           </a:prstGeom>
           <a:solidFill>
-            <a:srgbClr val="FCE7F3"/>
-          </a:solidFill>
-          <a:ln w="19050">
-            <a:solidFill>
-              <a:srgbClr val="DB2777"/>
-            </a:solidFill>
-            <a:prstDash val="solid"/>
-          </a:ln>
-          <a:effectLst>
-            <a:outerShdw sx="100000" sy="100000" kx="0" ky="0" algn="bl" rotWithShape="0" blurRad="101600" dist="38100" dir="8100000">
-              <a:srgbClr val="000000">
-                <a:alpha val="12000"/>
-              </a:srgbClr>
-            </a:outerShdw>
-          </a:effectLst>
+            <a:srgbClr val="E2E8F0"/>
+          </a:solidFill>
+          <a:ln w="12700">
+            <a:solidFill>
+              <a:srgbClr val="E2E8F0"/>
+            </a:solidFill>
+            <a:prstDash val="solid"/>
+          </a:ln>
         </p:spPr>
       </p:sp>
       <p:sp>
@@ -15836,47 +15605,839 @@
         </p:nvSpPr>
         <p:spPr>
           <a:xfrm>
-            <a:off x="6519672" y="2258568"/>
-            <a:ext cx="1828800" cy="292608"/>
-          </a:xfrm>
-          <a:prstGeom prst="rect">
-            <a:avLst/>
-          </a:prstGeom>
-          <a:noFill/>
-          <a:ln/>
-        </p:spPr>
-        <p:txBody>
-          <a:bodyPr wrap="square" lIns="0" tIns="0" rIns="0" bIns="0" rtlCol="0" anchor="ctr"/>
-          <a:lstStyle/>
-          <a:p>
-            <a:pPr algn="ctr" indent="0" marL="0">
-              <a:buNone/>
-            </a:pPr>
-            <a:r>
-              <a:rPr lang="en-US" sz="1300" b="1" dirty="0">
-                <a:solidFill>
-                  <a:srgbClr val="9D174D"/>
+            <a:off x="365760" y="3273552"/>
+            <a:ext cx="1371600" cy="658368"/>
+          </a:xfrm>
+          <a:prstGeom prst="rect">
+            <a:avLst/>
+          </a:prstGeom>
+          <a:noFill/>
+          <a:ln/>
+        </p:spPr>
+        <p:txBody>
+          <a:bodyPr wrap="square" lIns="0" tIns="0" rIns="0" bIns="0" rtlCol="0" anchor="ctr"/>
+          <a:lstStyle/>
+          <a:p>
+            <a:pPr algn="ctr" indent="0" marL="0">
+              <a:buNone/>
+            </a:pPr>
+            <a:r>
+              <a:rPr lang="en-US" sz="1100" b="1" dirty="0">
+                <a:solidFill>
+                  <a:srgbClr val="475569"/>
                 </a:solidFill>
                 <a:latin typeface="Trebuchet MS" pitchFamily="34" charset="0"/>
                 <a:ea typeface="Trebuchet MS" pitchFamily="34" charset="-122"/>
                 <a:cs typeface="Trebuchet MS" pitchFamily="34" charset="-120"/>
               </a:rPr>
-              <a:t>ment</a:t>
-            </a:r>
-            <a:endParaRPr lang="en-US" sz="1300" dirty="0"/>
-          </a:p>
-        </p:txBody>
-      </p:sp>
-      <p:sp>
-        <p:nvSpPr>
-          <p:cNvPr id="24" name="Text 22"/>
-          <p:cNvSpPr/>
-          <p:nvPr/>
-        </p:nvSpPr>
-        <p:spPr>
-          <a:xfrm>
-            <a:off x="6519672" y="2569464"/>
-            <a:ext cx="1828800" cy="201168"/>
+              <a:t>Syllables</a:t>
+            </a:r>
+            <a:endParaRPr lang="en-US" sz="1100" dirty="0"/>
+          </a:p>
+        </p:txBody>
+      </p:sp>
+      <p:sp>
+        <p:nvSpPr>
+          <p:cNvPr id="24" name="Shape 22"/>
+          <p:cNvSpPr/>
+          <p:nvPr/>
+        </p:nvSpPr>
+        <p:spPr>
+          <a:xfrm>
+            <a:off x="1874520" y="3273552"/>
+            <a:ext cx="6903720" cy="658368"/>
+          </a:xfrm>
+          <a:prstGeom prst="rect">
+            <a:avLst>
+              <a:gd name="adj" fmla="val 8333"/>
+            </a:avLst>
+          </a:prstGeom>
+          <a:solidFill>
+            <a:srgbClr val="CCFBF1"/>
+          </a:solidFill>
+          <a:ln w="12700">
+            <a:solidFill>
+              <a:srgbClr val="0D9488"/>
+            </a:solidFill>
+            <a:prstDash val="solid"/>
+          </a:ln>
+        </p:spPr>
+      </p:sp>
+      <p:sp>
+        <p:nvSpPr>
+          <p:cNvPr id="25" name="Shape 23"/>
+          <p:cNvSpPr/>
+          <p:nvPr/>
+        </p:nvSpPr>
+        <p:spPr>
+          <a:xfrm>
+            <a:off x="2313432" y="3364992"/>
+            <a:ext cx="1645920" cy="475488"/>
+          </a:xfrm>
+          <a:prstGeom prst="rect">
+            <a:avLst>
+              <a:gd name="adj" fmla="val 9615"/>
+            </a:avLst>
+          </a:prstGeom>
+          <a:solidFill>
+            <a:srgbClr val="FFFFFF"/>
+          </a:solidFill>
+          <a:ln w="12700">
+            <a:solidFill>
+              <a:srgbClr val="0D9488"/>
+            </a:solidFill>
+            <a:prstDash val="solid"/>
+          </a:ln>
+        </p:spPr>
+      </p:sp>
+      <p:sp>
+        <p:nvSpPr>
+          <p:cNvPr id="26" name="Text 24"/>
+          <p:cNvSpPr/>
+          <p:nvPr/>
+        </p:nvSpPr>
+        <p:spPr>
+          <a:xfrm>
+            <a:off x="2313432" y="3364992"/>
+            <a:ext cx="1645920" cy="475488"/>
+          </a:xfrm>
+          <a:prstGeom prst="rect">
+            <a:avLst/>
+          </a:prstGeom>
+          <a:noFill/>
+          <a:ln/>
+        </p:spPr>
+        <p:txBody>
+          <a:bodyPr wrap="square" lIns="0" tIns="0" rIns="0" bIns="0" rtlCol="0" anchor="ctr"/>
+          <a:lstStyle/>
+          <a:p>
+            <a:pPr algn="ctr" indent="0" marL="0">
+              <a:buNone/>
+            </a:pPr>
+            <a:r>
+              <a:rPr lang="en-US" sz="1400" b="1" dirty="0">
+                <a:solidFill>
+                  <a:srgbClr val="0D9488"/>
+                </a:solidFill>
+                <a:latin typeface="Trebuchet MS" pitchFamily="34" charset="0"/>
+                <a:ea typeface="Trebuchet MS" pitchFamily="34" charset="-122"/>
+                <a:cs typeface="Trebuchet MS" pitchFamily="34" charset="-120"/>
+              </a:rPr>
+              <a:t>au</a:t>
+            </a:r>
+            <a:endParaRPr lang="en-US" sz="1400" dirty="0"/>
+          </a:p>
+        </p:txBody>
+      </p:sp>
+      <p:sp>
+        <p:nvSpPr>
+          <p:cNvPr id="27" name="Text 25"/>
+          <p:cNvSpPr/>
+          <p:nvPr/>
+        </p:nvSpPr>
+        <p:spPr>
+          <a:xfrm>
+            <a:off x="3959352" y="3364992"/>
+            <a:ext cx="411480" cy="475488"/>
+          </a:xfrm>
+          <a:prstGeom prst="rect">
+            <a:avLst/>
+          </a:prstGeom>
+          <a:noFill/>
+          <a:ln/>
+        </p:spPr>
+        <p:txBody>
+          <a:bodyPr wrap="square" lIns="0" tIns="0" rIns="0" bIns="0" rtlCol="0" anchor="ctr"/>
+          <a:lstStyle/>
+          <a:p>
+            <a:pPr algn="ctr" indent="0" marL="0">
+              <a:buNone/>
+            </a:pPr>
+            <a:r>
+              <a:rPr lang="en-US" sz="1600" b="1" dirty="0">
+                <a:solidFill>
+                  <a:srgbClr val="0D9488"/>
+                </a:solidFill>
+                <a:latin typeface="Trebuchet MS" pitchFamily="34" charset="0"/>
+                <a:ea typeface="Trebuchet MS" pitchFamily="34" charset="-122"/>
+                <a:cs typeface="Trebuchet MS" pitchFamily="34" charset="-120"/>
+              </a:rPr>
+              <a:t>·</a:t>
+            </a:r>
+            <a:endParaRPr lang="en-US" sz="1600" dirty="0"/>
+          </a:p>
+        </p:txBody>
+      </p:sp>
+      <p:sp>
+        <p:nvSpPr>
+          <p:cNvPr id="28" name="Shape 26"/>
+          <p:cNvSpPr/>
+          <p:nvPr/>
+        </p:nvSpPr>
+        <p:spPr>
+          <a:xfrm>
+            <a:off x="4370832" y="3364992"/>
+            <a:ext cx="1645920" cy="475488"/>
+          </a:xfrm>
+          <a:prstGeom prst="rect">
+            <a:avLst>
+              <a:gd name="adj" fmla="val 9615"/>
+            </a:avLst>
+          </a:prstGeom>
+          <a:solidFill>
+            <a:srgbClr val="FFFFFF"/>
+          </a:solidFill>
+          <a:ln w="12700">
+            <a:solidFill>
+              <a:srgbClr val="0D9488"/>
+            </a:solidFill>
+            <a:prstDash val="solid"/>
+          </a:ln>
+        </p:spPr>
+      </p:sp>
+      <p:sp>
+        <p:nvSpPr>
+          <p:cNvPr id="29" name="Text 27"/>
+          <p:cNvSpPr/>
+          <p:nvPr/>
+        </p:nvSpPr>
+        <p:spPr>
+          <a:xfrm>
+            <a:off x="4370832" y="3364992"/>
+            <a:ext cx="1645920" cy="475488"/>
+          </a:xfrm>
+          <a:prstGeom prst="rect">
+            <a:avLst/>
+          </a:prstGeom>
+          <a:noFill/>
+          <a:ln/>
+        </p:spPr>
+        <p:txBody>
+          <a:bodyPr wrap="square" lIns="0" tIns="0" rIns="0" bIns="0" rtlCol="0" anchor="ctr"/>
+          <a:lstStyle/>
+          <a:p>
+            <a:pPr algn="ctr" indent="0" marL="0">
+              <a:buNone/>
+            </a:pPr>
+            <a:r>
+              <a:rPr lang="en-US" sz="1400" b="1" dirty="0">
+                <a:solidFill>
+                  <a:srgbClr val="0D9488"/>
+                </a:solidFill>
+                <a:latin typeface="Trebuchet MS" pitchFamily="34" charset="0"/>
+                <a:ea typeface="Trebuchet MS" pitchFamily="34" charset="-122"/>
+                <a:cs typeface="Trebuchet MS" pitchFamily="34" charset="-120"/>
+              </a:rPr>
+              <a:t>di</a:t>
+            </a:r>
+            <a:endParaRPr lang="en-US" sz="1400" dirty="0"/>
+          </a:p>
+        </p:txBody>
+      </p:sp>
+      <p:sp>
+        <p:nvSpPr>
+          <p:cNvPr id="30" name="Text 28"/>
+          <p:cNvSpPr/>
+          <p:nvPr/>
+        </p:nvSpPr>
+        <p:spPr>
+          <a:xfrm>
+            <a:off x="6016752" y="3364992"/>
+            <a:ext cx="411480" cy="475488"/>
+          </a:xfrm>
+          <a:prstGeom prst="rect">
+            <a:avLst/>
+          </a:prstGeom>
+          <a:noFill/>
+          <a:ln/>
+        </p:spPr>
+        <p:txBody>
+          <a:bodyPr wrap="square" lIns="0" tIns="0" rIns="0" bIns="0" rtlCol="0" anchor="ctr"/>
+          <a:lstStyle/>
+          <a:p>
+            <a:pPr algn="ctr" indent="0" marL="0">
+              <a:buNone/>
+            </a:pPr>
+            <a:r>
+              <a:rPr lang="en-US" sz="1600" b="1" dirty="0">
+                <a:solidFill>
+                  <a:srgbClr val="0D9488"/>
+                </a:solidFill>
+                <a:latin typeface="Trebuchet MS" pitchFamily="34" charset="0"/>
+                <a:ea typeface="Trebuchet MS" pitchFamily="34" charset="-122"/>
+                <a:cs typeface="Trebuchet MS" pitchFamily="34" charset="-120"/>
+              </a:rPr>
+              <a:t>·</a:t>
+            </a:r>
+            <a:endParaRPr lang="en-US" sz="1600" dirty="0"/>
+          </a:p>
+        </p:txBody>
+      </p:sp>
+      <p:sp>
+        <p:nvSpPr>
+          <p:cNvPr id="31" name="Shape 29"/>
+          <p:cNvSpPr/>
+          <p:nvPr/>
+        </p:nvSpPr>
+        <p:spPr>
+          <a:xfrm>
+            <a:off x="6428232" y="3364992"/>
+            <a:ext cx="1645920" cy="475488"/>
+          </a:xfrm>
+          <a:prstGeom prst="rect">
+            <a:avLst>
+              <a:gd name="adj" fmla="val 9615"/>
+            </a:avLst>
+          </a:prstGeom>
+          <a:solidFill>
+            <a:srgbClr val="FFFFFF"/>
+          </a:solidFill>
+          <a:ln w="12700">
+            <a:solidFill>
+              <a:srgbClr val="0D9488"/>
+            </a:solidFill>
+            <a:prstDash val="solid"/>
+          </a:ln>
+        </p:spPr>
+      </p:sp>
+      <p:sp>
+        <p:nvSpPr>
+          <p:cNvPr id="32" name="Text 30"/>
+          <p:cNvSpPr/>
+          <p:nvPr/>
+        </p:nvSpPr>
+        <p:spPr>
+          <a:xfrm>
+            <a:off x="6428232" y="3364992"/>
+            <a:ext cx="1645920" cy="475488"/>
+          </a:xfrm>
+          <a:prstGeom prst="rect">
+            <a:avLst/>
+          </a:prstGeom>
+          <a:noFill/>
+          <a:ln/>
+        </p:spPr>
+        <p:txBody>
+          <a:bodyPr wrap="square" lIns="0" tIns="0" rIns="0" bIns="0" rtlCol="0" anchor="ctr"/>
+          <a:lstStyle/>
+          <a:p>
+            <a:pPr algn="ctr" indent="0" marL="0">
+              <a:buNone/>
+            </a:pPr>
+            <a:r>
+              <a:rPr lang="en-US" sz="1400" b="1" dirty="0">
+                <a:solidFill>
+                  <a:srgbClr val="0D9488"/>
+                </a:solidFill>
+                <a:latin typeface="Trebuchet MS" pitchFamily="34" charset="0"/>
+                <a:ea typeface="Trebuchet MS" pitchFamily="34" charset="-122"/>
+                <a:cs typeface="Trebuchet MS" pitchFamily="34" charset="-120"/>
+              </a:rPr>
+              <a:t>ence</a:t>
+            </a:r>
+            <a:endParaRPr lang="en-US" sz="1400" dirty="0"/>
+          </a:p>
+        </p:txBody>
+      </p:sp>
+      <p:sp>
+        <p:nvSpPr>
+          <p:cNvPr id="33" name="Shape 31"/>
+          <p:cNvSpPr/>
+          <p:nvPr/>
+        </p:nvSpPr>
+        <p:spPr>
+          <a:xfrm>
+            <a:off x="365760" y="4096512"/>
+            <a:ext cx="1371600" cy="804672"/>
+          </a:xfrm>
+          <a:prstGeom prst="rect">
+            <a:avLst>
+              <a:gd name="adj" fmla="val 6818"/>
+            </a:avLst>
+          </a:prstGeom>
+          <a:solidFill>
+            <a:srgbClr val="E2E8F0"/>
+          </a:solidFill>
+          <a:ln w="12700">
+            <a:solidFill>
+              <a:srgbClr val="E2E8F0"/>
+            </a:solidFill>
+            <a:prstDash val="solid"/>
+          </a:ln>
+        </p:spPr>
+      </p:sp>
+      <p:sp>
+        <p:nvSpPr>
+          <p:cNvPr id="34" name="Text 32"/>
+          <p:cNvSpPr/>
+          <p:nvPr/>
+        </p:nvSpPr>
+        <p:spPr>
+          <a:xfrm>
+            <a:off x="365760" y="4096512"/>
+            <a:ext cx="1371600" cy="804672"/>
+          </a:xfrm>
+          <a:prstGeom prst="rect">
+            <a:avLst/>
+          </a:prstGeom>
+          <a:noFill/>
+          <a:ln/>
+        </p:spPr>
+        <p:txBody>
+          <a:bodyPr wrap="square" lIns="0" tIns="0" rIns="0" bIns="0" rtlCol="0" anchor="ctr"/>
+          <a:lstStyle/>
+          <a:p>
+            <a:pPr algn="ctr" indent="0" marL="0">
+              <a:buNone/>
+            </a:pPr>
+            <a:r>
+              <a:rPr lang="en-US" sz="1100" b="1" dirty="0">
+                <a:solidFill>
+                  <a:srgbClr val="475569"/>
+                </a:solidFill>
+                <a:latin typeface="Trebuchet MS" pitchFamily="34" charset="0"/>
+                <a:ea typeface="Trebuchet MS" pitchFamily="34" charset="-122"/>
+                <a:cs typeface="Trebuchet MS" pitchFamily="34" charset="-120"/>
+              </a:rPr>
+              <a:t>Phonemes</a:t>
+            </a:r>
+            <a:endParaRPr lang="en-US" sz="1100" dirty="0"/>
+          </a:p>
+        </p:txBody>
+      </p:sp>
+      <p:sp>
+        <p:nvSpPr>
+          <p:cNvPr id="35" name="Shape 33"/>
+          <p:cNvSpPr/>
+          <p:nvPr/>
+        </p:nvSpPr>
+        <p:spPr>
+          <a:xfrm>
+            <a:off x="1874520" y="4096512"/>
+            <a:ext cx="6903720" cy="804672"/>
+          </a:xfrm>
+          <a:prstGeom prst="rect">
+            <a:avLst>
+              <a:gd name="adj" fmla="val 6818"/>
+            </a:avLst>
+          </a:prstGeom>
+          <a:solidFill>
+            <a:srgbClr val="FCE7F3"/>
+          </a:solidFill>
+          <a:ln w="12700">
+            <a:solidFill>
+              <a:srgbClr val="DB2777"/>
+            </a:solidFill>
+            <a:prstDash val="solid"/>
+          </a:ln>
+        </p:spPr>
+      </p:sp>
+      <p:sp>
+        <p:nvSpPr>
+          <p:cNvPr id="36" name="Shape 34"/>
+          <p:cNvSpPr/>
+          <p:nvPr/>
+        </p:nvSpPr>
+        <p:spPr>
+          <a:xfrm>
+            <a:off x="2254649" y="4169664"/>
+            <a:ext cx="685800" cy="384048"/>
+          </a:xfrm>
+          <a:prstGeom prst="rect">
+            <a:avLst>
+              <a:gd name="adj" fmla="val 9524"/>
+            </a:avLst>
+          </a:prstGeom>
+          <a:solidFill>
+            <a:srgbClr val="FFFFFF"/>
+          </a:solidFill>
+          <a:ln w="12700">
+            <a:solidFill>
+              <a:srgbClr val="DB2777"/>
+            </a:solidFill>
+            <a:prstDash val="solid"/>
+          </a:ln>
+        </p:spPr>
+      </p:sp>
+      <p:sp>
+        <p:nvSpPr>
+          <p:cNvPr id="37" name="Text 35"/>
+          <p:cNvSpPr/>
+          <p:nvPr/>
+        </p:nvSpPr>
+        <p:spPr>
+          <a:xfrm>
+            <a:off x="2254649" y="4169664"/>
+            <a:ext cx="685800" cy="384048"/>
+          </a:xfrm>
+          <a:prstGeom prst="rect">
+            <a:avLst/>
+          </a:prstGeom>
+          <a:noFill/>
+          <a:ln/>
+        </p:spPr>
+        <p:txBody>
+          <a:bodyPr wrap="square" lIns="0" tIns="0" rIns="0" bIns="0" rtlCol="0" anchor="ctr"/>
+          <a:lstStyle/>
+          <a:p>
+            <a:pPr algn="ctr" indent="0" marL="0">
+              <a:buNone/>
+            </a:pPr>
+            <a:r>
+              <a:rPr lang="en-US" sz="900" b="1" dirty="0">
+                <a:solidFill>
+                  <a:srgbClr val="9D174D"/>
+                </a:solidFill>
+                <a:latin typeface="Trebuchet MS" pitchFamily="34" charset="0"/>
+                <a:ea typeface="Trebuchet MS" pitchFamily="34" charset="-122"/>
+                <a:cs typeface="Trebuchet MS" pitchFamily="34" charset="-120"/>
+              </a:rPr>
+              <a:t>au</a:t>
+            </a:r>
+            <a:endParaRPr lang="en-US" sz="900" dirty="0"/>
+          </a:p>
+        </p:txBody>
+      </p:sp>
+      <p:sp>
+        <p:nvSpPr>
+          <p:cNvPr id="38" name="Shape 36"/>
+          <p:cNvSpPr/>
+          <p:nvPr/>
+        </p:nvSpPr>
+        <p:spPr>
+          <a:xfrm>
+            <a:off x="3293146" y="4169664"/>
+            <a:ext cx="685800" cy="384048"/>
+          </a:xfrm>
+          <a:prstGeom prst="rect">
+            <a:avLst>
+              <a:gd name="adj" fmla="val 9524"/>
+            </a:avLst>
+          </a:prstGeom>
+          <a:solidFill>
+            <a:srgbClr val="FFFFFF"/>
+          </a:solidFill>
+          <a:ln w="12700">
+            <a:solidFill>
+              <a:srgbClr val="DB2777"/>
+            </a:solidFill>
+            <a:prstDash val="solid"/>
+          </a:ln>
+        </p:spPr>
+      </p:sp>
+      <p:sp>
+        <p:nvSpPr>
+          <p:cNvPr id="39" name="Text 37"/>
+          <p:cNvSpPr/>
+          <p:nvPr/>
+        </p:nvSpPr>
+        <p:spPr>
+          <a:xfrm>
+            <a:off x="3293146" y="4169664"/>
+            <a:ext cx="685800" cy="384048"/>
+          </a:xfrm>
+          <a:prstGeom prst="rect">
+            <a:avLst/>
+          </a:prstGeom>
+          <a:noFill/>
+          <a:ln/>
+        </p:spPr>
+        <p:txBody>
+          <a:bodyPr wrap="square" lIns="0" tIns="0" rIns="0" bIns="0" rtlCol="0" anchor="ctr"/>
+          <a:lstStyle/>
+          <a:p>
+            <a:pPr algn="ctr" indent="0" marL="0">
+              <a:buNone/>
+            </a:pPr>
+            <a:r>
+              <a:rPr lang="en-US" sz="900" b="1" dirty="0">
+                <a:solidFill>
+                  <a:srgbClr val="9D174D"/>
+                </a:solidFill>
+                <a:latin typeface="Trebuchet MS" pitchFamily="34" charset="0"/>
+                <a:ea typeface="Trebuchet MS" pitchFamily="34" charset="-122"/>
+                <a:cs typeface="Trebuchet MS" pitchFamily="34" charset="-120"/>
+              </a:rPr>
+              <a:t>d</a:t>
+            </a:r>
+            <a:endParaRPr lang="en-US" sz="900" dirty="0"/>
+          </a:p>
+        </p:txBody>
+      </p:sp>
+      <p:sp>
+        <p:nvSpPr>
+          <p:cNvPr id="40" name="Shape 38"/>
+          <p:cNvSpPr/>
+          <p:nvPr/>
+        </p:nvSpPr>
+        <p:spPr>
+          <a:xfrm>
+            <a:off x="4331643" y="4169664"/>
+            <a:ext cx="685800" cy="384048"/>
+          </a:xfrm>
+          <a:prstGeom prst="rect">
+            <a:avLst>
+              <a:gd name="adj" fmla="val 9524"/>
+            </a:avLst>
+          </a:prstGeom>
+          <a:solidFill>
+            <a:srgbClr val="FFFFFF"/>
+          </a:solidFill>
+          <a:ln w="12700">
+            <a:solidFill>
+              <a:srgbClr val="DB2777"/>
+            </a:solidFill>
+            <a:prstDash val="solid"/>
+          </a:ln>
+        </p:spPr>
+      </p:sp>
+      <p:sp>
+        <p:nvSpPr>
+          <p:cNvPr id="41" name="Text 39"/>
+          <p:cNvSpPr/>
+          <p:nvPr/>
+        </p:nvSpPr>
+        <p:spPr>
+          <a:xfrm>
+            <a:off x="4331643" y="4169664"/>
+            <a:ext cx="685800" cy="384048"/>
+          </a:xfrm>
+          <a:prstGeom prst="rect">
+            <a:avLst/>
+          </a:prstGeom>
+          <a:noFill/>
+          <a:ln/>
+        </p:spPr>
+        <p:txBody>
+          <a:bodyPr wrap="square" lIns="0" tIns="0" rIns="0" bIns="0" rtlCol="0" anchor="ctr"/>
+          <a:lstStyle/>
+          <a:p>
+            <a:pPr algn="ctr" indent="0" marL="0">
+              <a:buNone/>
+            </a:pPr>
+            <a:r>
+              <a:rPr lang="en-US" sz="900" b="1" dirty="0">
+                <a:solidFill>
+                  <a:srgbClr val="9D174D"/>
+                </a:solidFill>
+                <a:latin typeface="Trebuchet MS" pitchFamily="34" charset="0"/>
+                <a:ea typeface="Trebuchet MS" pitchFamily="34" charset="-122"/>
+                <a:cs typeface="Trebuchet MS" pitchFamily="34" charset="-120"/>
+              </a:rPr>
+              <a:t>i</a:t>
+            </a:r>
+            <a:endParaRPr lang="en-US" sz="900" dirty="0"/>
+          </a:p>
+        </p:txBody>
+      </p:sp>
+      <p:sp>
+        <p:nvSpPr>
+          <p:cNvPr id="42" name="Shape 40"/>
+          <p:cNvSpPr/>
+          <p:nvPr/>
+        </p:nvSpPr>
+        <p:spPr>
+          <a:xfrm>
+            <a:off x="5370141" y="4169664"/>
+            <a:ext cx="685800" cy="384048"/>
+          </a:xfrm>
+          <a:prstGeom prst="rect">
+            <a:avLst>
+              <a:gd name="adj" fmla="val 9524"/>
+            </a:avLst>
+          </a:prstGeom>
+          <a:solidFill>
+            <a:srgbClr val="FFFFFF"/>
+          </a:solidFill>
+          <a:ln w="12700">
+            <a:solidFill>
+              <a:srgbClr val="DB2777"/>
+            </a:solidFill>
+            <a:prstDash val="solid"/>
+          </a:ln>
+        </p:spPr>
+      </p:sp>
+      <p:sp>
+        <p:nvSpPr>
+          <p:cNvPr id="43" name="Text 41"/>
+          <p:cNvSpPr/>
+          <p:nvPr/>
+        </p:nvSpPr>
+        <p:spPr>
+          <a:xfrm>
+            <a:off x="5370141" y="4169664"/>
+            <a:ext cx="685800" cy="384048"/>
+          </a:xfrm>
+          <a:prstGeom prst="rect">
+            <a:avLst/>
+          </a:prstGeom>
+          <a:noFill/>
+          <a:ln/>
+        </p:spPr>
+        <p:txBody>
+          <a:bodyPr wrap="square" lIns="0" tIns="0" rIns="0" bIns="0" rtlCol="0" anchor="ctr"/>
+          <a:lstStyle/>
+          <a:p>
+            <a:pPr algn="ctr" indent="0" marL="0">
+              <a:buNone/>
+            </a:pPr>
+            <a:r>
+              <a:rPr lang="en-US" sz="900" b="1" dirty="0">
+                <a:solidFill>
+                  <a:srgbClr val="9D174D"/>
+                </a:solidFill>
+                <a:latin typeface="Trebuchet MS" pitchFamily="34" charset="0"/>
+                <a:ea typeface="Trebuchet MS" pitchFamily="34" charset="-122"/>
+                <a:cs typeface="Trebuchet MS" pitchFamily="34" charset="-120"/>
+              </a:rPr>
+              <a:t>e</a:t>
+            </a:r>
+            <a:endParaRPr lang="en-US" sz="900" dirty="0"/>
+          </a:p>
+        </p:txBody>
+      </p:sp>
+      <p:sp>
+        <p:nvSpPr>
+          <p:cNvPr id="44" name="Shape 42"/>
+          <p:cNvSpPr/>
+          <p:nvPr/>
+        </p:nvSpPr>
+        <p:spPr>
+          <a:xfrm>
+            <a:off x="6408638" y="4169664"/>
+            <a:ext cx="685800" cy="384048"/>
+          </a:xfrm>
+          <a:prstGeom prst="rect">
+            <a:avLst>
+              <a:gd name="adj" fmla="val 9524"/>
+            </a:avLst>
+          </a:prstGeom>
+          <a:solidFill>
+            <a:srgbClr val="FFFFFF"/>
+          </a:solidFill>
+          <a:ln w="12700">
+            <a:solidFill>
+              <a:srgbClr val="DB2777"/>
+            </a:solidFill>
+            <a:prstDash val="solid"/>
+          </a:ln>
+        </p:spPr>
+      </p:sp>
+      <p:sp>
+        <p:nvSpPr>
+          <p:cNvPr id="45" name="Text 43"/>
+          <p:cNvSpPr/>
+          <p:nvPr/>
+        </p:nvSpPr>
+        <p:spPr>
+          <a:xfrm>
+            <a:off x="6408638" y="4169664"/>
+            <a:ext cx="685800" cy="384048"/>
+          </a:xfrm>
+          <a:prstGeom prst="rect">
+            <a:avLst/>
+          </a:prstGeom>
+          <a:noFill/>
+          <a:ln/>
+        </p:spPr>
+        <p:txBody>
+          <a:bodyPr wrap="square" lIns="0" tIns="0" rIns="0" bIns="0" rtlCol="0" anchor="ctr"/>
+          <a:lstStyle/>
+          <a:p>
+            <a:pPr algn="ctr" indent="0" marL="0">
+              <a:buNone/>
+            </a:pPr>
+            <a:r>
+              <a:rPr lang="en-US" sz="900" b="1" dirty="0">
+                <a:solidFill>
+                  <a:srgbClr val="9D174D"/>
+                </a:solidFill>
+                <a:latin typeface="Trebuchet MS" pitchFamily="34" charset="0"/>
+                <a:ea typeface="Trebuchet MS" pitchFamily="34" charset="-122"/>
+                <a:cs typeface="Trebuchet MS" pitchFamily="34" charset="-120"/>
+              </a:rPr>
+              <a:t>n</a:t>
+            </a:r>
+            <a:endParaRPr lang="en-US" sz="900" dirty="0"/>
+          </a:p>
+        </p:txBody>
+      </p:sp>
+      <p:sp>
+        <p:nvSpPr>
+          <p:cNvPr id="46" name="Shape 44"/>
+          <p:cNvSpPr/>
+          <p:nvPr/>
+        </p:nvSpPr>
+        <p:spPr>
+          <a:xfrm>
+            <a:off x="7447135" y="4169664"/>
+            <a:ext cx="685800" cy="384048"/>
+          </a:xfrm>
+          <a:prstGeom prst="rect">
+            <a:avLst>
+              <a:gd name="adj" fmla="val 9524"/>
+            </a:avLst>
+          </a:prstGeom>
+          <a:solidFill>
+            <a:srgbClr val="FFFFFF"/>
+          </a:solidFill>
+          <a:ln w="12700">
+            <a:solidFill>
+              <a:srgbClr val="DB2777"/>
+            </a:solidFill>
+            <a:prstDash val="solid"/>
+          </a:ln>
+        </p:spPr>
+      </p:sp>
+      <p:sp>
+        <p:nvSpPr>
+          <p:cNvPr id="47" name="Text 45"/>
+          <p:cNvSpPr/>
+          <p:nvPr/>
+        </p:nvSpPr>
+        <p:spPr>
+          <a:xfrm>
+            <a:off x="7447135" y="4169664"/>
+            <a:ext cx="685800" cy="384048"/>
+          </a:xfrm>
+          <a:prstGeom prst="rect">
+            <a:avLst/>
+          </a:prstGeom>
+          <a:noFill/>
+          <a:ln/>
+        </p:spPr>
+        <p:txBody>
+          <a:bodyPr wrap="square" lIns="0" tIns="0" rIns="0" bIns="0" rtlCol="0" anchor="ctr"/>
+          <a:lstStyle/>
+          <a:p>
+            <a:pPr algn="ctr" indent="0" marL="0">
+              <a:buNone/>
+            </a:pPr>
+            <a:r>
+              <a:rPr lang="en-US" sz="900" b="1" dirty="0">
+                <a:solidFill>
+                  <a:srgbClr val="9D174D"/>
+                </a:solidFill>
+                <a:latin typeface="Trebuchet MS" pitchFamily="34" charset="0"/>
+                <a:ea typeface="Trebuchet MS" pitchFamily="34" charset="-122"/>
+                <a:cs typeface="Trebuchet MS" pitchFamily="34" charset="-120"/>
+              </a:rPr>
+              <a:t>ce</a:t>
+            </a:r>
+            <a:endParaRPr lang="en-US" sz="900" dirty="0"/>
+          </a:p>
+        </p:txBody>
+      </p:sp>
+      <p:sp>
+        <p:nvSpPr>
+          <p:cNvPr id="48" name="Text 46"/>
+          <p:cNvSpPr/>
+          <p:nvPr/>
+        </p:nvSpPr>
+        <p:spPr>
+          <a:xfrm>
+            <a:off x="7447135" y="4572000"/>
+            <a:ext cx="685800" cy="219456"/>
           </a:xfrm>
           <a:prstGeom prst="rect">
             <a:avLst/>
@@ -15892,1151 +16453,17 @@
               <a:buNone/>
             </a:pPr>
             <a:r>
-              <a:rPr lang="en-US" sz="850" dirty="0">
-                <a:solidFill>
-                  <a:srgbClr val="475569"/>
+              <a:rPr lang="en-US" sz="750" i="1" dirty="0">
+                <a:solidFill>
+                  <a:srgbClr val="94A3B8"/>
                 </a:solidFill>
                 <a:latin typeface="Calibri" pitchFamily="34" charset="0"/>
                 <a:ea typeface="Calibri" pitchFamily="34" charset="-122"/>
                 <a:cs typeface="Calibri" pitchFamily="34" charset="-120"/>
               </a:rPr>
-              <a:t>state or result of</a:t>
-            </a:r>
-            <a:endParaRPr lang="en-US" sz="850" dirty="0"/>
-          </a:p>
-        </p:txBody>
-      </p:sp>
-      <p:sp>
-        <p:nvSpPr>
-          <p:cNvPr id="25" name="Shape 23"/>
-          <p:cNvSpPr/>
-          <p:nvPr/>
-        </p:nvSpPr>
-        <p:spPr>
-          <a:xfrm>
-            <a:off x="365760" y="3273552"/>
-            <a:ext cx="1371600" cy="658368"/>
-          </a:xfrm>
-          <a:prstGeom prst="rect">
-            <a:avLst>
-              <a:gd name="adj" fmla="val 8333"/>
-            </a:avLst>
-          </a:prstGeom>
-          <a:solidFill>
-            <a:srgbClr val="E2E8F0"/>
-          </a:solidFill>
-          <a:ln w="12700">
-            <a:solidFill>
-              <a:srgbClr val="E2E8F0"/>
-            </a:solidFill>
-            <a:prstDash val="solid"/>
-          </a:ln>
-        </p:spPr>
-      </p:sp>
-      <p:sp>
-        <p:nvSpPr>
-          <p:cNvPr id="26" name="Text 24"/>
-          <p:cNvSpPr/>
-          <p:nvPr/>
-        </p:nvSpPr>
-        <p:spPr>
-          <a:xfrm>
-            <a:off x="365760" y="3273552"/>
-            <a:ext cx="1371600" cy="658368"/>
-          </a:xfrm>
-          <a:prstGeom prst="rect">
-            <a:avLst/>
-          </a:prstGeom>
-          <a:noFill/>
-          <a:ln/>
-        </p:spPr>
-        <p:txBody>
-          <a:bodyPr wrap="square" lIns="0" tIns="0" rIns="0" bIns="0" rtlCol="0" anchor="ctr"/>
-          <a:lstStyle/>
-          <a:p>
-            <a:pPr algn="ctr" indent="0" marL="0">
-              <a:buNone/>
-            </a:pPr>
-            <a:r>
-              <a:rPr lang="en-US" sz="1100" b="1" dirty="0">
-                <a:solidFill>
-                  <a:srgbClr val="475569"/>
-                </a:solidFill>
-                <a:latin typeface="Trebuchet MS" pitchFamily="34" charset="0"/>
-                <a:ea typeface="Trebuchet MS" pitchFamily="34" charset="-122"/>
-                <a:cs typeface="Trebuchet MS" pitchFamily="34" charset="-120"/>
-              </a:rPr>
-              <a:t>Syllables</a:t>
-            </a:r>
-            <a:endParaRPr lang="en-US" sz="1100" dirty="0"/>
-          </a:p>
-        </p:txBody>
-      </p:sp>
-      <p:sp>
-        <p:nvSpPr>
-          <p:cNvPr id="27" name="Shape 25"/>
-          <p:cNvSpPr/>
-          <p:nvPr/>
-        </p:nvSpPr>
-        <p:spPr>
-          <a:xfrm>
-            <a:off x="1874520" y="3273552"/>
-            <a:ext cx="6903720" cy="658368"/>
-          </a:xfrm>
-          <a:prstGeom prst="rect">
-            <a:avLst>
-              <a:gd name="adj" fmla="val 8333"/>
-            </a:avLst>
-          </a:prstGeom>
-          <a:solidFill>
-            <a:srgbClr val="CCFBF1"/>
-          </a:solidFill>
-          <a:ln w="12700">
-            <a:solidFill>
-              <a:srgbClr val="0D9488"/>
-            </a:solidFill>
-            <a:prstDash val="solid"/>
-          </a:ln>
-        </p:spPr>
-      </p:sp>
-      <p:sp>
-        <p:nvSpPr>
-          <p:cNvPr id="28" name="Shape 26"/>
-          <p:cNvSpPr/>
-          <p:nvPr/>
-        </p:nvSpPr>
-        <p:spPr>
-          <a:xfrm>
-            <a:off x="2313432" y="3364992"/>
-            <a:ext cx="1645920" cy="475488"/>
-          </a:xfrm>
-          <a:prstGeom prst="rect">
-            <a:avLst>
-              <a:gd name="adj" fmla="val 9615"/>
-            </a:avLst>
-          </a:prstGeom>
-          <a:solidFill>
-            <a:srgbClr val="FFFFFF"/>
-          </a:solidFill>
-          <a:ln w="12700">
-            <a:solidFill>
-              <a:srgbClr val="0D9488"/>
-            </a:solidFill>
-            <a:prstDash val="solid"/>
-          </a:ln>
-        </p:spPr>
-      </p:sp>
-      <p:sp>
-        <p:nvSpPr>
-          <p:cNvPr id="29" name="Text 27"/>
-          <p:cNvSpPr/>
-          <p:nvPr/>
-        </p:nvSpPr>
-        <p:spPr>
-          <a:xfrm>
-            <a:off x="2313432" y="3364992"/>
-            <a:ext cx="1645920" cy="475488"/>
-          </a:xfrm>
-          <a:prstGeom prst="rect">
-            <a:avLst/>
-          </a:prstGeom>
-          <a:noFill/>
-          <a:ln/>
-        </p:spPr>
-        <p:txBody>
-          <a:bodyPr wrap="square" lIns="0" tIns="0" rIns="0" bIns="0" rtlCol="0" anchor="ctr"/>
-          <a:lstStyle/>
-          <a:p>
-            <a:pPr algn="ctr" indent="0" marL="0">
-              <a:buNone/>
-            </a:pPr>
-            <a:r>
-              <a:rPr lang="en-US" sz="1400" b="1" dirty="0">
-                <a:solidFill>
-                  <a:srgbClr val="0D9488"/>
-                </a:solidFill>
-                <a:latin typeface="Trebuchet MS" pitchFamily="34" charset="0"/>
-                <a:ea typeface="Trebuchet MS" pitchFamily="34" charset="-122"/>
-                <a:cs typeface="Trebuchet MS" pitchFamily="34" charset="-120"/>
-              </a:rPr>
-              <a:t>ex</a:t>
-            </a:r>
-            <a:endParaRPr lang="en-US" sz="1400" dirty="0"/>
-          </a:p>
-        </p:txBody>
-      </p:sp>
-      <p:sp>
-        <p:nvSpPr>
-          <p:cNvPr id="30" name="Text 28"/>
-          <p:cNvSpPr/>
-          <p:nvPr/>
-        </p:nvSpPr>
-        <p:spPr>
-          <a:xfrm>
-            <a:off x="3959352" y="3364992"/>
-            <a:ext cx="411480" cy="475488"/>
-          </a:xfrm>
-          <a:prstGeom prst="rect">
-            <a:avLst/>
-          </a:prstGeom>
-          <a:noFill/>
-          <a:ln/>
-        </p:spPr>
-        <p:txBody>
-          <a:bodyPr wrap="square" lIns="0" tIns="0" rIns="0" bIns="0" rtlCol="0" anchor="ctr"/>
-          <a:lstStyle/>
-          <a:p>
-            <a:pPr algn="ctr" indent="0" marL="0">
-              <a:buNone/>
-            </a:pPr>
-            <a:r>
-              <a:rPr lang="en-US" sz="1600" b="1" dirty="0">
-                <a:solidFill>
-                  <a:srgbClr val="0D9488"/>
-                </a:solidFill>
-                <a:latin typeface="Trebuchet MS" pitchFamily="34" charset="0"/>
-                <a:ea typeface="Trebuchet MS" pitchFamily="34" charset="-122"/>
-                <a:cs typeface="Trebuchet MS" pitchFamily="34" charset="-120"/>
-              </a:rPr>
-              <a:t>·</a:t>
-            </a:r>
-            <a:endParaRPr lang="en-US" sz="1600" dirty="0"/>
-          </a:p>
-        </p:txBody>
-      </p:sp>
-      <p:sp>
-        <p:nvSpPr>
-          <p:cNvPr id="31" name="Shape 29"/>
-          <p:cNvSpPr/>
-          <p:nvPr/>
-        </p:nvSpPr>
-        <p:spPr>
-          <a:xfrm>
-            <a:off x="4370832" y="3364992"/>
-            <a:ext cx="1645920" cy="475488"/>
-          </a:xfrm>
-          <a:prstGeom prst="rect">
-            <a:avLst>
-              <a:gd name="adj" fmla="val 9615"/>
-            </a:avLst>
-          </a:prstGeom>
-          <a:solidFill>
-            <a:srgbClr val="FFFFFF"/>
-          </a:solidFill>
-          <a:ln w="12700">
-            <a:solidFill>
-              <a:srgbClr val="0D9488"/>
-            </a:solidFill>
-            <a:prstDash val="solid"/>
-          </a:ln>
-        </p:spPr>
-      </p:sp>
-      <p:sp>
-        <p:nvSpPr>
-          <p:cNvPr id="32" name="Text 30"/>
-          <p:cNvSpPr/>
-          <p:nvPr/>
-        </p:nvSpPr>
-        <p:spPr>
-          <a:xfrm>
-            <a:off x="4370832" y="3364992"/>
-            <a:ext cx="1645920" cy="475488"/>
-          </a:xfrm>
-          <a:prstGeom prst="rect">
-            <a:avLst/>
-          </a:prstGeom>
-          <a:noFill/>
-          <a:ln/>
-        </p:spPr>
-        <p:txBody>
-          <a:bodyPr wrap="square" lIns="0" tIns="0" rIns="0" bIns="0" rtlCol="0" anchor="ctr"/>
-          <a:lstStyle/>
-          <a:p>
-            <a:pPr algn="ctr" indent="0" marL="0">
-              <a:buNone/>
-            </a:pPr>
-            <a:r>
-              <a:rPr lang="en-US" sz="1400" b="1" dirty="0">
-                <a:solidFill>
-                  <a:srgbClr val="0D9488"/>
-                </a:solidFill>
-                <a:latin typeface="Trebuchet MS" pitchFamily="34" charset="0"/>
-                <a:ea typeface="Trebuchet MS" pitchFamily="34" charset="-122"/>
-                <a:cs typeface="Trebuchet MS" pitchFamily="34" charset="-120"/>
-              </a:rPr>
-              <a:t>cite</a:t>
-            </a:r>
-            <a:endParaRPr lang="en-US" sz="1400" dirty="0"/>
-          </a:p>
-        </p:txBody>
-      </p:sp>
-      <p:sp>
-        <p:nvSpPr>
-          <p:cNvPr id="33" name="Text 31"/>
-          <p:cNvSpPr/>
-          <p:nvPr/>
-        </p:nvSpPr>
-        <p:spPr>
-          <a:xfrm>
-            <a:off x="6016752" y="3364992"/>
-            <a:ext cx="411480" cy="475488"/>
-          </a:xfrm>
-          <a:prstGeom prst="rect">
-            <a:avLst/>
-          </a:prstGeom>
-          <a:noFill/>
-          <a:ln/>
-        </p:spPr>
-        <p:txBody>
-          <a:bodyPr wrap="square" lIns="0" tIns="0" rIns="0" bIns="0" rtlCol="0" anchor="ctr"/>
-          <a:lstStyle/>
-          <a:p>
-            <a:pPr algn="ctr" indent="0" marL="0">
-              <a:buNone/>
-            </a:pPr>
-            <a:r>
-              <a:rPr lang="en-US" sz="1600" b="1" dirty="0">
-                <a:solidFill>
-                  <a:srgbClr val="0D9488"/>
-                </a:solidFill>
-                <a:latin typeface="Trebuchet MS" pitchFamily="34" charset="0"/>
-                <a:ea typeface="Trebuchet MS" pitchFamily="34" charset="-122"/>
-                <a:cs typeface="Trebuchet MS" pitchFamily="34" charset="-120"/>
-              </a:rPr>
-              <a:t>·</a:t>
-            </a:r>
-            <a:endParaRPr lang="en-US" sz="1600" dirty="0"/>
-          </a:p>
-        </p:txBody>
-      </p:sp>
-      <p:sp>
-        <p:nvSpPr>
-          <p:cNvPr id="34" name="Shape 32"/>
-          <p:cNvSpPr/>
-          <p:nvPr/>
-        </p:nvSpPr>
-        <p:spPr>
-          <a:xfrm>
-            <a:off x="6428232" y="3364992"/>
-            <a:ext cx="1645920" cy="475488"/>
-          </a:xfrm>
-          <a:prstGeom prst="rect">
-            <a:avLst>
-              <a:gd name="adj" fmla="val 9615"/>
-            </a:avLst>
-          </a:prstGeom>
-          <a:solidFill>
-            <a:srgbClr val="FFFFFF"/>
-          </a:solidFill>
-          <a:ln w="12700">
-            <a:solidFill>
-              <a:srgbClr val="0D9488"/>
-            </a:solidFill>
-            <a:prstDash val="solid"/>
-          </a:ln>
-        </p:spPr>
-      </p:sp>
-      <p:sp>
-        <p:nvSpPr>
-          <p:cNvPr id="35" name="Text 33"/>
-          <p:cNvSpPr/>
-          <p:nvPr/>
-        </p:nvSpPr>
-        <p:spPr>
-          <a:xfrm>
-            <a:off x="6428232" y="3364992"/>
-            <a:ext cx="1645920" cy="475488"/>
-          </a:xfrm>
-          <a:prstGeom prst="rect">
-            <a:avLst/>
-          </a:prstGeom>
-          <a:noFill/>
-          <a:ln/>
-        </p:spPr>
-        <p:txBody>
-          <a:bodyPr wrap="square" lIns="0" tIns="0" rIns="0" bIns="0" rtlCol="0" anchor="ctr"/>
-          <a:lstStyle/>
-          <a:p>
-            <a:pPr algn="ctr" indent="0" marL="0">
-              <a:buNone/>
-            </a:pPr>
-            <a:r>
-              <a:rPr lang="en-US" sz="1400" b="1" dirty="0">
-                <a:solidFill>
-                  <a:srgbClr val="0D9488"/>
-                </a:solidFill>
-                <a:latin typeface="Trebuchet MS" pitchFamily="34" charset="0"/>
-                <a:ea typeface="Trebuchet MS" pitchFamily="34" charset="-122"/>
-                <a:cs typeface="Trebuchet MS" pitchFamily="34" charset="-120"/>
-              </a:rPr>
-              <a:t>ment</a:t>
-            </a:r>
-            <a:endParaRPr lang="en-US" sz="1400" dirty="0"/>
-          </a:p>
-        </p:txBody>
-      </p:sp>
-      <p:sp>
-        <p:nvSpPr>
-          <p:cNvPr id="36" name="Shape 34"/>
-          <p:cNvSpPr/>
-          <p:nvPr/>
-        </p:nvSpPr>
-        <p:spPr>
-          <a:xfrm>
-            <a:off x="365760" y="4096512"/>
-            <a:ext cx="1371600" cy="804672"/>
-          </a:xfrm>
-          <a:prstGeom prst="rect">
-            <a:avLst>
-              <a:gd name="adj" fmla="val 6818"/>
-            </a:avLst>
-          </a:prstGeom>
-          <a:solidFill>
-            <a:srgbClr val="E2E8F0"/>
-          </a:solidFill>
-          <a:ln w="12700">
-            <a:solidFill>
-              <a:srgbClr val="E2E8F0"/>
-            </a:solidFill>
-            <a:prstDash val="solid"/>
-          </a:ln>
-        </p:spPr>
-      </p:sp>
-      <p:sp>
-        <p:nvSpPr>
-          <p:cNvPr id="37" name="Text 35"/>
-          <p:cNvSpPr/>
-          <p:nvPr/>
-        </p:nvSpPr>
-        <p:spPr>
-          <a:xfrm>
-            <a:off x="365760" y="4096512"/>
-            <a:ext cx="1371600" cy="804672"/>
-          </a:xfrm>
-          <a:prstGeom prst="rect">
-            <a:avLst/>
-          </a:prstGeom>
-          <a:noFill/>
-          <a:ln/>
-        </p:spPr>
-        <p:txBody>
-          <a:bodyPr wrap="square" lIns="0" tIns="0" rIns="0" bIns="0" rtlCol="0" anchor="ctr"/>
-          <a:lstStyle/>
-          <a:p>
-            <a:pPr algn="ctr" indent="0" marL="0">
-              <a:buNone/>
-            </a:pPr>
-            <a:r>
-              <a:rPr lang="en-US" sz="1100" b="1" dirty="0">
-                <a:solidFill>
-                  <a:srgbClr val="475569"/>
-                </a:solidFill>
-                <a:latin typeface="Trebuchet MS" pitchFamily="34" charset="0"/>
-                <a:ea typeface="Trebuchet MS" pitchFamily="34" charset="-122"/>
-                <a:cs typeface="Trebuchet MS" pitchFamily="34" charset="-120"/>
-              </a:rPr>
-              <a:t>Phonemes</a:t>
-            </a:r>
-            <a:endParaRPr lang="en-US" sz="1100" dirty="0"/>
-          </a:p>
-        </p:txBody>
-      </p:sp>
-      <p:sp>
-        <p:nvSpPr>
-          <p:cNvPr id="38" name="Shape 36"/>
-          <p:cNvSpPr/>
-          <p:nvPr/>
-        </p:nvSpPr>
-        <p:spPr>
-          <a:xfrm>
-            <a:off x="1874520" y="4096512"/>
-            <a:ext cx="6903720" cy="804672"/>
-          </a:xfrm>
-          <a:prstGeom prst="rect">
-            <a:avLst>
-              <a:gd name="adj" fmla="val 6818"/>
-            </a:avLst>
-          </a:prstGeom>
-          <a:solidFill>
-            <a:srgbClr val="FCE7F3"/>
-          </a:solidFill>
-          <a:ln w="12700">
-            <a:solidFill>
-              <a:srgbClr val="DB2777"/>
-            </a:solidFill>
-            <a:prstDash val="solid"/>
-          </a:ln>
-        </p:spPr>
-      </p:sp>
-      <p:sp>
-        <p:nvSpPr>
-          <p:cNvPr id="39" name="Shape 37"/>
-          <p:cNvSpPr/>
-          <p:nvPr/>
-        </p:nvSpPr>
-        <p:spPr>
-          <a:xfrm>
-            <a:off x="1951330" y="4169664"/>
-            <a:ext cx="676656" cy="384048"/>
-          </a:xfrm>
-          <a:prstGeom prst="rect">
-            <a:avLst>
-              <a:gd name="adj" fmla="val 9524"/>
-            </a:avLst>
-          </a:prstGeom>
-          <a:solidFill>
-            <a:srgbClr val="FFFFFF"/>
-          </a:solidFill>
-          <a:ln w="12700">
-            <a:solidFill>
-              <a:srgbClr val="DB2777"/>
-            </a:solidFill>
-            <a:prstDash val="solid"/>
-          </a:ln>
-        </p:spPr>
-      </p:sp>
-      <p:sp>
-        <p:nvSpPr>
-          <p:cNvPr id="40" name="Text 38"/>
-          <p:cNvSpPr/>
-          <p:nvPr/>
-        </p:nvSpPr>
-        <p:spPr>
-          <a:xfrm>
-            <a:off x="1951330" y="4169664"/>
-            <a:ext cx="676656" cy="384048"/>
-          </a:xfrm>
-          <a:prstGeom prst="rect">
-            <a:avLst/>
-          </a:prstGeom>
-          <a:noFill/>
-          <a:ln/>
-        </p:spPr>
-        <p:txBody>
-          <a:bodyPr wrap="square" lIns="0" tIns="0" rIns="0" bIns="0" rtlCol="0" anchor="ctr"/>
-          <a:lstStyle/>
-          <a:p>
-            <a:pPr algn="ctr" indent="0" marL="0">
-              <a:buNone/>
-            </a:pPr>
-            <a:r>
-              <a:rPr lang="en-US" sz="900" b="1" dirty="0">
-                <a:solidFill>
-                  <a:srgbClr val="9D174D"/>
-                </a:solidFill>
-                <a:latin typeface="Trebuchet MS" pitchFamily="34" charset="0"/>
-                <a:ea typeface="Trebuchet MS" pitchFamily="34" charset="-122"/>
-                <a:cs typeface="Trebuchet MS" pitchFamily="34" charset="-120"/>
-              </a:rPr>
-              <a:t>e</a:t>
-            </a:r>
-            <a:endParaRPr lang="en-US" sz="900" dirty="0"/>
-          </a:p>
-        </p:txBody>
-      </p:sp>
-      <p:sp>
-        <p:nvSpPr>
-          <p:cNvPr id="41" name="Shape 39"/>
-          <p:cNvSpPr/>
-          <p:nvPr/>
-        </p:nvSpPr>
-        <p:spPr>
-          <a:xfrm>
-            <a:off x="2677363" y="4169664"/>
-            <a:ext cx="676656" cy="384048"/>
-          </a:xfrm>
-          <a:prstGeom prst="rect">
-            <a:avLst>
-              <a:gd name="adj" fmla="val 9524"/>
-            </a:avLst>
-          </a:prstGeom>
-          <a:solidFill>
-            <a:srgbClr val="FFFFFF"/>
-          </a:solidFill>
-          <a:ln w="12700">
-            <a:solidFill>
-              <a:srgbClr val="DB2777"/>
-            </a:solidFill>
-            <a:prstDash val="solid"/>
-          </a:ln>
-        </p:spPr>
-      </p:sp>
-      <p:sp>
-        <p:nvSpPr>
-          <p:cNvPr id="42" name="Text 40"/>
-          <p:cNvSpPr/>
-          <p:nvPr/>
-        </p:nvSpPr>
-        <p:spPr>
-          <a:xfrm>
-            <a:off x="2677363" y="4169664"/>
-            <a:ext cx="676656" cy="384048"/>
-          </a:xfrm>
-          <a:prstGeom prst="rect">
-            <a:avLst/>
-          </a:prstGeom>
-          <a:noFill/>
-          <a:ln/>
-        </p:spPr>
-        <p:txBody>
-          <a:bodyPr wrap="square" lIns="0" tIns="0" rIns="0" bIns="0" rtlCol="0" anchor="ctr"/>
-          <a:lstStyle/>
-          <a:p>
-            <a:pPr algn="ctr" indent="0" marL="0">
-              <a:buNone/>
-            </a:pPr>
-            <a:r>
-              <a:rPr lang="en-US" sz="900" b="1" dirty="0">
-                <a:solidFill>
-                  <a:srgbClr val="9D174D"/>
-                </a:solidFill>
-                <a:latin typeface="Trebuchet MS" pitchFamily="34" charset="0"/>
-                <a:ea typeface="Trebuchet MS" pitchFamily="34" charset="-122"/>
-                <a:cs typeface="Trebuchet MS" pitchFamily="34" charset="-120"/>
-              </a:rPr>
-              <a:t>x</a:t>
-            </a:r>
-            <a:endParaRPr lang="en-US" sz="900" dirty="0"/>
-          </a:p>
-        </p:txBody>
-      </p:sp>
-      <p:sp>
-        <p:nvSpPr>
-          <p:cNvPr id="43" name="Shape 41"/>
-          <p:cNvSpPr/>
-          <p:nvPr/>
-        </p:nvSpPr>
-        <p:spPr>
-          <a:xfrm>
-            <a:off x="3403397" y="4169664"/>
-            <a:ext cx="676656" cy="384048"/>
-          </a:xfrm>
-          <a:prstGeom prst="rect">
-            <a:avLst>
-              <a:gd name="adj" fmla="val 9524"/>
-            </a:avLst>
-          </a:prstGeom>
-          <a:solidFill>
-            <a:srgbClr val="FFFFFF"/>
-          </a:solidFill>
-          <a:ln w="12700">
-            <a:solidFill>
-              <a:srgbClr val="DB2777"/>
-            </a:solidFill>
-            <a:prstDash val="solid"/>
-          </a:ln>
-        </p:spPr>
-      </p:sp>
-      <p:sp>
-        <p:nvSpPr>
-          <p:cNvPr id="44" name="Text 42"/>
-          <p:cNvSpPr/>
-          <p:nvPr/>
-        </p:nvSpPr>
-        <p:spPr>
-          <a:xfrm>
-            <a:off x="3403397" y="4169664"/>
-            <a:ext cx="676656" cy="384048"/>
-          </a:xfrm>
-          <a:prstGeom prst="rect">
-            <a:avLst/>
-          </a:prstGeom>
-          <a:noFill/>
-          <a:ln/>
-        </p:spPr>
-        <p:txBody>
-          <a:bodyPr wrap="square" lIns="0" tIns="0" rIns="0" bIns="0" rtlCol="0" anchor="ctr"/>
-          <a:lstStyle/>
-          <a:p>
-            <a:pPr algn="ctr" indent="0" marL="0">
-              <a:buNone/>
-            </a:pPr>
-            <a:r>
-              <a:rPr lang="en-US" sz="900" b="1" dirty="0">
-                <a:solidFill>
-                  <a:srgbClr val="9D174D"/>
-                </a:solidFill>
-                <a:latin typeface="Trebuchet MS" pitchFamily="34" charset="0"/>
-                <a:ea typeface="Trebuchet MS" pitchFamily="34" charset="-122"/>
-                <a:cs typeface="Trebuchet MS" pitchFamily="34" charset="-120"/>
-              </a:rPr>
-              <a:t>c</a:t>
-            </a:r>
-            <a:endParaRPr lang="en-US" sz="900" dirty="0"/>
-          </a:p>
-        </p:txBody>
-      </p:sp>
-      <p:sp>
-        <p:nvSpPr>
-          <p:cNvPr id="45" name="Text 43"/>
-          <p:cNvSpPr/>
-          <p:nvPr/>
-        </p:nvSpPr>
-        <p:spPr>
-          <a:xfrm>
-            <a:off x="3403397" y="4572000"/>
-            <a:ext cx="676656" cy="219456"/>
-          </a:xfrm>
-          <a:prstGeom prst="rect">
-            <a:avLst/>
-          </a:prstGeom>
-          <a:noFill/>
-          <a:ln/>
-        </p:spPr>
-        <p:txBody>
-          <a:bodyPr wrap="square" lIns="0" tIns="0" rIns="0" bIns="0" rtlCol="0" anchor="t"/>
-          <a:lstStyle/>
-          <a:p>
-            <a:pPr algn="ctr" indent="0" marL="0">
-              <a:buNone/>
-            </a:pPr>
-            <a:r>
-              <a:rPr lang="en-US" sz="750" i="1" dirty="0">
-                <a:solidFill>
-                  <a:srgbClr val="94A3B8"/>
-                </a:solidFill>
-                <a:latin typeface="Calibri" pitchFamily="34" charset="0"/>
-                <a:ea typeface="Calibri" pitchFamily="34" charset="-122"/>
-                <a:cs typeface="Calibri" pitchFamily="34" charset="-120"/>
-              </a:rPr>
               <a:t>/s/</a:t>
             </a:r>
             <a:endParaRPr lang="en-US" sz="750" dirty="0"/>
-          </a:p>
-        </p:txBody>
-      </p:sp>
-      <p:sp>
-        <p:nvSpPr>
-          <p:cNvPr id="46" name="Shape 44"/>
-          <p:cNvSpPr/>
-          <p:nvPr/>
-        </p:nvSpPr>
-        <p:spPr>
-          <a:xfrm>
-            <a:off x="4129430" y="4169664"/>
-            <a:ext cx="676656" cy="384048"/>
-          </a:xfrm>
-          <a:prstGeom prst="rect">
-            <a:avLst>
-              <a:gd name="adj" fmla="val 9524"/>
-            </a:avLst>
-          </a:prstGeom>
-          <a:solidFill>
-            <a:srgbClr val="FFFFFF"/>
-          </a:solidFill>
-          <a:ln w="12700">
-            <a:solidFill>
-              <a:srgbClr val="DB2777"/>
-            </a:solidFill>
-            <a:prstDash val="solid"/>
-          </a:ln>
-        </p:spPr>
-      </p:sp>
-      <p:sp>
-        <p:nvSpPr>
-          <p:cNvPr id="47" name="Text 45"/>
-          <p:cNvSpPr/>
-          <p:nvPr/>
-        </p:nvSpPr>
-        <p:spPr>
-          <a:xfrm>
-            <a:off x="4129430" y="4169664"/>
-            <a:ext cx="676656" cy="384048"/>
-          </a:xfrm>
-          <a:prstGeom prst="rect">
-            <a:avLst/>
-          </a:prstGeom>
-          <a:noFill/>
-          <a:ln/>
-        </p:spPr>
-        <p:txBody>
-          <a:bodyPr wrap="square" lIns="0" tIns="0" rIns="0" bIns="0" rtlCol="0" anchor="ctr"/>
-          <a:lstStyle/>
-          <a:p>
-            <a:pPr algn="ctr" indent="0" marL="0">
-              <a:buNone/>
-            </a:pPr>
-            <a:r>
-              <a:rPr lang="en-US" sz="900" b="1" dirty="0">
-                <a:solidFill>
-                  <a:srgbClr val="9D174D"/>
-                </a:solidFill>
-                <a:latin typeface="Trebuchet MS" pitchFamily="34" charset="0"/>
-                <a:ea typeface="Trebuchet MS" pitchFamily="34" charset="-122"/>
-                <a:cs typeface="Trebuchet MS" pitchFamily="34" charset="-120"/>
-              </a:rPr>
-              <a:t>i</a:t>
-            </a:r>
-            <a:endParaRPr lang="en-US" sz="900" dirty="0"/>
-          </a:p>
-        </p:txBody>
-      </p:sp>
-      <p:sp>
-        <p:nvSpPr>
-          <p:cNvPr id="48" name="Shape 46"/>
-          <p:cNvSpPr/>
-          <p:nvPr/>
-        </p:nvSpPr>
-        <p:spPr>
-          <a:xfrm>
-            <a:off x="4855464" y="4169664"/>
-            <a:ext cx="676656" cy="384048"/>
-          </a:xfrm>
-          <a:prstGeom prst="rect">
-            <a:avLst>
-              <a:gd name="adj" fmla="val 9524"/>
-            </a:avLst>
-          </a:prstGeom>
-          <a:solidFill>
-            <a:srgbClr val="FFFFFF"/>
-          </a:solidFill>
-          <a:ln w="12700">
-            <a:solidFill>
-              <a:srgbClr val="DB2777"/>
-            </a:solidFill>
-            <a:prstDash val="solid"/>
-          </a:ln>
-        </p:spPr>
-      </p:sp>
-      <p:sp>
-        <p:nvSpPr>
-          <p:cNvPr id="49" name="Text 47"/>
-          <p:cNvSpPr/>
-          <p:nvPr/>
-        </p:nvSpPr>
-        <p:spPr>
-          <a:xfrm>
-            <a:off x="4855464" y="4169664"/>
-            <a:ext cx="676656" cy="384048"/>
-          </a:xfrm>
-          <a:prstGeom prst="rect">
-            <a:avLst/>
-          </a:prstGeom>
-          <a:noFill/>
-          <a:ln/>
-        </p:spPr>
-        <p:txBody>
-          <a:bodyPr wrap="square" lIns="0" tIns="0" rIns="0" bIns="0" rtlCol="0" anchor="ctr"/>
-          <a:lstStyle/>
-          <a:p>
-            <a:pPr algn="ctr" indent="0" marL="0">
-              <a:buNone/>
-            </a:pPr>
-            <a:r>
-              <a:rPr lang="en-US" sz="900" b="1" dirty="0">
-                <a:solidFill>
-                  <a:srgbClr val="9D174D"/>
-                </a:solidFill>
-                <a:latin typeface="Trebuchet MS" pitchFamily="34" charset="0"/>
-                <a:ea typeface="Trebuchet MS" pitchFamily="34" charset="-122"/>
-                <a:cs typeface="Trebuchet MS" pitchFamily="34" charset="-120"/>
-              </a:rPr>
-              <a:t>te</a:t>
-            </a:r>
-            <a:endParaRPr lang="en-US" sz="900" dirty="0"/>
-          </a:p>
-        </p:txBody>
-      </p:sp>
-      <p:sp>
-        <p:nvSpPr>
-          <p:cNvPr id="50" name="Text 48"/>
-          <p:cNvSpPr/>
-          <p:nvPr/>
-        </p:nvSpPr>
-        <p:spPr>
-          <a:xfrm>
-            <a:off x="4855464" y="4572000"/>
-            <a:ext cx="676656" cy="219456"/>
-          </a:xfrm>
-          <a:prstGeom prst="rect">
-            <a:avLst/>
-          </a:prstGeom>
-          <a:noFill/>
-          <a:ln/>
-        </p:spPr>
-        <p:txBody>
-          <a:bodyPr wrap="square" lIns="0" tIns="0" rIns="0" bIns="0" rtlCol="0" anchor="t"/>
-          <a:lstStyle/>
-          <a:p>
-            <a:pPr algn="ctr" indent="0" marL="0">
-              <a:buNone/>
-            </a:pPr>
-            <a:r>
-              <a:rPr lang="en-US" sz="750" i="1" dirty="0">
-                <a:solidFill>
-                  <a:srgbClr val="94A3B8"/>
-                </a:solidFill>
-                <a:latin typeface="Calibri" pitchFamily="34" charset="0"/>
-                <a:ea typeface="Calibri" pitchFamily="34" charset="-122"/>
-                <a:cs typeface="Calibri" pitchFamily="34" charset="-120"/>
-              </a:rPr>
-              <a:t>/t/</a:t>
-            </a:r>
-            <a:endParaRPr lang="en-US" sz="750" dirty="0"/>
-          </a:p>
-        </p:txBody>
-      </p:sp>
-      <p:sp>
-        <p:nvSpPr>
-          <p:cNvPr id="51" name="Shape 49"/>
-          <p:cNvSpPr/>
-          <p:nvPr/>
-        </p:nvSpPr>
-        <p:spPr>
-          <a:xfrm>
-            <a:off x="5581498" y="4169664"/>
-            <a:ext cx="676656" cy="384048"/>
-          </a:xfrm>
-          <a:prstGeom prst="rect">
-            <a:avLst>
-              <a:gd name="adj" fmla="val 9524"/>
-            </a:avLst>
-          </a:prstGeom>
-          <a:solidFill>
-            <a:srgbClr val="FFFFFF"/>
-          </a:solidFill>
-          <a:ln w="12700">
-            <a:solidFill>
-              <a:srgbClr val="DB2777"/>
-            </a:solidFill>
-            <a:prstDash val="solid"/>
-          </a:ln>
-        </p:spPr>
-      </p:sp>
-      <p:sp>
-        <p:nvSpPr>
-          <p:cNvPr id="52" name="Text 50"/>
-          <p:cNvSpPr/>
-          <p:nvPr/>
-        </p:nvSpPr>
-        <p:spPr>
-          <a:xfrm>
-            <a:off x="5581498" y="4169664"/>
-            <a:ext cx="676656" cy="384048"/>
-          </a:xfrm>
-          <a:prstGeom prst="rect">
-            <a:avLst/>
-          </a:prstGeom>
-          <a:noFill/>
-          <a:ln/>
-        </p:spPr>
-        <p:txBody>
-          <a:bodyPr wrap="square" lIns="0" tIns="0" rIns="0" bIns="0" rtlCol="0" anchor="ctr"/>
-          <a:lstStyle/>
-          <a:p>
-            <a:pPr algn="ctr" indent="0" marL="0">
-              <a:buNone/>
-            </a:pPr>
-            <a:r>
-              <a:rPr lang="en-US" sz="900" b="1" dirty="0">
-                <a:solidFill>
-                  <a:srgbClr val="9D174D"/>
-                </a:solidFill>
-                <a:latin typeface="Trebuchet MS" pitchFamily="34" charset="0"/>
-                <a:ea typeface="Trebuchet MS" pitchFamily="34" charset="-122"/>
-                <a:cs typeface="Trebuchet MS" pitchFamily="34" charset="-120"/>
-              </a:rPr>
-              <a:t>m</a:t>
-            </a:r>
-            <a:endParaRPr lang="en-US" sz="900" dirty="0"/>
-          </a:p>
-        </p:txBody>
-      </p:sp>
-      <p:sp>
-        <p:nvSpPr>
-          <p:cNvPr id="53" name="Shape 51"/>
-          <p:cNvSpPr/>
-          <p:nvPr/>
-        </p:nvSpPr>
-        <p:spPr>
-          <a:xfrm>
-            <a:off x="6307531" y="4169664"/>
-            <a:ext cx="676656" cy="384048"/>
-          </a:xfrm>
-          <a:prstGeom prst="rect">
-            <a:avLst>
-              <a:gd name="adj" fmla="val 9524"/>
-            </a:avLst>
-          </a:prstGeom>
-          <a:solidFill>
-            <a:srgbClr val="FFFFFF"/>
-          </a:solidFill>
-          <a:ln w="12700">
-            <a:solidFill>
-              <a:srgbClr val="DB2777"/>
-            </a:solidFill>
-            <a:prstDash val="solid"/>
-          </a:ln>
-        </p:spPr>
-      </p:sp>
-      <p:sp>
-        <p:nvSpPr>
-          <p:cNvPr id="54" name="Text 52"/>
-          <p:cNvSpPr/>
-          <p:nvPr/>
-        </p:nvSpPr>
-        <p:spPr>
-          <a:xfrm>
-            <a:off x="6307531" y="4169664"/>
-            <a:ext cx="676656" cy="384048"/>
-          </a:xfrm>
-          <a:prstGeom prst="rect">
-            <a:avLst/>
-          </a:prstGeom>
-          <a:noFill/>
-          <a:ln/>
-        </p:spPr>
-        <p:txBody>
-          <a:bodyPr wrap="square" lIns="0" tIns="0" rIns="0" bIns="0" rtlCol="0" anchor="ctr"/>
-          <a:lstStyle/>
-          <a:p>
-            <a:pPr algn="ctr" indent="0" marL="0">
-              <a:buNone/>
-            </a:pPr>
-            <a:r>
-              <a:rPr lang="en-US" sz="900" b="1" dirty="0">
-                <a:solidFill>
-                  <a:srgbClr val="9D174D"/>
-                </a:solidFill>
-                <a:latin typeface="Trebuchet MS" pitchFamily="34" charset="0"/>
-                <a:ea typeface="Trebuchet MS" pitchFamily="34" charset="-122"/>
-                <a:cs typeface="Trebuchet MS" pitchFamily="34" charset="-120"/>
-              </a:rPr>
-              <a:t>e</a:t>
-            </a:r>
-            <a:endParaRPr lang="en-US" sz="900" dirty="0"/>
-          </a:p>
-        </p:txBody>
-      </p:sp>
-      <p:sp>
-        <p:nvSpPr>
-          <p:cNvPr id="55" name="Shape 53"/>
-          <p:cNvSpPr/>
-          <p:nvPr/>
-        </p:nvSpPr>
-        <p:spPr>
-          <a:xfrm>
-            <a:off x="7033565" y="4169664"/>
-            <a:ext cx="676656" cy="384048"/>
-          </a:xfrm>
-          <a:prstGeom prst="rect">
-            <a:avLst>
-              <a:gd name="adj" fmla="val 9524"/>
-            </a:avLst>
-          </a:prstGeom>
-          <a:solidFill>
-            <a:srgbClr val="FFFFFF"/>
-          </a:solidFill>
-          <a:ln w="12700">
-            <a:solidFill>
-              <a:srgbClr val="DB2777"/>
-            </a:solidFill>
-            <a:prstDash val="solid"/>
-          </a:ln>
-        </p:spPr>
-      </p:sp>
-      <p:sp>
-        <p:nvSpPr>
-          <p:cNvPr id="56" name="Text 54"/>
-          <p:cNvSpPr/>
-          <p:nvPr/>
-        </p:nvSpPr>
-        <p:spPr>
-          <a:xfrm>
-            <a:off x="7033565" y="4169664"/>
-            <a:ext cx="676656" cy="384048"/>
-          </a:xfrm>
-          <a:prstGeom prst="rect">
-            <a:avLst/>
-          </a:prstGeom>
-          <a:noFill/>
-          <a:ln/>
-        </p:spPr>
-        <p:txBody>
-          <a:bodyPr wrap="square" lIns="0" tIns="0" rIns="0" bIns="0" rtlCol="0" anchor="ctr"/>
-          <a:lstStyle/>
-          <a:p>
-            <a:pPr algn="ctr" indent="0" marL="0">
-              <a:buNone/>
-            </a:pPr>
-            <a:r>
-              <a:rPr lang="en-US" sz="900" b="1" dirty="0">
-                <a:solidFill>
-                  <a:srgbClr val="9D174D"/>
-                </a:solidFill>
-                <a:latin typeface="Trebuchet MS" pitchFamily="34" charset="0"/>
-                <a:ea typeface="Trebuchet MS" pitchFamily="34" charset="-122"/>
-                <a:cs typeface="Trebuchet MS" pitchFamily="34" charset="-120"/>
-              </a:rPr>
-              <a:t>n</a:t>
-            </a:r>
-            <a:endParaRPr lang="en-US" sz="900" dirty="0"/>
-          </a:p>
-        </p:txBody>
-      </p:sp>
-      <p:sp>
-        <p:nvSpPr>
-          <p:cNvPr id="57" name="Shape 55"/>
-          <p:cNvSpPr/>
-          <p:nvPr/>
-        </p:nvSpPr>
-        <p:spPr>
-          <a:xfrm>
-            <a:off x="7759598" y="4169664"/>
-            <a:ext cx="676656" cy="384048"/>
-          </a:xfrm>
-          <a:prstGeom prst="rect">
-            <a:avLst>
-              <a:gd name="adj" fmla="val 9524"/>
-            </a:avLst>
-          </a:prstGeom>
-          <a:solidFill>
-            <a:srgbClr val="FFFFFF"/>
-          </a:solidFill>
-          <a:ln w="12700">
-            <a:solidFill>
-              <a:srgbClr val="DB2777"/>
-            </a:solidFill>
-            <a:prstDash val="solid"/>
-          </a:ln>
-        </p:spPr>
-      </p:sp>
-      <p:sp>
-        <p:nvSpPr>
-          <p:cNvPr id="58" name="Text 56"/>
-          <p:cNvSpPr/>
-          <p:nvPr/>
-        </p:nvSpPr>
-        <p:spPr>
-          <a:xfrm>
-            <a:off x="7759598" y="4169664"/>
-            <a:ext cx="676656" cy="384048"/>
-          </a:xfrm>
-          <a:prstGeom prst="rect">
-            <a:avLst/>
-          </a:prstGeom>
-          <a:noFill/>
-          <a:ln/>
-        </p:spPr>
-        <p:txBody>
-          <a:bodyPr wrap="square" lIns="0" tIns="0" rIns="0" bIns="0" rtlCol="0" anchor="ctr"/>
-          <a:lstStyle/>
-          <a:p>
-            <a:pPr algn="ctr" indent="0" marL="0">
-              <a:buNone/>
-            </a:pPr>
-            <a:r>
-              <a:rPr lang="en-US" sz="900" b="1" dirty="0">
-                <a:solidFill>
-                  <a:srgbClr val="9D174D"/>
-                </a:solidFill>
-                <a:latin typeface="Trebuchet MS" pitchFamily="34" charset="0"/>
-                <a:ea typeface="Trebuchet MS" pitchFamily="34" charset="-122"/>
-                <a:cs typeface="Trebuchet MS" pitchFamily="34" charset="-120"/>
-              </a:rPr>
-              <a:t>t</a:t>
-            </a:r>
-            <a:endParaRPr lang="en-US" sz="900" dirty="0"/>
           </a:p>
         </p:txBody>
       </p:sp>
@@ -18360,7 +17787,7 @@
                 <a:ea typeface="Calibri" pitchFamily="34" charset="-122"/>
                 <a:cs typeface="Calibri" pitchFamily="34" charset="-120"/>
               </a:rPr>
-              <a:t>With the </a:t>
+              <a:t>She showed great </a:t>
             </a:r>
             <a:pPr algn="l" indent="0" marL="0">
               <a:buNone/>
@@ -18377,7 +17804,7 @@
                 <a:ea typeface="Calibri" pitchFamily="34" charset="-122"/>
                 <a:cs typeface="Calibri" pitchFamily="34" charset="-120"/>
               </a:rPr>
-              <a:t>guidance</a:t>
+              <a:t>tolerance</a:t>
             </a:r>
             <a:pPr algn="l" indent="0" marL="0">
               <a:buNone/>
@@ -18422,7 +17849,7 @@
                 <a:ea typeface="Calibri" pitchFamily="34" charset="-122"/>
                 <a:cs typeface="Calibri" pitchFamily="34" charset="-120"/>
               </a:rPr>
-              <a:t> of his coach, Leo showed great </a:t>
+              <a:t> to her classmates, and her </a:t>
             </a:r>
             <a:pPr algn="l" indent="0" marL="0">
               <a:buNone/>
@@ -18439,7 +17866,7 @@
                 <a:ea typeface="Calibri" pitchFamily="34" charset="-122"/>
                 <a:cs typeface="Calibri" pitchFamily="34" charset="-120"/>
               </a:rPr>
-              <a:t>endurance</a:t>
+              <a:t>importance</a:t>
             </a:r>
             <a:pPr algn="l" indent="0" marL="0">
               <a:buNone/>
@@ -18453,7 +17880,7 @@
                 <a:ea typeface="Calibri" pitchFamily="34" charset="-122"/>
                 <a:cs typeface="Calibri" pitchFamily="34" charset="-120"/>
               </a:rPr>
-              <a:t> during the long race.</a:t>
+              <a:t> to the team was clear.</a:t>
             </a:r>
             <a:endParaRPr lang="en-US" sz="1800" dirty="0"/>
           </a:p>
@@ -18608,7 +18035,7 @@
                 <a:ea typeface="Trebuchet MS" pitchFamily="34" charset="-122"/>
                 <a:cs typeface="Trebuchet MS" pitchFamily="34" charset="-120"/>
               </a:rPr>
-              <a:t>guidance</a:t>
+              <a:t>tolerance</a:t>
             </a:r>
             <a:endParaRPr lang="en-US" sz="1400" dirty="0"/>
           </a:p>
@@ -18864,7 +18291,7 @@
                 <a:ea typeface="Trebuchet MS" pitchFamily="34" charset="-122"/>
                 <a:cs typeface="Trebuchet MS" pitchFamily="34" charset="-120"/>
               </a:rPr>
-              <a:t>endurance</a:t>
+              <a:t>importance</a:t>
             </a:r>
             <a:endParaRPr lang="en-US" sz="1400" dirty="0"/>
           </a:p>
@@ -19334,7 +18761,7 @@
                 <a:ea typeface="Trebuchet MS" pitchFamily="34" charset="-122"/>
                 <a:cs typeface="Trebuchet MS" pitchFamily="34" charset="-120"/>
               </a:rPr>
-              <a:t>guidance</a:t>
+              <a:t>tolerance</a:t>
             </a:r>
             <a:endParaRPr lang="en-US" sz="2800" dirty="0"/>
           </a:p>
@@ -20161,7 +19588,7 @@
                 <a:ea typeface="Trebuchet MS" pitchFamily="34" charset="-122"/>
                 <a:cs typeface="Trebuchet MS" pitchFamily="34" charset="-120"/>
               </a:rPr>
-              <a:t>guidance</a:t>
+              <a:t>tolerance</a:t>
             </a:r>
             <a:endParaRPr lang="en-US" sz="2800" dirty="0"/>
           </a:p>
@@ -20300,7 +19727,7 @@
                 <a:ea typeface="Trebuchet MS" pitchFamily="34" charset="-122"/>
                 <a:cs typeface="Trebuchet MS" pitchFamily="34" charset="-120"/>
               </a:rPr>
-              <a:t>guid</a:t>
+              <a:t>toler</a:t>
             </a:r>
             <a:endParaRPr lang="en-US" sz="1300" dirty="0"/>
           </a:p>
@@ -20339,7 +19766,7 @@
                 <a:ea typeface="Calibri" pitchFamily="34" charset="-122"/>
                 <a:cs typeface="Calibri" pitchFamily="34" charset="-120"/>
               </a:rPr>
-              <a:t>to lead or direct</a:t>
+              <a:t>to bear, put up with</a:t>
             </a:r>
             <a:endParaRPr lang="en-US" sz="850" dirty="0"/>
           </a:p>
@@ -20459,57 +19886,150 @@
       </p:sp>
       <p:sp>
         <p:nvSpPr>
-          <p:cNvPr id="22" name="Text 20"/>
-          <p:cNvSpPr/>
-          <p:nvPr/>
-        </p:nvSpPr>
-        <p:spPr>
-          <a:xfrm>
-            <a:off x="5803392" y="2752344"/>
-            <a:ext cx="1828800" cy="182880"/>
-          </a:xfrm>
-          <a:prstGeom prst="rect">
-            <a:avLst/>
-          </a:prstGeom>
-          <a:noFill/>
-          <a:ln/>
-        </p:spPr>
-        <p:txBody>
-          <a:bodyPr wrap="square" lIns="0" tIns="0" rIns="0" bIns="0" rtlCol="0" anchor="t"/>
-          <a:lstStyle/>
-          <a:p>
-            <a:pPr algn="ctr" indent="0" marL="0">
-              <a:buNone/>
-            </a:pPr>
-            <a:r>
-              <a:rPr lang="en-US" sz="700" i="1" dirty="0">
-                <a:solidFill>
-                  <a:srgbClr val="94A3B8"/>
+          <p:cNvPr id="22" name="Shape 20"/>
+          <p:cNvSpPr/>
+          <p:nvPr/>
+        </p:nvSpPr>
+        <p:spPr>
+          <a:xfrm>
+            <a:off x="365760" y="3273552"/>
+            <a:ext cx="1371600" cy="658368"/>
+          </a:xfrm>
+          <a:prstGeom prst="rect">
+            <a:avLst>
+              <a:gd name="adj" fmla="val 8333"/>
+            </a:avLst>
+          </a:prstGeom>
+          <a:solidFill>
+            <a:srgbClr val="E2E8F0"/>
+          </a:solidFill>
+          <a:ln w="12700">
+            <a:solidFill>
+              <a:srgbClr val="E2E8F0"/>
+            </a:solidFill>
+            <a:prstDash val="solid"/>
+          </a:ln>
+        </p:spPr>
+      </p:sp>
+      <p:sp>
+        <p:nvSpPr>
+          <p:cNvPr id="23" name="Text 21"/>
+          <p:cNvSpPr/>
+          <p:nvPr/>
+        </p:nvSpPr>
+        <p:spPr>
+          <a:xfrm>
+            <a:off x="365760" y="3273552"/>
+            <a:ext cx="1371600" cy="658368"/>
+          </a:xfrm>
+          <a:prstGeom prst="rect">
+            <a:avLst/>
+          </a:prstGeom>
+          <a:noFill/>
+          <a:ln/>
+        </p:spPr>
+        <p:txBody>
+          <a:bodyPr wrap="square" lIns="0" tIns="0" rIns="0" bIns="0" rtlCol="0" anchor="ctr"/>
+          <a:lstStyle/>
+          <a:p>
+            <a:pPr algn="ctr" indent="0" marL="0">
+              <a:buNone/>
+            </a:pPr>
+            <a:r>
+              <a:rPr lang="en-US" sz="1100" b="1" dirty="0">
+                <a:solidFill>
+                  <a:srgbClr val="475569"/>
+                </a:solidFill>
+                <a:latin typeface="Trebuchet MS" pitchFamily="34" charset="0"/>
+                <a:ea typeface="Trebuchet MS" pitchFamily="34" charset="-122"/>
+                <a:cs typeface="Trebuchet MS" pitchFamily="34" charset="-120"/>
+              </a:rPr>
+              <a:t>Syllables</a:t>
+            </a:r>
+            <a:endParaRPr lang="en-US" sz="1100" dirty="0"/>
+          </a:p>
+        </p:txBody>
+      </p:sp>
+      <p:sp>
+        <p:nvSpPr>
+          <p:cNvPr id="24" name="Shape 22"/>
+          <p:cNvSpPr/>
+          <p:nvPr/>
+        </p:nvSpPr>
+        <p:spPr>
+          <a:xfrm>
+            <a:off x="1874520" y="3273552"/>
+            <a:ext cx="6903720" cy="658368"/>
+          </a:xfrm>
+          <a:prstGeom prst="rect">
+            <a:avLst>
+              <a:gd name="adj" fmla="val 8333"/>
+            </a:avLst>
+          </a:prstGeom>
+          <a:solidFill>
+            <a:srgbClr val="F8FAFC"/>
+          </a:solidFill>
+          <a:ln w="12700">
+            <a:solidFill>
+              <a:srgbClr val="E2E8F0"/>
+            </a:solidFill>
+            <a:prstDash val="dash"/>
+          </a:ln>
+        </p:spPr>
+      </p:sp>
+      <p:sp>
+        <p:nvSpPr>
+          <p:cNvPr id="25" name="Text 23"/>
+          <p:cNvSpPr/>
+          <p:nvPr/>
+        </p:nvSpPr>
+        <p:spPr>
+          <a:xfrm>
+            <a:off x="1874520" y="3273552"/>
+            <a:ext cx="6903720" cy="658368"/>
+          </a:xfrm>
+          <a:prstGeom prst="rect">
+            <a:avLst/>
+          </a:prstGeom>
+          <a:noFill/>
+          <a:ln/>
+        </p:spPr>
+        <p:txBody>
+          <a:bodyPr wrap="square" rtlCol="0" anchor="ctr"/>
+          <a:lstStyle/>
+          <a:p>
+            <a:pPr algn="ctr" indent="0" marL="0">
+              <a:buNone/>
+            </a:pPr>
+            <a:r>
+              <a:rPr lang="en-US" sz="1100" i="1" dirty="0">
+                <a:solidFill>
+                  <a:srgbClr val="CBD5E1"/>
                 </a:solidFill>
                 <a:latin typeface="Calibri" pitchFamily="34" charset="0"/>
                 <a:ea typeface="Calibri" pitchFamily="34" charset="-122"/>
                 <a:cs typeface="Calibri" pitchFamily="34" charset="-120"/>
               </a:rPr>
-              <a:t>'e' dropped from 'guide' before suffix</a:t>
-            </a:r>
-            <a:endParaRPr lang="en-US" sz="700" dirty="0"/>
-          </a:p>
-        </p:txBody>
-      </p:sp>
-      <p:sp>
-        <p:nvSpPr>
-          <p:cNvPr id="23" name="Shape 21"/>
-          <p:cNvSpPr/>
-          <p:nvPr/>
-        </p:nvSpPr>
-        <p:spPr>
-          <a:xfrm>
-            <a:off x="365760" y="3273552"/>
-            <a:ext cx="1371600" cy="658368"/>
+              <a:t>Write here...</a:t>
+            </a:r>
+            <a:endParaRPr lang="en-US" sz="1100" dirty="0"/>
+          </a:p>
+        </p:txBody>
+      </p:sp>
+      <p:sp>
+        <p:nvSpPr>
+          <p:cNvPr id="26" name="Shape 24"/>
+          <p:cNvSpPr/>
+          <p:nvPr/>
+        </p:nvSpPr>
+        <p:spPr>
+          <a:xfrm>
+            <a:off x="365760" y="4096512"/>
+            <a:ext cx="1371600" cy="804672"/>
           </a:xfrm>
           <a:prstGeom prst="rect">
             <a:avLst>
-              <a:gd name="adj" fmla="val 8333"/>
+              <a:gd name="adj" fmla="val 6818"/>
             </a:avLst>
           </a:prstGeom>
           <a:solidFill>
@@ -20525,14 +20045,14 @@
       </p:sp>
       <p:sp>
         <p:nvSpPr>
-          <p:cNvPr id="24" name="Text 22"/>
-          <p:cNvSpPr/>
-          <p:nvPr/>
-        </p:nvSpPr>
-        <p:spPr>
-          <a:xfrm>
-            <a:off x="365760" y="3273552"/>
-            <a:ext cx="1371600" cy="658368"/>
+          <p:cNvPr id="27" name="Text 25"/>
+          <p:cNvSpPr/>
+          <p:nvPr/>
+        </p:nvSpPr>
+        <p:spPr>
+          <a:xfrm>
+            <a:off x="365760" y="4096512"/>
+            <a:ext cx="1371600" cy="804672"/>
           </a:xfrm>
           <a:prstGeom prst="rect">
             <a:avLst/>
@@ -20556,7 +20076,7 @@
                 <a:ea typeface="Trebuchet MS" pitchFamily="34" charset="-122"/>
                 <a:cs typeface="Trebuchet MS" pitchFamily="34" charset="-120"/>
               </a:rPr>
-              <a:t>Syllables</a:t>
+              <a:t>Phonemes</a:t>
             </a:r>
             <a:endParaRPr lang="en-US" sz="1100" dirty="0"/>
           </a:p>
@@ -20564,80 +20084,14 @@
       </p:sp>
       <p:sp>
         <p:nvSpPr>
-          <p:cNvPr id="25" name="Shape 23"/>
-          <p:cNvSpPr/>
-          <p:nvPr/>
-        </p:nvSpPr>
-        <p:spPr>
-          <a:xfrm>
-            <a:off x="1874520" y="3273552"/>
-            <a:ext cx="6903720" cy="658368"/>
-          </a:xfrm>
-          <a:prstGeom prst="rect">
-            <a:avLst>
-              <a:gd name="adj" fmla="val 8333"/>
-            </a:avLst>
-          </a:prstGeom>
-          <a:solidFill>
-            <a:srgbClr val="F8FAFC"/>
-          </a:solidFill>
-          <a:ln w="12700">
-            <a:solidFill>
-              <a:srgbClr val="E2E8F0"/>
-            </a:solidFill>
-            <a:prstDash val="dash"/>
-          </a:ln>
-        </p:spPr>
-      </p:sp>
-      <p:sp>
-        <p:nvSpPr>
-          <p:cNvPr id="26" name="Text 24"/>
-          <p:cNvSpPr/>
-          <p:nvPr/>
-        </p:nvSpPr>
-        <p:spPr>
-          <a:xfrm>
-            <a:off x="1874520" y="3273552"/>
-            <a:ext cx="6903720" cy="658368"/>
-          </a:xfrm>
-          <a:prstGeom prst="rect">
-            <a:avLst/>
-          </a:prstGeom>
-          <a:noFill/>
-          <a:ln/>
-        </p:spPr>
-        <p:txBody>
-          <a:bodyPr wrap="square" rtlCol="0" anchor="ctr"/>
-          <a:lstStyle/>
-          <a:p>
-            <a:pPr algn="ctr" indent="0" marL="0">
-              <a:buNone/>
-            </a:pPr>
-            <a:r>
-              <a:rPr lang="en-US" sz="1100" i="1" dirty="0">
-                <a:solidFill>
-                  <a:srgbClr val="CBD5E1"/>
-                </a:solidFill>
-                <a:latin typeface="Calibri" pitchFamily="34" charset="0"/>
-                <a:ea typeface="Calibri" pitchFamily="34" charset="-122"/>
-                <a:cs typeface="Calibri" pitchFamily="34" charset="-120"/>
-              </a:rPr>
-              <a:t>Write here...</a:t>
-            </a:r>
-            <a:endParaRPr lang="en-US" sz="1100" dirty="0"/>
-          </a:p>
-        </p:txBody>
-      </p:sp>
-      <p:sp>
-        <p:nvSpPr>
-          <p:cNvPr id="27" name="Shape 25"/>
-          <p:cNvSpPr/>
-          <p:nvPr/>
-        </p:nvSpPr>
-        <p:spPr>
-          <a:xfrm>
-            <a:off x="365760" y="4096512"/>
-            <a:ext cx="1371600" cy="804672"/>
+          <p:cNvPr id="28" name="Shape 26"/>
+          <p:cNvSpPr/>
+          <p:nvPr/>
+        </p:nvSpPr>
+        <p:spPr>
+          <a:xfrm>
+            <a:off x="1874520" y="4096512"/>
+            <a:ext cx="6903720" cy="804672"/>
           </a:xfrm>
           <a:prstGeom prst="rect">
             <a:avLst>
@@ -20645,85 +20099,19 @@
             </a:avLst>
           </a:prstGeom>
           <a:solidFill>
-            <a:srgbClr val="E2E8F0"/>
+            <a:srgbClr val="F8FAFC"/>
           </a:solidFill>
           <a:ln w="12700">
             <a:solidFill>
               <a:srgbClr val="E2E8F0"/>
             </a:solidFill>
-            <a:prstDash val="solid"/>
-          </a:ln>
-        </p:spPr>
-      </p:sp>
-      <p:sp>
-        <p:nvSpPr>
-          <p:cNvPr id="28" name="Text 26"/>
-          <p:cNvSpPr/>
-          <p:nvPr/>
-        </p:nvSpPr>
-        <p:spPr>
-          <a:xfrm>
-            <a:off x="365760" y="4096512"/>
-            <a:ext cx="1371600" cy="804672"/>
-          </a:xfrm>
-          <a:prstGeom prst="rect">
-            <a:avLst/>
-          </a:prstGeom>
-          <a:noFill/>
-          <a:ln/>
-        </p:spPr>
-        <p:txBody>
-          <a:bodyPr wrap="square" lIns="0" tIns="0" rIns="0" bIns="0" rtlCol="0" anchor="ctr"/>
-          <a:lstStyle/>
-          <a:p>
-            <a:pPr algn="ctr" indent="0" marL="0">
-              <a:buNone/>
-            </a:pPr>
-            <a:r>
-              <a:rPr lang="en-US" sz="1100" b="1" dirty="0">
-                <a:solidFill>
-                  <a:srgbClr val="475569"/>
-                </a:solidFill>
-                <a:latin typeface="Trebuchet MS" pitchFamily="34" charset="0"/>
-                <a:ea typeface="Trebuchet MS" pitchFamily="34" charset="-122"/>
-                <a:cs typeface="Trebuchet MS" pitchFamily="34" charset="-120"/>
-              </a:rPr>
-              <a:t>Phonemes</a:t>
-            </a:r>
-            <a:endParaRPr lang="en-US" sz="1100" dirty="0"/>
-          </a:p>
-        </p:txBody>
-      </p:sp>
-      <p:sp>
-        <p:nvSpPr>
-          <p:cNvPr id="29" name="Shape 27"/>
-          <p:cNvSpPr/>
-          <p:nvPr/>
-        </p:nvSpPr>
-        <p:spPr>
-          <a:xfrm>
-            <a:off x="1874520" y="4096512"/>
-            <a:ext cx="6903720" cy="804672"/>
-          </a:xfrm>
-          <a:prstGeom prst="rect">
-            <a:avLst>
-              <a:gd name="adj" fmla="val 6818"/>
-            </a:avLst>
-          </a:prstGeom>
-          <a:solidFill>
-            <a:srgbClr val="F8FAFC"/>
-          </a:solidFill>
-          <a:ln w="12700">
-            <a:solidFill>
-              <a:srgbClr val="E2E8F0"/>
-            </a:solidFill>
             <a:prstDash val="dash"/>
           </a:ln>
         </p:spPr>
       </p:sp>
       <p:sp>
         <p:nvSpPr>
-          <p:cNvPr id="30" name="Text 28"/>
+          <p:cNvPr id="29" name="Text 27"/>
           <p:cNvSpPr/>
           <p:nvPr/>
         </p:nvSpPr>
@@ -21185,7 +20573,7 @@
                 <a:ea typeface="Trebuchet MS" pitchFamily="34" charset="-122"/>
                 <a:cs typeface="Trebuchet MS" pitchFamily="34" charset="-120"/>
               </a:rPr>
-              <a:t>guidance</a:t>
+              <a:t>tolerance</a:t>
             </a:r>
             <a:endParaRPr lang="en-US" sz="2800" dirty="0"/>
           </a:p>
@@ -21324,7 +20712,7 @@
                 <a:ea typeface="Trebuchet MS" pitchFamily="34" charset="-122"/>
                 <a:cs typeface="Trebuchet MS" pitchFamily="34" charset="-120"/>
               </a:rPr>
-              <a:t>guid</a:t>
+              <a:t>toler</a:t>
             </a:r>
             <a:endParaRPr lang="en-US" sz="1300" dirty="0"/>
           </a:p>
@@ -21363,7 +20751,7 @@
                 <a:ea typeface="Calibri" pitchFamily="34" charset="-122"/>
                 <a:cs typeface="Calibri" pitchFamily="34" charset="-120"/>
               </a:rPr>
-              <a:t>to lead or direct</a:t>
+              <a:t>to bear, put up with</a:t>
             </a:r>
             <a:endParaRPr lang="en-US" sz="850" dirty="0"/>
           </a:p>
@@ -21483,46 +20871,7 @@
       </p:sp>
       <p:sp>
         <p:nvSpPr>
-          <p:cNvPr id="22" name="Text 20"/>
-          <p:cNvSpPr/>
-          <p:nvPr/>
-        </p:nvSpPr>
-        <p:spPr>
-          <a:xfrm>
-            <a:off x="5803392" y="2752344"/>
-            <a:ext cx="1828800" cy="182880"/>
-          </a:xfrm>
-          <a:prstGeom prst="rect">
-            <a:avLst/>
-          </a:prstGeom>
-          <a:noFill/>
-          <a:ln/>
-        </p:spPr>
-        <p:txBody>
-          <a:bodyPr wrap="square" lIns="0" tIns="0" rIns="0" bIns="0" rtlCol="0" anchor="t"/>
-          <a:lstStyle/>
-          <a:p>
-            <a:pPr algn="ctr" indent="0" marL="0">
-              <a:buNone/>
-            </a:pPr>
-            <a:r>
-              <a:rPr lang="en-US" sz="700" i="1" dirty="0">
-                <a:solidFill>
-                  <a:srgbClr val="94A3B8"/>
-                </a:solidFill>
-                <a:latin typeface="Calibri" pitchFamily="34" charset="0"/>
-                <a:ea typeface="Calibri" pitchFamily="34" charset="-122"/>
-                <a:cs typeface="Calibri" pitchFamily="34" charset="-120"/>
-              </a:rPr>
-              <a:t>'e' dropped from 'guide' before suffix</a:t>
-            </a:r>
-            <a:endParaRPr lang="en-US" sz="700" dirty="0"/>
-          </a:p>
-        </p:txBody>
-      </p:sp>
-      <p:sp>
-        <p:nvSpPr>
-          <p:cNvPr id="23" name="Shape 21"/>
+          <p:cNvPr id="22" name="Shape 20"/>
           <p:cNvSpPr/>
           <p:nvPr/>
         </p:nvSpPr>
@@ -21549,7 +20898,7 @@
       </p:sp>
       <p:sp>
         <p:nvSpPr>
-          <p:cNvPr id="24" name="Text 22"/>
+          <p:cNvPr id="23" name="Text 21"/>
           <p:cNvSpPr/>
           <p:nvPr/>
         </p:nvSpPr>
@@ -21588,7 +20937,7 @@
       </p:sp>
       <p:sp>
         <p:nvSpPr>
-          <p:cNvPr id="25" name="Shape 23"/>
+          <p:cNvPr id="24" name="Shape 22"/>
           <p:cNvSpPr/>
           <p:nvPr/>
         </p:nvSpPr>
@@ -21615,13 +20964,13 @@
       </p:sp>
       <p:sp>
         <p:nvSpPr>
-          <p:cNvPr id="26" name="Shape 24"/>
-          <p:cNvSpPr/>
-          <p:nvPr/>
-        </p:nvSpPr>
-        <p:spPr>
-          <a:xfrm>
-            <a:off x="2999232" y="3364992"/>
+          <p:cNvPr id="25" name="Shape 23"/>
+          <p:cNvSpPr/>
+          <p:nvPr/>
+        </p:nvSpPr>
+        <p:spPr>
+          <a:xfrm>
+            <a:off x="2313432" y="3364992"/>
             <a:ext cx="1645920" cy="475488"/>
           </a:xfrm>
           <a:prstGeom prst="rect">
@@ -21642,13 +20991,13 @@
       </p:sp>
       <p:sp>
         <p:nvSpPr>
-          <p:cNvPr id="27" name="Text 25"/>
-          <p:cNvSpPr/>
-          <p:nvPr/>
-        </p:nvSpPr>
-        <p:spPr>
-          <a:xfrm>
-            <a:off x="2999232" y="3364992"/>
+          <p:cNvPr id="26" name="Text 24"/>
+          <p:cNvSpPr/>
+          <p:nvPr/>
+        </p:nvSpPr>
+        <p:spPr>
+          <a:xfrm>
+            <a:off x="2313432" y="3364992"/>
             <a:ext cx="1645920" cy="475488"/>
           </a:xfrm>
           <a:prstGeom prst="rect">
@@ -21673,7 +21022,7 @@
                 <a:ea typeface="Trebuchet MS" pitchFamily="34" charset="-122"/>
                 <a:cs typeface="Trebuchet MS" pitchFamily="34" charset="-120"/>
               </a:rPr>
-              <a:t>guid</a:t>
+              <a:t>tol</a:t>
             </a:r>
             <a:endParaRPr lang="en-US" sz="1400" dirty="0"/>
           </a:p>
@@ -21681,14 +21030,14 @@
       </p:sp>
       <p:sp>
         <p:nvSpPr>
-          <p:cNvPr id="28" name="Text 26"/>
-          <p:cNvSpPr/>
-          <p:nvPr/>
-        </p:nvSpPr>
-        <p:spPr>
-          <a:xfrm>
-            <a:off x="4645152" y="3364992"/>
-            <a:ext cx="1097280" cy="475488"/>
+          <p:cNvPr id="27" name="Text 25"/>
+          <p:cNvSpPr/>
+          <p:nvPr/>
+        </p:nvSpPr>
+        <p:spPr>
+          <a:xfrm>
+            <a:off x="3959352" y="3364992"/>
+            <a:ext cx="411480" cy="475488"/>
           </a:xfrm>
           <a:prstGeom prst="rect">
             <a:avLst/>
@@ -21720,13 +21069,13 @@
       </p:sp>
       <p:sp>
         <p:nvSpPr>
-          <p:cNvPr id="29" name="Shape 27"/>
-          <p:cNvSpPr/>
-          <p:nvPr/>
-        </p:nvSpPr>
-        <p:spPr>
-          <a:xfrm>
-            <a:off x="5742432" y="3364992"/>
+          <p:cNvPr id="28" name="Shape 26"/>
+          <p:cNvSpPr/>
+          <p:nvPr/>
+        </p:nvSpPr>
+        <p:spPr>
+          <a:xfrm>
+            <a:off x="4370832" y="3364992"/>
             <a:ext cx="1645920" cy="475488"/>
           </a:xfrm>
           <a:prstGeom prst="rect">
@@ -21747,13 +21096,13 @@
       </p:sp>
       <p:sp>
         <p:nvSpPr>
-          <p:cNvPr id="30" name="Text 28"/>
-          <p:cNvSpPr/>
-          <p:nvPr/>
-        </p:nvSpPr>
-        <p:spPr>
-          <a:xfrm>
-            <a:off x="5742432" y="3364992"/>
+          <p:cNvPr id="29" name="Text 27"/>
+          <p:cNvSpPr/>
+          <p:nvPr/>
+        </p:nvSpPr>
+        <p:spPr>
+          <a:xfrm>
+            <a:off x="4370832" y="3364992"/>
             <a:ext cx="1645920" cy="475488"/>
           </a:xfrm>
           <a:prstGeom prst="rect">
@@ -21778,6 +21127,111 @@
                 <a:ea typeface="Trebuchet MS" pitchFamily="34" charset="-122"/>
                 <a:cs typeface="Trebuchet MS" pitchFamily="34" charset="-120"/>
               </a:rPr>
+              <a:t>er</a:t>
+            </a:r>
+            <a:endParaRPr lang="en-US" sz="1400" dirty="0"/>
+          </a:p>
+        </p:txBody>
+      </p:sp>
+      <p:sp>
+        <p:nvSpPr>
+          <p:cNvPr id="30" name="Text 28"/>
+          <p:cNvSpPr/>
+          <p:nvPr/>
+        </p:nvSpPr>
+        <p:spPr>
+          <a:xfrm>
+            <a:off x="6016752" y="3364992"/>
+            <a:ext cx="411480" cy="475488"/>
+          </a:xfrm>
+          <a:prstGeom prst="rect">
+            <a:avLst/>
+          </a:prstGeom>
+          <a:noFill/>
+          <a:ln/>
+        </p:spPr>
+        <p:txBody>
+          <a:bodyPr wrap="square" lIns="0" tIns="0" rIns="0" bIns="0" rtlCol="0" anchor="ctr"/>
+          <a:lstStyle/>
+          <a:p>
+            <a:pPr algn="ctr" indent="0" marL="0">
+              <a:buNone/>
+            </a:pPr>
+            <a:r>
+              <a:rPr lang="en-US" sz="1600" b="1" dirty="0">
+                <a:solidFill>
+                  <a:srgbClr val="0D9488"/>
+                </a:solidFill>
+                <a:latin typeface="Trebuchet MS" pitchFamily="34" charset="0"/>
+                <a:ea typeface="Trebuchet MS" pitchFamily="34" charset="-122"/>
+                <a:cs typeface="Trebuchet MS" pitchFamily="34" charset="-120"/>
+              </a:rPr>
+              <a:t>·</a:t>
+            </a:r>
+            <a:endParaRPr lang="en-US" sz="1600" dirty="0"/>
+          </a:p>
+        </p:txBody>
+      </p:sp>
+      <p:sp>
+        <p:nvSpPr>
+          <p:cNvPr id="31" name="Shape 29"/>
+          <p:cNvSpPr/>
+          <p:nvPr/>
+        </p:nvSpPr>
+        <p:spPr>
+          <a:xfrm>
+            <a:off x="6428232" y="3364992"/>
+            <a:ext cx="1645920" cy="475488"/>
+          </a:xfrm>
+          <a:prstGeom prst="rect">
+            <a:avLst>
+              <a:gd name="adj" fmla="val 9615"/>
+            </a:avLst>
+          </a:prstGeom>
+          <a:solidFill>
+            <a:srgbClr val="FFFFFF"/>
+          </a:solidFill>
+          <a:ln w="12700">
+            <a:solidFill>
+              <a:srgbClr val="0D9488"/>
+            </a:solidFill>
+            <a:prstDash val="solid"/>
+          </a:ln>
+        </p:spPr>
+      </p:sp>
+      <p:sp>
+        <p:nvSpPr>
+          <p:cNvPr id="32" name="Text 30"/>
+          <p:cNvSpPr/>
+          <p:nvPr/>
+        </p:nvSpPr>
+        <p:spPr>
+          <a:xfrm>
+            <a:off x="6428232" y="3364992"/>
+            <a:ext cx="1645920" cy="475488"/>
+          </a:xfrm>
+          <a:prstGeom prst="rect">
+            <a:avLst/>
+          </a:prstGeom>
+          <a:noFill/>
+          <a:ln/>
+        </p:spPr>
+        <p:txBody>
+          <a:bodyPr wrap="square" lIns="0" tIns="0" rIns="0" bIns="0" rtlCol="0" anchor="ctr"/>
+          <a:lstStyle/>
+          <a:p>
+            <a:pPr algn="ctr" indent="0" marL="0">
+              <a:buNone/>
+            </a:pPr>
+            <a:r>
+              <a:rPr lang="en-US" sz="1400" b="1" dirty="0">
+                <a:solidFill>
+                  <a:srgbClr val="0D9488"/>
+                </a:solidFill>
+                <a:latin typeface="Trebuchet MS" pitchFamily="34" charset="0"/>
+                <a:ea typeface="Trebuchet MS" pitchFamily="34" charset="-122"/>
+                <a:cs typeface="Trebuchet MS" pitchFamily="34" charset="-120"/>
+              </a:rPr>
               <a:t>ance</a:t>
             </a:r>
             <a:endParaRPr lang="en-US" sz="1400" dirty="0"/>
@@ -21786,7 +21240,7 @@
       </p:sp>
       <p:sp>
         <p:nvSpPr>
-          <p:cNvPr id="31" name="Shape 29"/>
+          <p:cNvPr id="33" name="Shape 31"/>
           <p:cNvSpPr/>
           <p:nvPr/>
         </p:nvSpPr>
@@ -21813,7 +21267,7 @@
       </p:sp>
       <p:sp>
         <p:nvSpPr>
-          <p:cNvPr id="32" name="Text 30"/>
+          <p:cNvPr id="34" name="Text 32"/>
           <p:cNvSpPr/>
           <p:nvPr/>
         </p:nvSpPr>
@@ -21852,7 +21306,7 @@
       </p:sp>
       <p:sp>
         <p:nvSpPr>
-          <p:cNvPr id="33" name="Shape 31"/>
+          <p:cNvPr id="35" name="Shape 33"/>
           <p:cNvSpPr/>
           <p:nvPr/>
         </p:nvSpPr>
@@ -21879,7 +21333,7 @@
       </p:sp>
       <p:sp>
         <p:nvSpPr>
-          <p:cNvPr id="34" name="Text 32"/>
+          <p:cNvPr id="36" name="Text 34"/>
           <p:cNvSpPr/>
           <p:nvPr/>
         </p:nvSpPr>
@@ -22341,7 +21795,7 @@
                 <a:ea typeface="Trebuchet MS" pitchFamily="34" charset="-122"/>
                 <a:cs typeface="Trebuchet MS" pitchFamily="34" charset="-120"/>
               </a:rPr>
-              <a:t>guidance</a:t>
+              <a:t>tolerance</a:t>
             </a:r>
             <a:endParaRPr lang="en-US" sz="2800" dirty="0"/>
           </a:p>
@@ -22480,7 +21934,7 @@
                 <a:ea typeface="Trebuchet MS" pitchFamily="34" charset="-122"/>
                 <a:cs typeface="Trebuchet MS" pitchFamily="34" charset="-120"/>
               </a:rPr>
-              <a:t>guid</a:t>
+              <a:t>toler</a:t>
             </a:r>
             <a:endParaRPr lang="en-US" sz="1300" dirty="0"/>
           </a:p>
@@ -22519,7 +21973,7 @@
                 <a:ea typeface="Calibri" pitchFamily="34" charset="-122"/>
                 <a:cs typeface="Calibri" pitchFamily="34" charset="-120"/>
               </a:rPr>
-              <a:t>to lead or direct</a:t>
+              <a:t>to bear, put up with</a:t>
             </a:r>
             <a:endParaRPr lang="en-US" sz="850" dirty="0"/>
           </a:p>
@@ -22639,46 +22093,7 @@
       </p:sp>
       <p:sp>
         <p:nvSpPr>
-          <p:cNvPr id="22" name="Text 20"/>
-          <p:cNvSpPr/>
-          <p:nvPr/>
-        </p:nvSpPr>
-        <p:spPr>
-          <a:xfrm>
-            <a:off x="5803392" y="2752344"/>
-            <a:ext cx="1828800" cy="182880"/>
-          </a:xfrm>
-          <a:prstGeom prst="rect">
-            <a:avLst/>
-          </a:prstGeom>
-          <a:noFill/>
-          <a:ln/>
-        </p:spPr>
-        <p:txBody>
-          <a:bodyPr wrap="square" lIns="0" tIns="0" rIns="0" bIns="0" rtlCol="0" anchor="t"/>
-          <a:lstStyle/>
-          <a:p>
-            <a:pPr algn="ctr" indent="0" marL="0">
-              <a:buNone/>
-            </a:pPr>
-            <a:r>
-              <a:rPr lang="en-US" sz="700" i="1" dirty="0">
-                <a:solidFill>
-                  <a:srgbClr val="94A3B8"/>
-                </a:solidFill>
-                <a:latin typeface="Calibri" pitchFamily="34" charset="0"/>
-                <a:ea typeface="Calibri" pitchFamily="34" charset="-122"/>
-                <a:cs typeface="Calibri" pitchFamily="34" charset="-120"/>
-              </a:rPr>
-              <a:t>'e' dropped from 'guide' before suffix</a:t>
-            </a:r>
-            <a:endParaRPr lang="en-US" sz="700" dirty="0"/>
-          </a:p>
-        </p:txBody>
-      </p:sp>
-      <p:sp>
-        <p:nvSpPr>
-          <p:cNvPr id="23" name="Shape 21"/>
+          <p:cNvPr id="22" name="Shape 20"/>
           <p:cNvSpPr/>
           <p:nvPr/>
         </p:nvSpPr>
@@ -22705,7 +22120,7 @@
       </p:sp>
       <p:sp>
         <p:nvSpPr>
-          <p:cNvPr id="24" name="Text 22"/>
+          <p:cNvPr id="23" name="Text 21"/>
           <p:cNvSpPr/>
           <p:nvPr/>
         </p:nvSpPr>
@@ -22744,7 +22159,7 @@
       </p:sp>
       <p:sp>
         <p:nvSpPr>
-          <p:cNvPr id="25" name="Shape 23"/>
+          <p:cNvPr id="24" name="Shape 22"/>
           <p:cNvSpPr/>
           <p:nvPr/>
         </p:nvSpPr>
@@ -22771,13 +22186,13 @@
       </p:sp>
       <p:sp>
         <p:nvSpPr>
-          <p:cNvPr id="26" name="Shape 24"/>
-          <p:cNvSpPr/>
-          <p:nvPr/>
-        </p:nvSpPr>
-        <p:spPr>
-          <a:xfrm>
-            <a:off x="2999232" y="3364992"/>
+          <p:cNvPr id="25" name="Shape 23"/>
+          <p:cNvSpPr/>
+          <p:nvPr/>
+        </p:nvSpPr>
+        <p:spPr>
+          <a:xfrm>
+            <a:off x="2313432" y="3364992"/>
             <a:ext cx="1645920" cy="475488"/>
           </a:xfrm>
           <a:prstGeom prst="rect">
@@ -22798,13 +22213,13 @@
       </p:sp>
       <p:sp>
         <p:nvSpPr>
-          <p:cNvPr id="27" name="Text 25"/>
-          <p:cNvSpPr/>
-          <p:nvPr/>
-        </p:nvSpPr>
-        <p:spPr>
-          <a:xfrm>
-            <a:off x="2999232" y="3364992"/>
+          <p:cNvPr id="26" name="Text 24"/>
+          <p:cNvSpPr/>
+          <p:nvPr/>
+        </p:nvSpPr>
+        <p:spPr>
+          <a:xfrm>
+            <a:off x="2313432" y="3364992"/>
             <a:ext cx="1645920" cy="475488"/>
           </a:xfrm>
           <a:prstGeom prst="rect">
@@ -22829,7 +22244,7 @@
                 <a:ea typeface="Trebuchet MS" pitchFamily="34" charset="-122"/>
                 <a:cs typeface="Trebuchet MS" pitchFamily="34" charset="-120"/>
               </a:rPr>
-              <a:t>guid</a:t>
+              <a:t>tol</a:t>
             </a:r>
             <a:endParaRPr lang="en-US" sz="1400" dirty="0"/>
           </a:p>
@@ -22837,14 +22252,14 @@
       </p:sp>
       <p:sp>
         <p:nvSpPr>
-          <p:cNvPr id="28" name="Text 26"/>
-          <p:cNvSpPr/>
-          <p:nvPr/>
-        </p:nvSpPr>
-        <p:spPr>
-          <a:xfrm>
-            <a:off x="4645152" y="3364992"/>
-            <a:ext cx="1097280" cy="475488"/>
+          <p:cNvPr id="27" name="Text 25"/>
+          <p:cNvSpPr/>
+          <p:nvPr/>
+        </p:nvSpPr>
+        <p:spPr>
+          <a:xfrm>
+            <a:off x="3959352" y="3364992"/>
+            <a:ext cx="411480" cy="475488"/>
           </a:xfrm>
           <a:prstGeom prst="rect">
             <a:avLst/>
@@ -22876,13 +22291,13 @@
       </p:sp>
       <p:sp>
         <p:nvSpPr>
-          <p:cNvPr id="29" name="Shape 27"/>
-          <p:cNvSpPr/>
-          <p:nvPr/>
-        </p:nvSpPr>
-        <p:spPr>
-          <a:xfrm>
-            <a:off x="5742432" y="3364992"/>
+          <p:cNvPr id="28" name="Shape 26"/>
+          <p:cNvSpPr/>
+          <p:nvPr/>
+        </p:nvSpPr>
+        <p:spPr>
+          <a:xfrm>
+            <a:off x="4370832" y="3364992"/>
             <a:ext cx="1645920" cy="475488"/>
           </a:xfrm>
           <a:prstGeom prst="rect">
@@ -22903,13 +22318,13 @@
       </p:sp>
       <p:sp>
         <p:nvSpPr>
-          <p:cNvPr id="30" name="Text 28"/>
-          <p:cNvSpPr/>
-          <p:nvPr/>
-        </p:nvSpPr>
-        <p:spPr>
-          <a:xfrm>
-            <a:off x="5742432" y="3364992"/>
+          <p:cNvPr id="29" name="Text 27"/>
+          <p:cNvSpPr/>
+          <p:nvPr/>
+        </p:nvSpPr>
+        <p:spPr>
+          <a:xfrm>
+            <a:off x="4370832" y="3364992"/>
             <a:ext cx="1645920" cy="475488"/>
           </a:xfrm>
           <a:prstGeom prst="rect">
@@ -22934,6 +22349,111 @@
                 <a:ea typeface="Trebuchet MS" pitchFamily="34" charset="-122"/>
                 <a:cs typeface="Trebuchet MS" pitchFamily="34" charset="-120"/>
               </a:rPr>
+              <a:t>er</a:t>
+            </a:r>
+            <a:endParaRPr lang="en-US" sz="1400" dirty="0"/>
+          </a:p>
+        </p:txBody>
+      </p:sp>
+      <p:sp>
+        <p:nvSpPr>
+          <p:cNvPr id="30" name="Text 28"/>
+          <p:cNvSpPr/>
+          <p:nvPr/>
+        </p:nvSpPr>
+        <p:spPr>
+          <a:xfrm>
+            <a:off x="6016752" y="3364992"/>
+            <a:ext cx="411480" cy="475488"/>
+          </a:xfrm>
+          <a:prstGeom prst="rect">
+            <a:avLst/>
+          </a:prstGeom>
+          <a:noFill/>
+          <a:ln/>
+        </p:spPr>
+        <p:txBody>
+          <a:bodyPr wrap="square" lIns="0" tIns="0" rIns="0" bIns="0" rtlCol="0" anchor="ctr"/>
+          <a:lstStyle/>
+          <a:p>
+            <a:pPr algn="ctr" indent="0" marL="0">
+              <a:buNone/>
+            </a:pPr>
+            <a:r>
+              <a:rPr lang="en-US" sz="1600" b="1" dirty="0">
+                <a:solidFill>
+                  <a:srgbClr val="0D9488"/>
+                </a:solidFill>
+                <a:latin typeface="Trebuchet MS" pitchFamily="34" charset="0"/>
+                <a:ea typeface="Trebuchet MS" pitchFamily="34" charset="-122"/>
+                <a:cs typeface="Trebuchet MS" pitchFamily="34" charset="-120"/>
+              </a:rPr>
+              <a:t>·</a:t>
+            </a:r>
+            <a:endParaRPr lang="en-US" sz="1600" dirty="0"/>
+          </a:p>
+        </p:txBody>
+      </p:sp>
+      <p:sp>
+        <p:nvSpPr>
+          <p:cNvPr id="31" name="Shape 29"/>
+          <p:cNvSpPr/>
+          <p:nvPr/>
+        </p:nvSpPr>
+        <p:spPr>
+          <a:xfrm>
+            <a:off x="6428232" y="3364992"/>
+            <a:ext cx="1645920" cy="475488"/>
+          </a:xfrm>
+          <a:prstGeom prst="rect">
+            <a:avLst>
+              <a:gd name="adj" fmla="val 9615"/>
+            </a:avLst>
+          </a:prstGeom>
+          <a:solidFill>
+            <a:srgbClr val="FFFFFF"/>
+          </a:solidFill>
+          <a:ln w="12700">
+            <a:solidFill>
+              <a:srgbClr val="0D9488"/>
+            </a:solidFill>
+            <a:prstDash val="solid"/>
+          </a:ln>
+        </p:spPr>
+      </p:sp>
+      <p:sp>
+        <p:nvSpPr>
+          <p:cNvPr id="32" name="Text 30"/>
+          <p:cNvSpPr/>
+          <p:nvPr/>
+        </p:nvSpPr>
+        <p:spPr>
+          <a:xfrm>
+            <a:off x="6428232" y="3364992"/>
+            <a:ext cx="1645920" cy="475488"/>
+          </a:xfrm>
+          <a:prstGeom prst="rect">
+            <a:avLst/>
+          </a:prstGeom>
+          <a:noFill/>
+          <a:ln/>
+        </p:spPr>
+        <p:txBody>
+          <a:bodyPr wrap="square" lIns="0" tIns="0" rIns="0" bIns="0" rtlCol="0" anchor="ctr"/>
+          <a:lstStyle/>
+          <a:p>
+            <a:pPr algn="ctr" indent="0" marL="0">
+              <a:buNone/>
+            </a:pPr>
+            <a:r>
+              <a:rPr lang="en-US" sz="1400" b="1" dirty="0">
+                <a:solidFill>
+                  <a:srgbClr val="0D9488"/>
+                </a:solidFill>
+                <a:latin typeface="Trebuchet MS" pitchFamily="34" charset="0"/>
+                <a:ea typeface="Trebuchet MS" pitchFamily="34" charset="-122"/>
+                <a:cs typeface="Trebuchet MS" pitchFamily="34" charset="-120"/>
+              </a:rPr>
               <a:t>ance</a:t>
             </a:r>
             <a:endParaRPr lang="en-US" sz="1400" dirty="0"/>
@@ -22942,7 +22462,7 @@
       </p:sp>
       <p:sp>
         <p:nvSpPr>
-          <p:cNvPr id="31" name="Shape 29"/>
+          <p:cNvPr id="33" name="Shape 31"/>
           <p:cNvSpPr/>
           <p:nvPr/>
         </p:nvSpPr>
@@ -22969,7 +22489,7 @@
       </p:sp>
       <p:sp>
         <p:nvSpPr>
-          <p:cNvPr id="32" name="Text 30"/>
+          <p:cNvPr id="34" name="Text 32"/>
           <p:cNvSpPr/>
           <p:nvPr/>
         </p:nvSpPr>
@@ -23008,7 +22528,7 @@
       </p:sp>
       <p:sp>
         <p:nvSpPr>
-          <p:cNvPr id="33" name="Shape 31"/>
+          <p:cNvPr id="35" name="Shape 33"/>
           <p:cNvSpPr/>
           <p:nvPr/>
         </p:nvSpPr>
@@ -23035,13 +22555,13 @@
       </p:sp>
       <p:sp>
         <p:nvSpPr>
-          <p:cNvPr id="34" name="Shape 32"/>
-          <p:cNvSpPr/>
-          <p:nvPr/>
-        </p:nvSpPr>
-        <p:spPr>
-          <a:xfrm>
-            <a:off x="2254649" y="4169664"/>
+          <p:cNvPr id="36" name="Shape 34"/>
+          <p:cNvSpPr/>
+          <p:nvPr/>
+        </p:nvSpPr>
+        <p:spPr>
+          <a:xfrm>
+            <a:off x="2124837" y="4169664"/>
             <a:ext cx="685800" cy="384048"/>
           </a:xfrm>
           <a:prstGeom prst="rect">
@@ -23062,13 +22582,13 @@
       </p:sp>
       <p:sp>
         <p:nvSpPr>
-          <p:cNvPr id="35" name="Text 33"/>
-          <p:cNvSpPr/>
-          <p:nvPr/>
-        </p:nvSpPr>
-        <p:spPr>
-          <a:xfrm>
-            <a:off x="2254649" y="4169664"/>
+          <p:cNvPr id="37" name="Text 35"/>
+          <p:cNvSpPr/>
+          <p:nvPr/>
+        </p:nvSpPr>
+        <p:spPr>
+          <a:xfrm>
+            <a:off x="2124837" y="4169664"/>
             <a:ext cx="685800" cy="384048"/>
           </a:xfrm>
           <a:prstGeom prst="rect">
@@ -23093,7 +22613,7 @@
                 <a:ea typeface="Trebuchet MS" pitchFamily="34" charset="-122"/>
                 <a:cs typeface="Trebuchet MS" pitchFamily="34" charset="-120"/>
               </a:rPr>
-              <a:t>g</a:t>
+              <a:t>t</a:t>
             </a:r>
             <a:endParaRPr lang="en-US" sz="900" dirty="0"/>
           </a:p>
@@ -23101,13 +22621,13 @@
       </p:sp>
       <p:sp>
         <p:nvSpPr>
-          <p:cNvPr id="36" name="Shape 34"/>
-          <p:cNvSpPr/>
-          <p:nvPr/>
-        </p:nvSpPr>
-        <p:spPr>
-          <a:xfrm>
-            <a:off x="3293146" y="4169664"/>
+          <p:cNvPr id="38" name="Shape 36"/>
+          <p:cNvSpPr/>
+          <p:nvPr/>
+        </p:nvSpPr>
+        <p:spPr>
+          <a:xfrm>
+            <a:off x="3033522" y="4169664"/>
             <a:ext cx="685800" cy="384048"/>
           </a:xfrm>
           <a:prstGeom prst="rect">
@@ -23128,13 +22648,13 @@
       </p:sp>
       <p:sp>
         <p:nvSpPr>
-          <p:cNvPr id="37" name="Text 35"/>
-          <p:cNvSpPr/>
-          <p:nvPr/>
-        </p:nvSpPr>
-        <p:spPr>
-          <a:xfrm>
-            <a:off x="3293146" y="4169664"/>
+          <p:cNvPr id="39" name="Text 37"/>
+          <p:cNvSpPr/>
+          <p:nvPr/>
+        </p:nvSpPr>
+        <p:spPr>
+          <a:xfrm>
+            <a:off x="3033522" y="4169664"/>
             <a:ext cx="685800" cy="384048"/>
           </a:xfrm>
           <a:prstGeom prst="rect">
@@ -23159,7 +22679,7 @@
                 <a:ea typeface="Trebuchet MS" pitchFamily="34" charset="-122"/>
                 <a:cs typeface="Trebuchet MS" pitchFamily="34" charset="-120"/>
               </a:rPr>
-              <a:t>ui</a:t>
+              <a:t>o</a:t>
             </a:r>
             <a:endParaRPr lang="en-US" sz="900" dirty="0"/>
           </a:p>
@@ -23167,52 +22687,13 @@
       </p:sp>
       <p:sp>
         <p:nvSpPr>
-          <p:cNvPr id="38" name="Text 36"/>
-          <p:cNvSpPr/>
-          <p:nvPr/>
-        </p:nvSpPr>
-        <p:spPr>
-          <a:xfrm>
-            <a:off x="3293146" y="4572000"/>
-            <a:ext cx="685800" cy="219456"/>
-          </a:xfrm>
-          <a:prstGeom prst="rect">
-            <a:avLst/>
-          </a:prstGeom>
-          <a:noFill/>
-          <a:ln/>
-        </p:spPr>
-        <p:txBody>
-          <a:bodyPr wrap="square" lIns="0" tIns="0" rIns="0" bIns="0" rtlCol="0" anchor="t"/>
-          <a:lstStyle/>
-          <a:p>
-            <a:pPr algn="ctr" indent="0" marL="0">
-              <a:buNone/>
-            </a:pPr>
-            <a:r>
-              <a:rPr lang="en-US" sz="750" i="1" dirty="0">
-                <a:solidFill>
-                  <a:srgbClr val="94A3B8"/>
-                </a:solidFill>
-                <a:latin typeface="Calibri" pitchFamily="34" charset="0"/>
-                <a:ea typeface="Calibri" pitchFamily="34" charset="-122"/>
-                <a:cs typeface="Calibri" pitchFamily="34" charset="-120"/>
-              </a:rPr>
-              <a:t>/y/</a:t>
-            </a:r>
-            <a:endParaRPr lang="en-US" sz="750" dirty="0"/>
-          </a:p>
-        </p:txBody>
-      </p:sp>
-      <p:sp>
-        <p:nvSpPr>
-          <p:cNvPr id="39" name="Shape 37"/>
-          <p:cNvSpPr/>
-          <p:nvPr/>
-        </p:nvSpPr>
-        <p:spPr>
-          <a:xfrm>
-            <a:off x="4331643" y="4169664"/>
+          <p:cNvPr id="40" name="Shape 38"/>
+          <p:cNvSpPr/>
+          <p:nvPr/>
+        </p:nvSpPr>
+        <p:spPr>
+          <a:xfrm>
+            <a:off x="3942207" y="4169664"/>
             <a:ext cx="685800" cy="384048"/>
           </a:xfrm>
           <a:prstGeom prst="rect">
@@ -23233,13 +22714,13 @@
       </p:sp>
       <p:sp>
         <p:nvSpPr>
-          <p:cNvPr id="40" name="Text 38"/>
-          <p:cNvSpPr/>
-          <p:nvPr/>
-        </p:nvSpPr>
-        <p:spPr>
-          <a:xfrm>
-            <a:off x="4331643" y="4169664"/>
+          <p:cNvPr id="41" name="Text 39"/>
+          <p:cNvSpPr/>
+          <p:nvPr/>
+        </p:nvSpPr>
+        <p:spPr>
+          <a:xfrm>
+            <a:off x="3942207" y="4169664"/>
             <a:ext cx="685800" cy="384048"/>
           </a:xfrm>
           <a:prstGeom prst="rect">
@@ -23264,7 +22745,7 @@
                 <a:ea typeface="Trebuchet MS" pitchFamily="34" charset="-122"/>
                 <a:cs typeface="Trebuchet MS" pitchFamily="34" charset="-120"/>
               </a:rPr>
-              <a:t>d</a:t>
+              <a:t>l</a:t>
             </a:r>
             <a:endParaRPr lang="en-US" sz="900" dirty="0"/>
           </a:p>
@@ -23272,13 +22753,13 @@
       </p:sp>
       <p:sp>
         <p:nvSpPr>
-          <p:cNvPr id="41" name="Shape 39"/>
-          <p:cNvSpPr/>
-          <p:nvPr/>
-        </p:nvSpPr>
-        <p:spPr>
-          <a:xfrm>
-            <a:off x="5370141" y="4169664"/>
+          <p:cNvPr id="42" name="Shape 40"/>
+          <p:cNvSpPr/>
+          <p:nvPr/>
+        </p:nvSpPr>
+        <p:spPr>
+          <a:xfrm>
+            <a:off x="4850892" y="4169664"/>
             <a:ext cx="685800" cy="384048"/>
           </a:xfrm>
           <a:prstGeom prst="rect">
@@ -23299,13 +22780,13 @@
       </p:sp>
       <p:sp>
         <p:nvSpPr>
-          <p:cNvPr id="42" name="Text 40"/>
-          <p:cNvSpPr/>
-          <p:nvPr/>
-        </p:nvSpPr>
-        <p:spPr>
-          <a:xfrm>
-            <a:off x="5370141" y="4169664"/>
+          <p:cNvPr id="43" name="Text 41"/>
+          <p:cNvSpPr/>
+          <p:nvPr/>
+        </p:nvSpPr>
+        <p:spPr>
+          <a:xfrm>
+            <a:off x="4850892" y="4169664"/>
             <a:ext cx="685800" cy="384048"/>
           </a:xfrm>
           <a:prstGeom prst="rect">
@@ -23330,7 +22811,7 @@
                 <a:ea typeface="Trebuchet MS" pitchFamily="34" charset="-122"/>
                 <a:cs typeface="Trebuchet MS" pitchFamily="34" charset="-120"/>
               </a:rPr>
-              <a:t>a</a:t>
+              <a:t>er</a:t>
             </a:r>
             <a:endParaRPr lang="en-US" sz="900" dirty="0"/>
           </a:p>
@@ -23338,13 +22819,13 @@
       </p:sp>
       <p:sp>
         <p:nvSpPr>
-          <p:cNvPr id="43" name="Shape 41"/>
-          <p:cNvSpPr/>
-          <p:nvPr/>
-        </p:nvSpPr>
-        <p:spPr>
-          <a:xfrm>
-            <a:off x="6408638" y="4169664"/>
+          <p:cNvPr id="44" name="Shape 42"/>
+          <p:cNvSpPr/>
+          <p:nvPr/>
+        </p:nvSpPr>
+        <p:spPr>
+          <a:xfrm>
+            <a:off x="5759577" y="4169664"/>
             <a:ext cx="685800" cy="384048"/>
           </a:xfrm>
           <a:prstGeom prst="rect">
@@ -23365,13 +22846,13 @@
       </p:sp>
       <p:sp>
         <p:nvSpPr>
-          <p:cNvPr id="44" name="Text 42"/>
-          <p:cNvSpPr/>
-          <p:nvPr/>
-        </p:nvSpPr>
-        <p:spPr>
-          <a:xfrm>
-            <a:off x="6408638" y="4169664"/>
+          <p:cNvPr id="45" name="Text 43"/>
+          <p:cNvSpPr/>
+          <p:nvPr/>
+        </p:nvSpPr>
+        <p:spPr>
+          <a:xfrm>
+            <a:off x="5759577" y="4169664"/>
             <a:ext cx="685800" cy="384048"/>
           </a:xfrm>
           <a:prstGeom prst="rect">
@@ -23396,7 +22877,7 @@
                 <a:ea typeface="Trebuchet MS" pitchFamily="34" charset="-122"/>
                 <a:cs typeface="Trebuchet MS" pitchFamily="34" charset="-120"/>
               </a:rPr>
-              <a:t>n</a:t>
+              <a:t>a</a:t>
             </a:r>
             <a:endParaRPr lang="en-US" sz="900" dirty="0"/>
           </a:p>
@@ -23404,13 +22885,13 @@
       </p:sp>
       <p:sp>
         <p:nvSpPr>
-          <p:cNvPr id="45" name="Shape 43"/>
-          <p:cNvSpPr/>
-          <p:nvPr/>
-        </p:nvSpPr>
-        <p:spPr>
-          <a:xfrm>
-            <a:off x="7447135" y="4169664"/>
+          <p:cNvPr id="46" name="Shape 44"/>
+          <p:cNvSpPr/>
+          <p:nvPr/>
+        </p:nvSpPr>
+        <p:spPr>
+          <a:xfrm>
+            <a:off x="6668262" y="4169664"/>
             <a:ext cx="685800" cy="384048"/>
           </a:xfrm>
           <a:prstGeom prst="rect">
@@ -23431,13 +22912,13 @@
       </p:sp>
       <p:sp>
         <p:nvSpPr>
-          <p:cNvPr id="46" name="Text 44"/>
-          <p:cNvSpPr/>
-          <p:nvPr/>
-        </p:nvSpPr>
-        <p:spPr>
-          <a:xfrm>
-            <a:off x="7447135" y="4169664"/>
+          <p:cNvPr id="47" name="Text 45"/>
+          <p:cNvSpPr/>
+          <p:nvPr/>
+        </p:nvSpPr>
+        <p:spPr>
+          <a:xfrm>
+            <a:off x="6668262" y="4169664"/>
             <a:ext cx="685800" cy="384048"/>
           </a:xfrm>
           <a:prstGeom prst="rect">
@@ -23462,6 +22943,72 @@
                 <a:ea typeface="Trebuchet MS" pitchFamily="34" charset="-122"/>
                 <a:cs typeface="Trebuchet MS" pitchFamily="34" charset="-120"/>
               </a:rPr>
+              <a:t>n</a:t>
+            </a:r>
+            <a:endParaRPr lang="en-US" sz="900" dirty="0"/>
+          </a:p>
+        </p:txBody>
+      </p:sp>
+      <p:sp>
+        <p:nvSpPr>
+          <p:cNvPr id="48" name="Shape 46"/>
+          <p:cNvSpPr/>
+          <p:nvPr/>
+        </p:nvSpPr>
+        <p:spPr>
+          <a:xfrm>
+            <a:off x="7576947" y="4169664"/>
+            <a:ext cx="685800" cy="384048"/>
+          </a:xfrm>
+          <a:prstGeom prst="rect">
+            <a:avLst>
+              <a:gd name="adj" fmla="val 9524"/>
+            </a:avLst>
+          </a:prstGeom>
+          <a:solidFill>
+            <a:srgbClr val="FFFFFF"/>
+          </a:solidFill>
+          <a:ln w="12700">
+            <a:solidFill>
+              <a:srgbClr val="DB2777"/>
+            </a:solidFill>
+            <a:prstDash val="solid"/>
+          </a:ln>
+        </p:spPr>
+      </p:sp>
+      <p:sp>
+        <p:nvSpPr>
+          <p:cNvPr id="49" name="Text 47"/>
+          <p:cNvSpPr/>
+          <p:nvPr/>
+        </p:nvSpPr>
+        <p:spPr>
+          <a:xfrm>
+            <a:off x="7576947" y="4169664"/>
+            <a:ext cx="685800" cy="384048"/>
+          </a:xfrm>
+          <a:prstGeom prst="rect">
+            <a:avLst/>
+          </a:prstGeom>
+          <a:noFill/>
+          <a:ln/>
+        </p:spPr>
+        <p:txBody>
+          <a:bodyPr wrap="square" lIns="0" tIns="0" rIns="0" bIns="0" rtlCol="0" anchor="ctr"/>
+          <a:lstStyle/>
+          <a:p>
+            <a:pPr algn="ctr" indent="0" marL="0">
+              <a:buNone/>
+            </a:pPr>
+            <a:r>
+              <a:rPr lang="en-US" sz="900" b="1" dirty="0">
+                <a:solidFill>
+                  <a:srgbClr val="9D174D"/>
+                </a:solidFill>
+                <a:latin typeface="Trebuchet MS" pitchFamily="34" charset="0"/>
+                <a:ea typeface="Trebuchet MS" pitchFamily="34" charset="-122"/>
+                <a:cs typeface="Trebuchet MS" pitchFamily="34" charset="-120"/>
+              </a:rPr>
               <a:t>ce</a:t>
             </a:r>
             <a:endParaRPr lang="en-US" sz="900" dirty="0"/>
@@ -23470,13 +23017,13 @@
       </p:sp>
       <p:sp>
         <p:nvSpPr>
-          <p:cNvPr id="47" name="Text 45"/>
-          <p:cNvSpPr/>
-          <p:nvPr/>
-        </p:nvSpPr>
-        <p:spPr>
-          <a:xfrm>
-            <a:off x="7447135" y="4572000"/>
+          <p:cNvPr id="50" name="Text 48"/>
+          <p:cNvSpPr/>
+          <p:nvPr/>
+        </p:nvSpPr>
+        <p:spPr>
+          <a:xfrm>
+            <a:off x="7576947" y="4572000"/>
             <a:ext cx="685800" cy="219456"/>
           </a:xfrm>
           <a:prstGeom prst="rect">
@@ -24937,7 +24484,7 @@
                 <a:ea typeface="Calibri" pitchFamily="34" charset="-122"/>
                 <a:cs typeface="Calibri" pitchFamily="34" charset="-120"/>
               </a:rPr>
-              <a:t>toward</a:t>
+              <a:t>to, towards</a:t>
             </a:r>
             <a:endParaRPr lang="en-US" sz="850" dirty="0"/>
           </a:p>
@@ -25088,7 +24635,7 @@
                 <a:ea typeface="Calibri" pitchFamily="34" charset="-122"/>
                 <a:cs typeface="Calibri" pitchFamily="34" charset="-120"/>
               </a:rPr>
-              <a:t>to stand</a:t>
+              <a:t>stand, help</a:t>
             </a:r>
             <a:endParaRPr lang="en-US" sz="850" dirty="0"/>
           </a:p>
@@ -26792,7 +26339,7 @@
                 <a:ea typeface="Calibri" pitchFamily="34" charset="-122"/>
                 <a:cs typeface="Calibri" pitchFamily="34" charset="-120"/>
               </a:rPr>
-              <a:t>toward</a:t>
+              <a:t>to, towards</a:t>
             </a:r>
             <a:endParaRPr lang="en-US" sz="850" dirty="0"/>
           </a:p>
@@ -26943,7 +26490,7 @@
                 <a:ea typeface="Calibri" pitchFamily="34" charset="-122"/>
                 <a:cs typeface="Calibri" pitchFamily="34" charset="-120"/>
               </a:rPr>
-              <a:t>to stand</a:t>
+              <a:t>stand, help</a:t>
             </a:r>
             <a:endParaRPr lang="en-US" sz="850" dirty="0"/>
           </a:p>
@@ -28165,7 +27712,7 @@
                 <a:ea typeface="Calibri" pitchFamily="34" charset="-122"/>
                 <a:cs typeface="Calibri" pitchFamily="34" charset="-120"/>
               </a:rPr>
-              <a:t>toward</a:t>
+              <a:t>to, towards</a:t>
             </a:r>
             <a:endParaRPr lang="en-US" sz="850" dirty="0"/>
           </a:p>
@@ -28316,7 +27863,7 @@
                 <a:ea typeface="Calibri" pitchFamily="34" charset="-122"/>
                 <a:cs typeface="Calibri" pitchFamily="34" charset="-120"/>
               </a:rPr>
-              <a:t>to stand</a:t>
+              <a:t>stand, help</a:t>
             </a:r>
             <a:endParaRPr lang="en-US" sz="850" dirty="0"/>
           </a:p>
@@ -29030,7 +28577,46 @@
       </p:sp>
       <p:sp>
         <p:nvSpPr>
-          <p:cNvPr id="44" name="Shape 42"/>
+          <p:cNvPr id="44" name="Text 42"/>
+          <p:cNvSpPr/>
+          <p:nvPr/>
+        </p:nvSpPr>
+        <p:spPr>
+          <a:xfrm>
+            <a:off x="2831592" y="4572000"/>
+            <a:ext cx="685800" cy="219456"/>
+          </a:xfrm>
+          <a:prstGeom prst="rect">
+            <a:avLst/>
+          </a:prstGeom>
+          <a:noFill/>
+          <a:ln/>
+        </p:spPr>
+        <p:txBody>
+          <a:bodyPr wrap="square" lIns="0" tIns="0" rIns="0" bIns="0" rtlCol="0" anchor="t"/>
+          <a:lstStyle/>
+          <a:p>
+            <a:pPr algn="ctr" indent="0" marL="0">
+              <a:buNone/>
+            </a:pPr>
+            <a:r>
+              <a:rPr lang="en-US" sz="750" i="1" dirty="0">
+                <a:solidFill>
+                  <a:srgbClr val="94A3B8"/>
+                </a:solidFill>
+                <a:latin typeface="Calibri" pitchFamily="34" charset="0"/>
+                <a:ea typeface="Calibri" pitchFamily="34" charset="-122"/>
+                <a:cs typeface="Calibri" pitchFamily="34" charset="-120"/>
+              </a:rPr>
+              <a:t>/s/</a:t>
+            </a:r>
+            <a:endParaRPr lang="en-US" sz="750" dirty="0"/>
+          </a:p>
+        </p:txBody>
+      </p:sp>
+      <p:sp>
+        <p:nvSpPr>
+          <p:cNvPr id="45" name="Shape 43"/>
           <p:cNvSpPr/>
           <p:nvPr/>
         </p:nvSpPr>
@@ -29057,7 +28643,7 @@
       </p:sp>
       <p:sp>
         <p:nvSpPr>
-          <p:cNvPr id="45" name="Text 43"/>
+          <p:cNvPr id="46" name="Text 44"/>
           <p:cNvSpPr/>
           <p:nvPr/>
         </p:nvSpPr>
@@ -29096,7 +28682,7 @@
       </p:sp>
       <p:sp>
         <p:nvSpPr>
-          <p:cNvPr id="46" name="Shape 44"/>
+          <p:cNvPr id="47" name="Shape 45"/>
           <p:cNvSpPr/>
           <p:nvPr/>
         </p:nvSpPr>
@@ -29123,7 +28709,7 @@
       </p:sp>
       <p:sp>
         <p:nvSpPr>
-          <p:cNvPr id="47" name="Text 45"/>
+          <p:cNvPr id="48" name="Text 46"/>
           <p:cNvSpPr/>
           <p:nvPr/>
         </p:nvSpPr>
@@ -29162,7 +28748,7 @@
       </p:sp>
       <p:sp>
         <p:nvSpPr>
-          <p:cNvPr id="48" name="Shape 46"/>
+          <p:cNvPr id="49" name="Shape 47"/>
           <p:cNvSpPr/>
           <p:nvPr/>
         </p:nvSpPr>
@@ -29189,7 +28775,7 @@
       </p:sp>
       <p:sp>
         <p:nvSpPr>
-          <p:cNvPr id="49" name="Text 47"/>
+          <p:cNvPr id="50" name="Text 48"/>
           <p:cNvSpPr/>
           <p:nvPr/>
         </p:nvSpPr>
@@ -29228,7 +28814,7 @@
       </p:sp>
       <p:sp>
         <p:nvSpPr>
-          <p:cNvPr id="50" name="Shape 48"/>
+          <p:cNvPr id="51" name="Shape 49"/>
           <p:cNvSpPr/>
           <p:nvPr/>
         </p:nvSpPr>
@@ -29255,7 +28841,7 @@
       </p:sp>
       <p:sp>
         <p:nvSpPr>
-          <p:cNvPr id="51" name="Text 49"/>
+          <p:cNvPr id="52" name="Text 50"/>
           <p:cNvSpPr/>
           <p:nvPr/>
         </p:nvSpPr>
@@ -29294,7 +28880,7 @@
       </p:sp>
       <p:sp>
         <p:nvSpPr>
-          <p:cNvPr id="52" name="Shape 50"/>
+          <p:cNvPr id="53" name="Shape 51"/>
           <p:cNvSpPr/>
           <p:nvPr/>
         </p:nvSpPr>
@@ -29321,7 +28907,7 @@
       </p:sp>
       <p:sp>
         <p:nvSpPr>
-          <p:cNvPr id="53" name="Text 51"/>
+          <p:cNvPr id="54" name="Text 52"/>
           <p:cNvSpPr/>
           <p:nvPr/>
         </p:nvSpPr>
@@ -29360,7 +28946,7 @@
       </p:sp>
       <p:sp>
         <p:nvSpPr>
-          <p:cNvPr id="54" name="Shape 52"/>
+          <p:cNvPr id="55" name="Shape 53"/>
           <p:cNvSpPr/>
           <p:nvPr/>
         </p:nvSpPr>
@@ -29387,7 +28973,7 @@
       </p:sp>
       <p:sp>
         <p:nvSpPr>
-          <p:cNvPr id="55" name="Text 53"/>
+          <p:cNvPr id="56" name="Text 54"/>
           <p:cNvSpPr/>
           <p:nvPr/>
         </p:nvSpPr>
@@ -29426,7 +29012,7 @@
       </p:sp>
       <p:sp>
         <p:nvSpPr>
-          <p:cNvPr id="56" name="Text 54"/>
+          <p:cNvPr id="57" name="Text 55"/>
           <p:cNvSpPr/>
           <p:nvPr/>
         </p:nvSpPr>
@@ -29888,7 +29474,7 @@
                 <a:ea typeface="Trebuchet MS" pitchFamily="34" charset="-122"/>
                 <a:cs typeface="Trebuchet MS" pitchFamily="34" charset="-120"/>
               </a:rPr>
-              <a:t>endurance</a:t>
+              <a:t>importance</a:t>
             </a:r>
             <a:endParaRPr lang="en-US" sz="2800" dirty="0"/>
           </a:p>
@@ -30715,7 +30301,7 @@
                 <a:ea typeface="Trebuchet MS" pitchFamily="34" charset="-122"/>
                 <a:cs typeface="Trebuchet MS" pitchFamily="34" charset="-120"/>
               </a:rPr>
-              <a:t>endurance</a:t>
+              <a:t>importance</a:t>
             </a:r>
             <a:endParaRPr lang="en-US" sz="2800" dirty="0"/>
           </a:p>
@@ -30854,7 +30440,7 @@
                 <a:ea typeface="Trebuchet MS" pitchFamily="34" charset="-122"/>
                 <a:cs typeface="Trebuchet MS" pitchFamily="34" charset="-120"/>
               </a:rPr>
-              <a:t>en</a:t>
+              <a:t>im</a:t>
             </a:r>
             <a:endParaRPr lang="en-US" sz="1300" dirty="0"/>
           </a:p>
@@ -30901,7 +30487,46 @@
       </p:sp>
       <p:sp>
         <p:nvSpPr>
-          <p:cNvPr id="19" name="Shape 17"/>
+          <p:cNvPr id="19" name="Text 17"/>
+          <p:cNvSpPr/>
+          <p:nvPr/>
+        </p:nvSpPr>
+        <p:spPr>
+          <a:xfrm>
+            <a:off x="2221992" y="2752344"/>
+            <a:ext cx="1828800" cy="182880"/>
+          </a:xfrm>
+          <a:prstGeom prst="rect">
+            <a:avLst/>
+          </a:prstGeom>
+          <a:noFill/>
+          <a:ln/>
+        </p:spPr>
+        <p:txBody>
+          <a:bodyPr wrap="square" lIns="0" tIns="0" rIns="0" bIns="0" rtlCol="0" anchor="t"/>
+          <a:lstStyle/>
+          <a:p>
+            <a:pPr algn="ctr" indent="0" marL="0">
+              <a:buNone/>
+            </a:pPr>
+            <a:r>
+              <a:rPr lang="en-US" sz="700" i="1" dirty="0">
+                <a:solidFill>
+                  <a:srgbClr val="94A3B8"/>
+                </a:solidFill>
+                <a:latin typeface="Calibri" pitchFamily="34" charset="0"/>
+                <a:ea typeface="Calibri" pitchFamily="34" charset="-122"/>
+                <a:cs typeface="Calibri" pitchFamily="34" charset="-120"/>
+              </a:rPr>
+              <a:t>in → im before 'p'</a:t>
+            </a:r>
+            <a:endParaRPr lang="en-US" sz="700" dirty="0"/>
+          </a:p>
+        </p:txBody>
+      </p:sp>
+      <p:sp>
+        <p:nvSpPr>
+          <p:cNvPr id="20" name="Shape 18"/>
           <p:cNvSpPr/>
           <p:nvPr/>
         </p:nvSpPr>
@@ -30935,7 +30560,7 @@
       </p:sp>
       <p:sp>
         <p:nvSpPr>
-          <p:cNvPr id="20" name="Text 18"/>
+          <p:cNvPr id="21" name="Text 19"/>
           <p:cNvSpPr/>
           <p:nvPr/>
         </p:nvSpPr>
@@ -30966,7 +30591,7 @@
                 <a:ea typeface="Trebuchet MS" pitchFamily="34" charset="-122"/>
                 <a:cs typeface="Trebuchet MS" pitchFamily="34" charset="-120"/>
               </a:rPr>
-              <a:t>dur</a:t>
+              <a:t>port</a:t>
             </a:r>
             <a:endParaRPr lang="en-US" sz="1300" dirty="0"/>
           </a:p>
@@ -30974,7 +30599,7 @@
       </p:sp>
       <p:sp>
         <p:nvSpPr>
-          <p:cNvPr id="21" name="Text 19"/>
+          <p:cNvPr id="22" name="Text 20"/>
           <p:cNvSpPr/>
           <p:nvPr/>
         </p:nvSpPr>
@@ -31005,7 +30630,7 @@
                 <a:ea typeface="Calibri" pitchFamily="34" charset="-122"/>
                 <a:cs typeface="Calibri" pitchFamily="34" charset="-120"/>
               </a:rPr>
-              <a:t>to last, harden</a:t>
+              <a:t>carry, bring</a:t>
             </a:r>
             <a:endParaRPr lang="en-US" sz="850" dirty="0"/>
           </a:p>
@@ -31013,7 +30638,7 @@
       </p:sp>
       <p:sp>
         <p:nvSpPr>
-          <p:cNvPr id="22" name="Shape 20"/>
+          <p:cNvPr id="23" name="Shape 21"/>
           <p:cNvSpPr/>
           <p:nvPr/>
         </p:nvSpPr>
@@ -31047,7 +30672,7 @@
       </p:sp>
       <p:sp>
         <p:nvSpPr>
-          <p:cNvPr id="23" name="Text 21"/>
+          <p:cNvPr id="24" name="Text 22"/>
           <p:cNvSpPr/>
           <p:nvPr/>
         </p:nvSpPr>
@@ -31086,7 +30711,7 @@
       </p:sp>
       <p:sp>
         <p:nvSpPr>
-          <p:cNvPr id="24" name="Text 22"/>
+          <p:cNvPr id="25" name="Text 23"/>
           <p:cNvSpPr/>
           <p:nvPr/>
         </p:nvSpPr>
@@ -31120,45 +30745,6 @@
               <a:t>state or quality of</a:t>
             </a:r>
             <a:endParaRPr lang="en-US" sz="850" dirty="0"/>
-          </a:p>
-        </p:txBody>
-      </p:sp>
-      <p:sp>
-        <p:nvSpPr>
-          <p:cNvPr id="25" name="Text 23"/>
-          <p:cNvSpPr/>
-          <p:nvPr/>
-        </p:nvSpPr>
-        <p:spPr>
-          <a:xfrm>
-            <a:off x="6519672" y="2752344"/>
-            <a:ext cx="1828800" cy="182880"/>
-          </a:xfrm>
-          <a:prstGeom prst="rect">
-            <a:avLst/>
-          </a:prstGeom>
-          <a:noFill/>
-          <a:ln/>
-        </p:spPr>
-        <p:txBody>
-          <a:bodyPr wrap="square" lIns="0" tIns="0" rIns="0" bIns="0" rtlCol="0" anchor="t"/>
-          <a:lstStyle/>
-          <a:p>
-            <a:pPr algn="ctr" indent="0" marL="0">
-              <a:buNone/>
-            </a:pPr>
-            <a:r>
-              <a:rPr lang="en-US" sz="700" i="1" dirty="0">
-                <a:solidFill>
-                  <a:srgbClr val="94A3B8"/>
-                </a:solidFill>
-                <a:latin typeface="Calibri" pitchFamily="34" charset="0"/>
-                <a:ea typeface="Calibri" pitchFamily="34" charset="-122"/>
-                <a:cs typeface="Calibri" pitchFamily="34" charset="-120"/>
-              </a:rPr>
-              <a:t>'e' dropped from 'endure' before suffix</a:t>
-            </a:r>
-            <a:endParaRPr lang="en-US" sz="700" dirty="0"/>
           </a:p>
         </p:txBody>
       </p:sp>
@@ -31851,7 +31437,7 @@
                 <a:ea typeface="Trebuchet MS" pitchFamily="34" charset="-122"/>
                 <a:cs typeface="Trebuchet MS" pitchFamily="34" charset="-120"/>
               </a:rPr>
-              <a:t>endurance</a:t>
+              <a:t>importance</a:t>
             </a:r>
             <a:endParaRPr lang="en-US" sz="2800" dirty="0"/>
           </a:p>
@@ -31990,7 +31576,7 @@
                 <a:ea typeface="Trebuchet MS" pitchFamily="34" charset="-122"/>
                 <a:cs typeface="Trebuchet MS" pitchFamily="34" charset="-120"/>
               </a:rPr>
-              <a:t>en</a:t>
+              <a:t>im</a:t>
             </a:r>
             <a:endParaRPr lang="en-US" sz="1300" dirty="0"/>
           </a:p>
@@ -32037,7 +31623,46 @@
       </p:sp>
       <p:sp>
         <p:nvSpPr>
-          <p:cNvPr id="19" name="Shape 17"/>
+          <p:cNvPr id="19" name="Text 17"/>
+          <p:cNvSpPr/>
+          <p:nvPr/>
+        </p:nvSpPr>
+        <p:spPr>
+          <a:xfrm>
+            <a:off x="2221992" y="2752344"/>
+            <a:ext cx="1828800" cy="182880"/>
+          </a:xfrm>
+          <a:prstGeom prst="rect">
+            <a:avLst/>
+          </a:prstGeom>
+          <a:noFill/>
+          <a:ln/>
+        </p:spPr>
+        <p:txBody>
+          <a:bodyPr wrap="square" lIns="0" tIns="0" rIns="0" bIns="0" rtlCol="0" anchor="t"/>
+          <a:lstStyle/>
+          <a:p>
+            <a:pPr algn="ctr" indent="0" marL="0">
+              <a:buNone/>
+            </a:pPr>
+            <a:r>
+              <a:rPr lang="en-US" sz="700" i="1" dirty="0">
+                <a:solidFill>
+                  <a:srgbClr val="94A3B8"/>
+                </a:solidFill>
+                <a:latin typeface="Calibri" pitchFamily="34" charset="0"/>
+                <a:ea typeface="Calibri" pitchFamily="34" charset="-122"/>
+                <a:cs typeface="Calibri" pitchFamily="34" charset="-120"/>
+              </a:rPr>
+              <a:t>in → im before 'p'</a:t>
+            </a:r>
+            <a:endParaRPr lang="en-US" sz="700" dirty="0"/>
+          </a:p>
+        </p:txBody>
+      </p:sp>
+      <p:sp>
+        <p:nvSpPr>
+          <p:cNvPr id="20" name="Shape 18"/>
           <p:cNvSpPr/>
           <p:nvPr/>
         </p:nvSpPr>
@@ -32071,7 +31696,7 @@
       </p:sp>
       <p:sp>
         <p:nvSpPr>
-          <p:cNvPr id="20" name="Text 18"/>
+          <p:cNvPr id="21" name="Text 19"/>
           <p:cNvSpPr/>
           <p:nvPr/>
         </p:nvSpPr>
@@ -32102,7 +31727,7 @@
                 <a:ea typeface="Trebuchet MS" pitchFamily="34" charset="-122"/>
                 <a:cs typeface="Trebuchet MS" pitchFamily="34" charset="-120"/>
               </a:rPr>
-              <a:t>dur</a:t>
+              <a:t>port</a:t>
             </a:r>
             <a:endParaRPr lang="en-US" sz="1300" dirty="0"/>
           </a:p>
@@ -32110,7 +31735,7 @@
       </p:sp>
       <p:sp>
         <p:nvSpPr>
-          <p:cNvPr id="21" name="Text 19"/>
+          <p:cNvPr id="22" name="Text 20"/>
           <p:cNvSpPr/>
           <p:nvPr/>
         </p:nvSpPr>
@@ -32141,7 +31766,7 @@
                 <a:ea typeface="Calibri" pitchFamily="34" charset="-122"/>
                 <a:cs typeface="Calibri" pitchFamily="34" charset="-120"/>
               </a:rPr>
-              <a:t>to last, harden</a:t>
+              <a:t>carry, bring</a:t>
             </a:r>
             <a:endParaRPr lang="en-US" sz="850" dirty="0"/>
           </a:p>
@@ -32149,7 +31774,7 @@
       </p:sp>
       <p:sp>
         <p:nvSpPr>
-          <p:cNvPr id="22" name="Shape 20"/>
+          <p:cNvPr id="23" name="Shape 21"/>
           <p:cNvSpPr/>
           <p:nvPr/>
         </p:nvSpPr>
@@ -32183,7 +31808,7 @@
       </p:sp>
       <p:sp>
         <p:nvSpPr>
-          <p:cNvPr id="23" name="Text 21"/>
+          <p:cNvPr id="24" name="Text 22"/>
           <p:cNvSpPr/>
           <p:nvPr/>
         </p:nvSpPr>
@@ -32222,7 +31847,7 @@
       </p:sp>
       <p:sp>
         <p:nvSpPr>
-          <p:cNvPr id="24" name="Text 22"/>
+          <p:cNvPr id="25" name="Text 23"/>
           <p:cNvSpPr/>
           <p:nvPr/>
         </p:nvSpPr>
@@ -32261,45 +31886,6 @@
       </p:sp>
       <p:sp>
         <p:nvSpPr>
-          <p:cNvPr id="25" name="Text 23"/>
-          <p:cNvSpPr/>
-          <p:nvPr/>
-        </p:nvSpPr>
-        <p:spPr>
-          <a:xfrm>
-            <a:off x="6519672" y="2752344"/>
-            <a:ext cx="1828800" cy="182880"/>
-          </a:xfrm>
-          <a:prstGeom prst="rect">
-            <a:avLst/>
-          </a:prstGeom>
-          <a:noFill/>
-          <a:ln/>
-        </p:spPr>
-        <p:txBody>
-          <a:bodyPr wrap="square" lIns="0" tIns="0" rIns="0" bIns="0" rtlCol="0" anchor="t"/>
-          <a:lstStyle/>
-          <a:p>
-            <a:pPr algn="ctr" indent="0" marL="0">
-              <a:buNone/>
-            </a:pPr>
-            <a:r>
-              <a:rPr lang="en-US" sz="700" i="1" dirty="0">
-                <a:solidFill>
-                  <a:srgbClr val="94A3B8"/>
-                </a:solidFill>
-                <a:latin typeface="Calibri" pitchFamily="34" charset="0"/>
-                <a:ea typeface="Calibri" pitchFamily="34" charset="-122"/>
-                <a:cs typeface="Calibri" pitchFamily="34" charset="-120"/>
-              </a:rPr>
-              <a:t>'e' dropped from 'endure' before suffix</a:t>
-            </a:r>
-            <a:endParaRPr lang="en-US" sz="700" dirty="0"/>
-          </a:p>
-        </p:txBody>
-      </p:sp>
-      <p:sp>
-        <p:nvSpPr>
           <p:cNvPr id="26" name="Shape 24"/>
           <p:cNvSpPr/>
           <p:nvPr/>
@@ -32451,7 +32037,7 @@
                 <a:ea typeface="Trebuchet MS" pitchFamily="34" charset="-122"/>
                 <a:cs typeface="Trebuchet MS" pitchFamily="34" charset="-120"/>
               </a:rPr>
-              <a:t>en</a:t>
+              <a:t>im</a:t>
             </a:r>
             <a:endParaRPr lang="en-US" sz="1400" dirty="0"/>
           </a:p>
@@ -32556,7 +32142,7 @@
                 <a:ea typeface="Trebuchet MS" pitchFamily="34" charset="-122"/>
                 <a:cs typeface="Trebuchet MS" pitchFamily="34" charset="-120"/>
               </a:rPr>
-              <a:t>dur</a:t>
+              <a:t>port</a:t>
             </a:r>
             <a:endParaRPr lang="en-US" sz="1400" dirty="0"/>
           </a:p>
@@ -33224,7 +32810,7 @@
                 <a:ea typeface="Trebuchet MS" pitchFamily="34" charset="-122"/>
                 <a:cs typeface="Trebuchet MS" pitchFamily="34" charset="-120"/>
               </a:rPr>
-              <a:t>endurance</a:t>
+              <a:t>importance</a:t>
             </a:r>
             <a:endParaRPr lang="en-US" sz="2800" dirty="0"/>
           </a:p>
@@ -33363,7 +32949,7 @@
                 <a:ea typeface="Trebuchet MS" pitchFamily="34" charset="-122"/>
                 <a:cs typeface="Trebuchet MS" pitchFamily="34" charset="-120"/>
               </a:rPr>
-              <a:t>en</a:t>
+              <a:t>im</a:t>
             </a:r>
             <a:endParaRPr lang="en-US" sz="1300" dirty="0"/>
           </a:p>
@@ -33410,7 +32996,46 @@
       </p:sp>
       <p:sp>
         <p:nvSpPr>
-          <p:cNvPr id="19" name="Shape 17"/>
+          <p:cNvPr id="19" name="Text 17"/>
+          <p:cNvSpPr/>
+          <p:nvPr/>
+        </p:nvSpPr>
+        <p:spPr>
+          <a:xfrm>
+            <a:off x="2221992" y="2752344"/>
+            <a:ext cx="1828800" cy="182880"/>
+          </a:xfrm>
+          <a:prstGeom prst="rect">
+            <a:avLst/>
+          </a:prstGeom>
+          <a:noFill/>
+          <a:ln/>
+        </p:spPr>
+        <p:txBody>
+          <a:bodyPr wrap="square" lIns="0" tIns="0" rIns="0" bIns="0" rtlCol="0" anchor="t"/>
+          <a:lstStyle/>
+          <a:p>
+            <a:pPr algn="ctr" indent="0" marL="0">
+              <a:buNone/>
+            </a:pPr>
+            <a:r>
+              <a:rPr lang="en-US" sz="700" i="1" dirty="0">
+                <a:solidFill>
+                  <a:srgbClr val="94A3B8"/>
+                </a:solidFill>
+                <a:latin typeface="Calibri" pitchFamily="34" charset="0"/>
+                <a:ea typeface="Calibri" pitchFamily="34" charset="-122"/>
+                <a:cs typeface="Calibri" pitchFamily="34" charset="-120"/>
+              </a:rPr>
+              <a:t>in → im before 'p'</a:t>
+            </a:r>
+            <a:endParaRPr lang="en-US" sz="700" dirty="0"/>
+          </a:p>
+        </p:txBody>
+      </p:sp>
+      <p:sp>
+        <p:nvSpPr>
+          <p:cNvPr id="20" name="Shape 18"/>
           <p:cNvSpPr/>
           <p:nvPr/>
         </p:nvSpPr>
@@ -33444,7 +33069,7 @@
       </p:sp>
       <p:sp>
         <p:nvSpPr>
-          <p:cNvPr id="20" name="Text 18"/>
+          <p:cNvPr id="21" name="Text 19"/>
           <p:cNvSpPr/>
           <p:nvPr/>
         </p:nvSpPr>
@@ -33475,7 +33100,7 @@
                 <a:ea typeface="Trebuchet MS" pitchFamily="34" charset="-122"/>
                 <a:cs typeface="Trebuchet MS" pitchFamily="34" charset="-120"/>
               </a:rPr>
-              <a:t>dur</a:t>
+              <a:t>port</a:t>
             </a:r>
             <a:endParaRPr lang="en-US" sz="1300" dirty="0"/>
           </a:p>
@@ -33483,7 +33108,7 @@
       </p:sp>
       <p:sp>
         <p:nvSpPr>
-          <p:cNvPr id="21" name="Text 19"/>
+          <p:cNvPr id="22" name="Text 20"/>
           <p:cNvSpPr/>
           <p:nvPr/>
         </p:nvSpPr>
@@ -33514,7 +33139,7 @@
                 <a:ea typeface="Calibri" pitchFamily="34" charset="-122"/>
                 <a:cs typeface="Calibri" pitchFamily="34" charset="-120"/>
               </a:rPr>
-              <a:t>to last, harden</a:t>
+              <a:t>carry, bring</a:t>
             </a:r>
             <a:endParaRPr lang="en-US" sz="850" dirty="0"/>
           </a:p>
@@ -33522,7 +33147,7 @@
       </p:sp>
       <p:sp>
         <p:nvSpPr>
-          <p:cNvPr id="22" name="Shape 20"/>
+          <p:cNvPr id="23" name="Shape 21"/>
           <p:cNvSpPr/>
           <p:nvPr/>
         </p:nvSpPr>
@@ -33556,7 +33181,7 @@
       </p:sp>
       <p:sp>
         <p:nvSpPr>
-          <p:cNvPr id="23" name="Text 21"/>
+          <p:cNvPr id="24" name="Text 22"/>
           <p:cNvSpPr/>
           <p:nvPr/>
         </p:nvSpPr>
@@ -33595,7 +33220,7 @@
       </p:sp>
       <p:sp>
         <p:nvSpPr>
-          <p:cNvPr id="24" name="Text 22"/>
+          <p:cNvPr id="25" name="Text 23"/>
           <p:cNvSpPr/>
           <p:nvPr/>
         </p:nvSpPr>
@@ -33634,45 +33259,6 @@
       </p:sp>
       <p:sp>
         <p:nvSpPr>
-          <p:cNvPr id="25" name="Text 23"/>
-          <p:cNvSpPr/>
-          <p:nvPr/>
-        </p:nvSpPr>
-        <p:spPr>
-          <a:xfrm>
-            <a:off x="6519672" y="2752344"/>
-            <a:ext cx="1828800" cy="182880"/>
-          </a:xfrm>
-          <a:prstGeom prst="rect">
-            <a:avLst/>
-          </a:prstGeom>
-          <a:noFill/>
-          <a:ln/>
-        </p:spPr>
-        <p:txBody>
-          <a:bodyPr wrap="square" lIns="0" tIns="0" rIns="0" bIns="0" rtlCol="0" anchor="t"/>
-          <a:lstStyle/>
-          <a:p>
-            <a:pPr algn="ctr" indent="0" marL="0">
-              <a:buNone/>
-            </a:pPr>
-            <a:r>
-              <a:rPr lang="en-US" sz="700" i="1" dirty="0">
-                <a:solidFill>
-                  <a:srgbClr val="94A3B8"/>
-                </a:solidFill>
-                <a:latin typeface="Calibri" pitchFamily="34" charset="0"/>
-                <a:ea typeface="Calibri" pitchFamily="34" charset="-122"/>
-                <a:cs typeface="Calibri" pitchFamily="34" charset="-120"/>
-              </a:rPr>
-              <a:t>'e' dropped from 'endure' before suffix</a:t>
-            </a:r>
-            <a:endParaRPr lang="en-US" sz="700" dirty="0"/>
-          </a:p>
-        </p:txBody>
-      </p:sp>
-      <p:sp>
-        <p:nvSpPr>
           <p:cNvPr id="26" name="Shape 24"/>
           <p:cNvSpPr/>
           <p:nvPr/>
@@ -33824,7 +33410,7 @@
                 <a:ea typeface="Trebuchet MS" pitchFamily="34" charset="-122"/>
                 <a:cs typeface="Trebuchet MS" pitchFamily="34" charset="-120"/>
               </a:rPr>
-              <a:t>en</a:t>
+              <a:t>im</a:t>
             </a:r>
             <a:endParaRPr lang="en-US" sz="1400" dirty="0"/>
           </a:p>
@@ -33929,7 +33515,7 @@
                 <a:ea typeface="Trebuchet MS" pitchFamily="34" charset="-122"/>
                 <a:cs typeface="Trebuchet MS" pitchFamily="34" charset="-120"/>
               </a:rPr>
-              <a:t>dur</a:t>
+              <a:t>port</a:t>
             </a:r>
             <a:endParaRPr lang="en-US" sz="1400" dirty="0"/>
           </a:p>
@@ -34141,7 +33727,7 @@
         </p:nvSpPr>
         <p:spPr>
           <a:xfrm>
-            <a:off x="2124837" y="4169664"/>
+            <a:off x="2023872" y="4169664"/>
             <a:ext cx="685800" cy="384048"/>
           </a:xfrm>
           <a:prstGeom prst="rect">
@@ -34168,7 +33754,7 @@
         </p:nvSpPr>
         <p:spPr>
           <a:xfrm>
-            <a:off x="2124837" y="4169664"/>
+            <a:off x="2023872" y="4169664"/>
             <a:ext cx="685800" cy="384048"/>
           </a:xfrm>
           <a:prstGeom prst="rect">
@@ -34193,7 +33779,7 @@
                 <a:ea typeface="Trebuchet MS" pitchFamily="34" charset="-122"/>
                 <a:cs typeface="Trebuchet MS" pitchFamily="34" charset="-120"/>
               </a:rPr>
-              <a:t>e</a:t>
+              <a:t>i</a:t>
             </a:r>
             <a:endParaRPr lang="en-US" sz="900" dirty="0"/>
           </a:p>
@@ -34207,7 +33793,7 @@
         </p:nvSpPr>
         <p:spPr>
           <a:xfrm>
-            <a:off x="3033522" y="4169664"/>
+            <a:off x="2831592" y="4169664"/>
             <a:ext cx="685800" cy="384048"/>
           </a:xfrm>
           <a:prstGeom prst="rect">
@@ -34234,7 +33820,7 @@
         </p:nvSpPr>
         <p:spPr>
           <a:xfrm>
-            <a:off x="3033522" y="4169664"/>
+            <a:off x="2831592" y="4169664"/>
             <a:ext cx="685800" cy="384048"/>
           </a:xfrm>
           <a:prstGeom prst="rect">
@@ -34259,7 +33845,7 @@
                 <a:ea typeface="Trebuchet MS" pitchFamily="34" charset="-122"/>
                 <a:cs typeface="Trebuchet MS" pitchFamily="34" charset="-120"/>
               </a:rPr>
-              <a:t>n</a:t>
+              <a:t>m</a:t>
             </a:r>
             <a:endParaRPr lang="en-US" sz="900" dirty="0"/>
           </a:p>
@@ -34273,7 +33859,7 @@
         </p:nvSpPr>
         <p:spPr>
           <a:xfrm>
-            <a:off x="3942207" y="4169664"/>
+            <a:off x="3639312" y="4169664"/>
             <a:ext cx="685800" cy="384048"/>
           </a:xfrm>
           <a:prstGeom prst="rect">
@@ -34300,7 +33886,7 @@
         </p:nvSpPr>
         <p:spPr>
           <a:xfrm>
-            <a:off x="3942207" y="4169664"/>
+            <a:off x="3639312" y="4169664"/>
             <a:ext cx="685800" cy="384048"/>
           </a:xfrm>
           <a:prstGeom prst="rect">
@@ -34325,7 +33911,7 @@
                 <a:ea typeface="Trebuchet MS" pitchFamily="34" charset="-122"/>
                 <a:cs typeface="Trebuchet MS" pitchFamily="34" charset="-120"/>
               </a:rPr>
-              <a:t>d</a:t>
+              <a:t>p</a:t>
             </a:r>
             <a:endParaRPr lang="en-US" sz="900" dirty="0"/>
           </a:p>
@@ -34339,7 +33925,7 @@
         </p:nvSpPr>
         <p:spPr>
           <a:xfrm>
-            <a:off x="4850892" y="4169664"/>
+            <a:off x="4447032" y="4169664"/>
             <a:ext cx="685800" cy="384048"/>
           </a:xfrm>
           <a:prstGeom prst="rect">
@@ -34366,7 +33952,7 @@
         </p:nvSpPr>
         <p:spPr>
           <a:xfrm>
-            <a:off x="4850892" y="4169664"/>
+            <a:off x="4447032" y="4169664"/>
             <a:ext cx="685800" cy="384048"/>
           </a:xfrm>
           <a:prstGeom prst="rect">
@@ -34391,7 +33977,7 @@
                 <a:ea typeface="Trebuchet MS" pitchFamily="34" charset="-122"/>
                 <a:cs typeface="Trebuchet MS" pitchFamily="34" charset="-120"/>
               </a:rPr>
-              <a:t>ur</a:t>
+              <a:t>or</a:t>
             </a:r>
             <a:endParaRPr lang="en-US" sz="900" dirty="0"/>
           </a:p>
@@ -34405,7 +33991,7 @@
         </p:nvSpPr>
         <p:spPr>
           <a:xfrm>
-            <a:off x="5759577" y="4169664"/>
+            <a:off x="5254752" y="4169664"/>
             <a:ext cx="685800" cy="384048"/>
           </a:xfrm>
           <a:prstGeom prst="rect">
@@ -34432,7 +34018,7 @@
         </p:nvSpPr>
         <p:spPr>
           <a:xfrm>
-            <a:off x="5759577" y="4169664"/>
+            <a:off x="5254752" y="4169664"/>
             <a:ext cx="685800" cy="384048"/>
           </a:xfrm>
           <a:prstGeom prst="rect">
@@ -34457,7 +34043,7 @@
                 <a:ea typeface="Trebuchet MS" pitchFamily="34" charset="-122"/>
                 <a:cs typeface="Trebuchet MS" pitchFamily="34" charset="-120"/>
               </a:rPr>
-              <a:t>a</a:t>
+              <a:t>t</a:t>
             </a:r>
             <a:endParaRPr lang="en-US" sz="900" dirty="0"/>
           </a:p>
@@ -34471,7 +34057,7 @@
         </p:nvSpPr>
         <p:spPr>
           <a:xfrm>
-            <a:off x="6668262" y="4169664"/>
+            <a:off x="6062472" y="4169664"/>
             <a:ext cx="685800" cy="384048"/>
           </a:xfrm>
           <a:prstGeom prst="rect">
@@ -34498,7 +34084,7 @@
         </p:nvSpPr>
         <p:spPr>
           <a:xfrm>
-            <a:off x="6668262" y="4169664"/>
+            <a:off x="6062472" y="4169664"/>
             <a:ext cx="685800" cy="384048"/>
           </a:xfrm>
           <a:prstGeom prst="rect">
@@ -34523,7 +34109,7 @@
                 <a:ea typeface="Trebuchet MS" pitchFamily="34" charset="-122"/>
                 <a:cs typeface="Trebuchet MS" pitchFamily="34" charset="-120"/>
               </a:rPr>
-              <a:t>n</a:t>
+              <a:t>a</a:t>
             </a:r>
             <a:endParaRPr lang="en-US" sz="900" dirty="0"/>
           </a:p>
@@ -34537,7 +34123,7 @@
         </p:nvSpPr>
         <p:spPr>
           <a:xfrm>
-            <a:off x="7576947" y="4169664"/>
+            <a:off x="6870192" y="4169664"/>
             <a:ext cx="685800" cy="384048"/>
           </a:xfrm>
           <a:prstGeom prst="rect">
@@ -34564,7 +34150,7 @@
         </p:nvSpPr>
         <p:spPr>
           <a:xfrm>
-            <a:off x="7576947" y="4169664"/>
+            <a:off x="6870192" y="4169664"/>
             <a:ext cx="685800" cy="384048"/>
           </a:xfrm>
           <a:prstGeom prst="rect">
@@ -34589,6 +34175,72 @@
                 <a:ea typeface="Trebuchet MS" pitchFamily="34" charset="-122"/>
                 <a:cs typeface="Trebuchet MS" pitchFamily="34" charset="-120"/>
               </a:rPr>
+              <a:t>n</a:t>
+            </a:r>
+            <a:endParaRPr lang="en-US" sz="900" dirty="0"/>
+          </a:p>
+        </p:txBody>
+      </p:sp>
+      <p:sp>
+        <p:nvSpPr>
+          <p:cNvPr id="54" name="Shape 52"/>
+          <p:cNvSpPr/>
+          <p:nvPr/>
+        </p:nvSpPr>
+        <p:spPr>
+          <a:xfrm>
+            <a:off x="7677912" y="4169664"/>
+            <a:ext cx="685800" cy="384048"/>
+          </a:xfrm>
+          <a:prstGeom prst="rect">
+            <a:avLst>
+              <a:gd name="adj" fmla="val 9524"/>
+            </a:avLst>
+          </a:prstGeom>
+          <a:solidFill>
+            <a:srgbClr val="FFFFFF"/>
+          </a:solidFill>
+          <a:ln w="12700">
+            <a:solidFill>
+              <a:srgbClr val="DB2777"/>
+            </a:solidFill>
+            <a:prstDash val="solid"/>
+          </a:ln>
+        </p:spPr>
+      </p:sp>
+      <p:sp>
+        <p:nvSpPr>
+          <p:cNvPr id="55" name="Text 53"/>
+          <p:cNvSpPr/>
+          <p:nvPr/>
+        </p:nvSpPr>
+        <p:spPr>
+          <a:xfrm>
+            <a:off x="7677912" y="4169664"/>
+            <a:ext cx="685800" cy="384048"/>
+          </a:xfrm>
+          <a:prstGeom prst="rect">
+            <a:avLst/>
+          </a:prstGeom>
+          <a:noFill/>
+          <a:ln/>
+        </p:spPr>
+        <p:txBody>
+          <a:bodyPr wrap="square" lIns="0" tIns="0" rIns="0" bIns="0" rtlCol="0" anchor="ctr"/>
+          <a:lstStyle/>
+          <a:p>
+            <a:pPr algn="ctr" indent="0" marL="0">
+              <a:buNone/>
+            </a:pPr>
+            <a:r>
+              <a:rPr lang="en-US" sz="900" b="1" dirty="0">
+                <a:solidFill>
+                  <a:srgbClr val="9D174D"/>
+                </a:solidFill>
+                <a:latin typeface="Trebuchet MS" pitchFamily="34" charset="0"/>
+                <a:ea typeface="Trebuchet MS" pitchFamily="34" charset="-122"/>
+                <a:cs typeface="Trebuchet MS" pitchFamily="34" charset="-120"/>
+              </a:rPr>
               <a:t>ce</a:t>
             </a:r>
             <a:endParaRPr lang="en-US" sz="900" dirty="0"/>
@@ -34597,13 +34249,13 @@
       </p:sp>
       <p:sp>
         <p:nvSpPr>
-          <p:cNvPr id="54" name="Text 52"/>
-          <p:cNvSpPr/>
-          <p:nvPr/>
-        </p:nvSpPr>
-        <p:spPr>
-          <a:xfrm>
-            <a:off x="7576947" y="4572000"/>
+          <p:cNvPr id="56" name="Text 54"/>
+          <p:cNvSpPr/>
+          <p:nvPr/>
+        </p:nvSpPr>
+        <p:spPr>
+          <a:xfrm>
+            <a:off x="7677912" y="4572000"/>
             <a:ext cx="685800" cy="219456"/>
           </a:xfrm>
           <a:prstGeom prst="rect">
@@ -36799,7 +36451,7 @@
                 <a:ea typeface="Trebuchet MS" pitchFamily="34" charset="-122"/>
                 <a:cs typeface="Trebuchet MS" pitchFamily="34" charset="-120"/>
               </a:rPr>
-              <a:t>assist</a:t>
+              <a:t>import</a:t>
             </a:r>
             <a:endParaRPr lang="en-US" sz="1300" dirty="0"/>
           </a:p>
@@ -36888,7 +36540,7 @@
                 <a:ea typeface="Trebuchet MS" pitchFamily="34" charset="-122"/>
                 <a:cs typeface="Trebuchet MS" pitchFamily="34" charset="-120"/>
               </a:rPr>
-              <a:t>as-</a:t>
+              <a:t>dis-</a:t>
             </a:r>
             <a:endParaRPr lang="en-US" sz="1300" dirty="0"/>
           </a:p>
@@ -36952,7 +36604,7 @@
                 <a:ea typeface="Trebuchet MS" pitchFamily="34" charset="-122"/>
                 <a:cs typeface="Trebuchet MS" pitchFamily="34" charset="-120"/>
               </a:rPr>
-              <a:t>guid</a:t>
+              <a:t>assist</a:t>
             </a:r>
             <a:endParaRPr lang="en-US" sz="1300" dirty="0"/>
           </a:p>
@@ -37041,7 +36693,7 @@
                 <a:ea typeface="Trebuchet MS" pitchFamily="34" charset="-122"/>
                 <a:cs typeface="Trebuchet MS" pitchFamily="34" charset="-120"/>
               </a:rPr>
-              <a:t>dis-</a:t>
+              <a:t>as-</a:t>
             </a:r>
             <a:endParaRPr lang="en-US" sz="1300" dirty="0"/>
           </a:p>
@@ -37367,7 +37019,7 @@
                 <a:ea typeface="Trebuchet MS" pitchFamily="34" charset="-122"/>
                 <a:cs typeface="Trebuchet MS" pitchFamily="34" charset="-120"/>
               </a:rPr>
-              <a:t>assistance</a:t>
+              <a:t>importance</a:t>
             </a:r>
             <a:endParaRPr lang="en-US" sz="1200" dirty="0"/>
           </a:p>
@@ -37433,7 +37085,7 @@
                 <a:ea typeface="Trebuchet MS" pitchFamily="34" charset="-122"/>
                 <a:cs typeface="Trebuchet MS" pitchFamily="34" charset="-120"/>
               </a:rPr>
-              <a:t>guidance</a:t>
+              <a:t>assistance</a:t>
             </a:r>
             <a:endParaRPr lang="en-US" sz="1200" dirty="0"/>
           </a:p>
@@ -37631,7 +37283,7 @@
                 <a:ea typeface="Trebuchet MS" pitchFamily="34" charset="-122"/>
                 <a:cs typeface="Trebuchet MS" pitchFamily="34" charset="-120"/>
               </a:rPr>
-              <a:t>importance</a:t>
+              <a:t>balance</a:t>
             </a:r>
             <a:endParaRPr lang="en-US" sz="1200" dirty="0"/>
           </a:p>
@@ -37697,7 +37349,7 @@
                 <a:ea typeface="Trebuchet MS" pitchFamily="34" charset="-122"/>
                 <a:cs typeface="Trebuchet MS" pitchFamily="34" charset="-120"/>
               </a:rPr>
-              <a:t>balance</a:t>
+              <a:t>entrance</a:t>
             </a:r>
             <a:endParaRPr lang="en-US" sz="1200" dirty="0"/>
           </a:p>
@@ -38885,7 +38537,7 @@
                 <a:ea typeface="Calibri" pitchFamily="34" charset="-122"/>
                 <a:cs typeface="Calibri" pitchFamily="34" charset="-120"/>
               </a:rPr>
-              <a:t>1.  The suffix '-ance' can turn a verb into a noun, for example 'perform' becomes 'performance'.</a:t>
+              <a:t>1.  The suffix '-ance' means 'without' or 'not'.</a:t>
             </a:r>
             <a:endParaRPr lang="en-US" sz="1300" dirty="0"/>
           </a:p>
@@ -38908,11 +38560,11 @@
             </a:avLst>
           </a:prstGeom>
           <a:solidFill>
-            <a:srgbClr val="DCFCE7"/>
-          </a:solidFill>
-          <a:ln w="12700">
-            <a:solidFill>
-              <a:srgbClr val="16A34A"/>
+            <a:srgbClr val="FEE2E2"/>
+          </a:solidFill>
+          <a:ln w="12700">
+            <a:solidFill>
+              <a:srgbClr val="DC2626"/>
             </a:solidFill>
             <a:prstDash val="solid"/>
           </a:ln>
@@ -38945,13 +38597,13 @@
             <a:r>
               <a:rPr lang="en-US" sz="1100" b="1" dirty="0">
                 <a:solidFill>
-                  <a:srgbClr val="16A34A"/>
+                  <a:srgbClr val="DC2626"/>
                 </a:solidFill>
                 <a:latin typeface="Trebuchet MS" pitchFamily="34" charset="0"/>
                 <a:ea typeface="Trebuchet MS" pitchFamily="34" charset="-122"/>
                 <a:cs typeface="Trebuchet MS" pitchFamily="34" charset="-120"/>
               </a:rPr>
-              <a:t>TRUE</a:t>
+              <a:t>FALSE</a:t>
             </a:r>
             <a:endParaRPr lang="en-US" sz="1100" dirty="0"/>
           </a:p>
@@ -39024,7 +38676,7 @@
                 <a:ea typeface="Calibri" pitchFamily="34" charset="-122"/>
                 <a:cs typeface="Calibri" pitchFamily="34" charset="-120"/>
               </a:rPr>
-              <a:t>2.  The suffix '-ance' changes the meaning of a word to mean 'without' something.</a:t>
+              <a:t>2.  The suffix '-ance' comes from Latin.</a:t>
             </a:r>
             <a:endParaRPr lang="en-US" sz="1300" dirty="0"/>
           </a:p>
@@ -39047,11 +38699,11 @@
             </a:avLst>
           </a:prstGeom>
           <a:solidFill>
-            <a:srgbClr val="FEE2E2"/>
-          </a:solidFill>
-          <a:ln w="12700">
-            <a:solidFill>
-              <a:srgbClr val="DC2626"/>
+            <a:srgbClr val="DCFCE7"/>
+          </a:solidFill>
+          <a:ln w="12700">
+            <a:solidFill>
+              <a:srgbClr val="16A34A"/>
             </a:solidFill>
             <a:prstDash val="solid"/>
           </a:ln>
@@ -39084,13 +38736,13 @@
             <a:r>
               <a:rPr lang="en-US" sz="1100" b="1" dirty="0">
                 <a:solidFill>
-                  <a:srgbClr val="DC2626"/>
+                  <a:srgbClr val="16A34A"/>
                 </a:solidFill>
                 <a:latin typeface="Trebuchet MS" pitchFamily="34" charset="0"/>
                 <a:ea typeface="Trebuchet MS" pitchFamily="34" charset="-122"/>
                 <a:cs typeface="Trebuchet MS" pitchFamily="34" charset="-120"/>
               </a:rPr>
-              <a:t>FALSE</a:t>
+              <a:t>TRUE</a:t>
             </a:r>
             <a:endParaRPr lang="en-US" sz="1100" dirty="0"/>
           </a:p>
@@ -39163,7 +38815,7 @@
                 <a:ea typeface="Calibri" pitchFamily="34" charset="-122"/>
                 <a:cs typeface="Calibri" pitchFamily="34" charset="-120"/>
               </a:rPr>
-              <a:t>3.  Words ending in '-ance' are nouns that describe a state or quality.</a:t>
+              <a:t>3.  The suffix '-ance' can turn a verb like 'perform' into a noun like 'performance'.</a:t>
             </a:r>
             <a:endParaRPr lang="en-US" sz="1300" dirty="0"/>
           </a:p>
@@ -39302,7 +38954,7 @@
                 <a:ea typeface="Calibri" pitchFamily="34" charset="-122"/>
                 <a:cs typeface="Calibri" pitchFamily="34" charset="-120"/>
               </a:rPr>
-              <a:t>4.  The suffix '-ance' comes originally from Latin.</a:t>
+              <a:t>4.  Words ending in '-ance' are always adjectives.</a:t>
             </a:r>
             <a:endParaRPr lang="en-US" sz="1300" dirty="0"/>
           </a:p>
@@ -39325,11 +38977,11 @@
             </a:avLst>
           </a:prstGeom>
           <a:solidFill>
-            <a:srgbClr val="DCFCE7"/>
-          </a:solidFill>
-          <a:ln w="12700">
-            <a:solidFill>
-              <a:srgbClr val="16A34A"/>
+            <a:srgbClr val="FEE2E2"/>
+          </a:solidFill>
+          <a:ln w="12700">
+            <a:solidFill>
+              <a:srgbClr val="DC2626"/>
             </a:solidFill>
             <a:prstDash val="solid"/>
           </a:ln>
@@ -39362,13 +39014,13 @@
             <a:r>
               <a:rPr lang="en-US" sz="1100" b="1" dirty="0">
                 <a:solidFill>
-                  <a:srgbClr val="16A34A"/>
+                  <a:srgbClr val="DC2626"/>
                 </a:solidFill>
                 <a:latin typeface="Trebuchet MS" pitchFamily="34" charset="0"/>
                 <a:ea typeface="Trebuchet MS" pitchFamily="34" charset="-122"/>
                 <a:cs typeface="Trebuchet MS" pitchFamily="34" charset="-120"/>
               </a:rPr>
-              <a:t>TRUE</a:t>
+              <a:t>FALSE</a:t>
             </a:r>
             <a:endParaRPr lang="en-US" sz="1100" dirty="0"/>
           </a:p>
@@ -39441,7 +39093,7 @@
                 <a:ea typeface="Calibri" pitchFamily="34" charset="-122"/>
                 <a:cs typeface="Calibri" pitchFamily="34" charset="-120"/>
               </a:rPr>
-              <a:t>5.  Every word that ends in the letters 'a-n-c-e' contains the suffix '-ance'.</a:t>
+              <a:t>5.  '-ance' and '-ence' are related suffixes that work in a similar way.</a:t>
             </a:r>
             <a:endParaRPr lang="en-US" sz="1300" dirty="0"/>
           </a:p>
@@ -39464,11 +39116,11 @@
             </a:avLst>
           </a:prstGeom>
           <a:solidFill>
-            <a:srgbClr val="FEE2E2"/>
-          </a:solidFill>
-          <a:ln w="12700">
-            <a:solidFill>
-              <a:srgbClr val="DC2626"/>
+            <a:srgbClr val="DCFCE7"/>
+          </a:solidFill>
+          <a:ln w="12700">
+            <a:solidFill>
+              <a:srgbClr val="16A34A"/>
             </a:solidFill>
             <a:prstDash val="solid"/>
           </a:ln>
@@ -39501,13 +39153,13 @@
             <a:r>
               <a:rPr lang="en-US" sz="1100" b="1" dirty="0">
                 <a:solidFill>
-                  <a:srgbClr val="DC2626"/>
+                  <a:srgbClr val="16A34A"/>
                 </a:solidFill>
                 <a:latin typeface="Trebuchet MS" pitchFamily="34" charset="0"/>
                 <a:ea typeface="Trebuchet MS" pitchFamily="34" charset="-122"/>
                 <a:cs typeface="Trebuchet MS" pitchFamily="34" charset="-120"/>
               </a:rPr>
-              <a:t>FALSE</a:t>
+              <a:t>TRUE</a:t>
             </a:r>
             <a:endParaRPr lang="en-US" sz="1100" dirty="0"/>
           </a:p>
@@ -40212,7 +39864,7 @@
                 <a:ea typeface="Trebuchet MS" pitchFamily="34" charset="-122"/>
                 <a:cs typeface="Trebuchet MS" pitchFamily="34" charset="-120"/>
               </a:rPr>
-              <a:t>assistance</a:t>
+              <a:t>importance</a:t>
             </a:r>
             <a:endParaRPr lang="en-US" sz="1300" dirty="0"/>
           </a:p>
@@ -40278,7 +39930,7 @@
                 <a:ea typeface="Trebuchet MS" pitchFamily="34" charset="-122"/>
                 <a:cs typeface="Trebuchet MS" pitchFamily="34" charset="-120"/>
               </a:rPr>
-              <a:t>guidance</a:t>
+              <a:t>assistance</a:t>
             </a:r>
             <a:endParaRPr lang="en-US" sz="1300" dirty="0"/>
           </a:p>
@@ -40476,7 +40128,7 @@
                 <a:ea typeface="Trebuchet MS" pitchFamily="34" charset="-122"/>
                 <a:cs typeface="Trebuchet MS" pitchFamily="34" charset="-120"/>
               </a:rPr>
-              <a:t>importance</a:t>
+              <a:t>balance</a:t>
             </a:r>
             <a:endParaRPr lang="en-US" sz="1300" dirty="0"/>
           </a:p>
@@ -41478,7 +41130,7 @@
                 <a:ea typeface="Trebuchet MS" pitchFamily="34" charset="-122"/>
                 <a:cs typeface="Trebuchet MS" pitchFamily="34" charset="-120"/>
               </a:rPr>
-              <a:t>assist</a:t>
+              <a:t>import</a:t>
             </a:r>
             <a:endParaRPr lang="en-US" sz="1300" dirty="0"/>
           </a:p>
@@ -41567,7 +41219,7 @@
                 <a:ea typeface="Trebuchet MS" pitchFamily="34" charset="-122"/>
                 <a:cs typeface="Trebuchet MS" pitchFamily="34" charset="-120"/>
               </a:rPr>
-              <a:t>as-</a:t>
+              <a:t>dis-</a:t>
             </a:r>
             <a:endParaRPr lang="en-US" sz="1300" dirty="0"/>
           </a:p>
@@ -41631,7 +41283,7 @@
                 <a:ea typeface="Trebuchet MS" pitchFamily="34" charset="-122"/>
                 <a:cs typeface="Trebuchet MS" pitchFamily="34" charset="-120"/>
               </a:rPr>
-              <a:t>guid</a:t>
+              <a:t>assist</a:t>
             </a:r>
             <a:endParaRPr lang="en-US" sz="1300" dirty="0"/>
           </a:p>
@@ -41720,7 +41372,7 @@
                 <a:ea typeface="Trebuchet MS" pitchFamily="34" charset="-122"/>
                 <a:cs typeface="Trebuchet MS" pitchFamily="34" charset="-120"/>
               </a:rPr>
-              <a:t>dis-</a:t>
+              <a:t>as-</a:t>
             </a:r>
             <a:endParaRPr lang="en-US" sz="1300" dirty="0"/>
           </a:p>
@@ -42720,7 +42372,7 @@
                 <a:ea typeface="Calibri" pitchFamily="34" charset="-122"/>
                 <a:cs typeface="Calibri" pitchFamily="34" charset="-120"/>
               </a:rPr>
-              <a:t>The ability to accept and respect things or people that are different from you.</a:t>
+              <a:t>The ability to accept or put up with things that are different or difficult.</a:t>
             </a:r>
             <a:endParaRPr lang="en-US" sz="1200" dirty="0"/>
           </a:p>
@@ -42859,7 +42511,7 @@
                 <a:ea typeface="Calibri" pitchFamily="34" charset="-122"/>
                 <a:cs typeface="Calibri" pitchFamily="34" charset="-120"/>
               </a:rPr>
-              <a:t>Advice or direction that helps someone know what to do.</a:t>
+              <a:t>Help or support given to someone who needs it.</a:t>
             </a:r>
             <a:endParaRPr lang="en-US" sz="1200" dirty="0"/>
           </a:p>
@@ -42932,7 +42584,7 @@
                 <a:ea typeface="Trebuchet MS" pitchFamily="34" charset="-122"/>
                 <a:cs typeface="Trebuchet MS" pitchFamily="34" charset="-120"/>
               </a:rPr>
-              <a:t>assistance</a:t>
+              <a:t>importance</a:t>
             </a:r>
             <a:endParaRPr lang="en-US" sz="1200" dirty="0"/>
           </a:p>
@@ -43071,7 +42723,7 @@
                 <a:ea typeface="Trebuchet MS" pitchFamily="34" charset="-122"/>
                 <a:cs typeface="Trebuchet MS" pitchFamily="34" charset="-120"/>
               </a:rPr>
-              <a:t>guidance</a:t>
+              <a:t>assistance</a:t>
             </a:r>
             <a:endParaRPr lang="en-US" sz="1200" dirty="0"/>
           </a:p>
@@ -43137,7 +42789,7 @@
                 <a:ea typeface="Calibri" pitchFamily="34" charset="-122"/>
                 <a:cs typeface="Calibri" pitchFamily="34" charset="-120"/>
               </a:rPr>
-              <a:t>Help or support given to someone who needs it.</a:t>
+              <a:t>The quality of being very significant or mattering a great deal.</a:t>
             </a:r>
             <a:endParaRPr lang="en-US" sz="1200" dirty="0"/>
           </a:p>
@@ -43276,7 +42928,7 @@
                 <a:ea typeface="Calibri" pitchFamily="34" charset="-122"/>
                 <a:cs typeface="Calibri" pitchFamily="34" charset="-120"/>
               </a:rPr>
-              <a:t>The quality of being very valuable, significant, or worth caring about.</a:t>
+              <a:t>The ability to stay steady without falling over.</a:t>
             </a:r>
             <a:endParaRPr lang="en-US" sz="1200" dirty="0"/>
           </a:p>
@@ -43415,7 +43067,7 @@
                 <a:ea typeface="Calibri" pitchFamily="34" charset="-122"/>
                 <a:cs typeface="Calibri" pitchFamily="34" charset="-120"/>
               </a:rPr>
-              <a:t>The act of performing or presenting something, like a play or dance, in front of an audience.</a:t>
+              <a:t>The act of performing or presenting something, like a play or concert.</a:t>
             </a:r>
             <a:endParaRPr lang="en-US" sz="1200" dirty="0"/>
           </a:p>
@@ -43488,7 +43140,7 @@
                 <a:ea typeface="Trebuchet MS" pitchFamily="34" charset="-122"/>
                 <a:cs typeface="Trebuchet MS" pitchFamily="34" charset="-120"/>
               </a:rPr>
-              <a:t>importance</a:t>
+              <a:t>balance</a:t>
             </a:r>
             <a:endParaRPr lang="en-US" sz="1200" dirty="0"/>
           </a:p>
@@ -43554,7 +43206,7 @@
                 <a:ea typeface="Calibri" pitchFamily="34" charset="-122"/>
                 <a:cs typeface="Calibri" pitchFamily="34" charset="-120"/>
               </a:rPr>
-              <a:t>The way something or someone looks, or the act of showing up somewhere.</a:t>
+              <a:t>The way something or someone looks to others.</a:t>
             </a:r>
             <a:endParaRPr lang="en-US" sz="1200" dirty="0"/>
           </a:p>
@@ -44049,7 +43701,7 @@
                 <a:ea typeface="Calibri" pitchFamily="34" charset="-122"/>
                 <a:cs typeface="Calibri" pitchFamily="34" charset="-120"/>
               </a:rPr>
-              <a:t>The students practised their dance performance for the school concert.</a:t>
+              <a:t>The dancer's performance was so amazing that the whole audience stood up and cheered.</a:t>
             </a:r>
             <a:endParaRPr lang="en-US" sz="1500" dirty="0"/>
           </a:p>
@@ -44213,7 +43865,7 @@
                 <a:ea typeface="Calibri" pitchFamily="34" charset="-122"/>
                 <a:cs typeface="Calibri" pitchFamily="34" charset="-120"/>
               </a:rPr>
-              <a:t>With guidance from her teacher, Maya improved her writing greatly.</a:t>
+              <a:t>It is important to show tolerance and kindness to everyone at our school.</a:t>
             </a:r>
             <a:endParaRPr lang="en-US" sz="1500" dirty="0"/>
           </a:p>
@@ -44377,7 +44029,7 @@
                 <a:ea typeface="Calibri" pitchFamily="34" charset="-122"/>
                 <a:cs typeface="Calibri" pitchFamily="34" charset="-120"/>
               </a:rPr>
-              <a:t>Showing tolerance and kindness towards others is very important.</a:t>
+              <a:t>Mia kept her balance as she carefully walked across the narrow log.</a:t>
             </a:r>
             <a:endParaRPr lang="en-US" sz="1500" dirty="0"/>
           </a:p>
